--- a/presentation/ModelBuilder_4.2_Presentacion.pptx
+++ b/presentation/ModelBuilder_4.2_Presentacion.pptx
@@ -4131,8 +4131,8 @@
         </p:blipFill>
         <p:spPr>
           <a:xfrm>
-            <a:off x="777240" y="1512383"/>
-            <a:ext cx="10637215" cy="4043545"/>
+            <a:off x="777240" y="1508484"/>
+            <a:ext cx="10637215" cy="4051343"/>
           </a:xfrm>
           <a:prstGeom prst="rect">
             <a:avLst/>
@@ -4259,8 +4259,8 @@
         </p:blipFill>
         <p:spPr>
           <a:xfrm>
-            <a:off x="1394192" y="1170432"/>
-            <a:ext cx="9403310" cy="4727448"/>
+            <a:off x="1992294" y="1170432"/>
+            <a:ext cx="8207107" cy="4727448"/>
           </a:xfrm>
           <a:prstGeom prst="rect">
             <a:avLst/>

--- a/presentation/ModelBuilder_4.2_Presentacion.pptx
+++ b/presentation/ModelBuilder_4.2_Presentacion.pptx
@@ -3924,7 +3924,7 @@
                 </a:solidFill>
                 <a:latin typeface="Arial"/>
               </a:rPr>
-              <a:t>Aquí se ven los tres avisos nuevos: un factor licenciado todavía neutro, la ecuación 9 optimista y N_W deducido de R.</a:t>
+              <a:t>El diálogo informa el resultado, no lo adorna: sin errores, el recuento de advertencias y el recordatorio de que el cálculo resistente sigue etiquetado CORE-SCREENING.</a:t>
             </a:r>
           </a:p>
           <a:p>
@@ -3943,7 +3943,7 @@
                 </a:solidFill>
                 <a:latin typeface="Arial"/>
               </a:rPr>
-              <a:t>Un error bloquea la construcción antes de tocar Abaqus; una advertencia informa y queda registrada.</a:t>
+              <a:t>Un error bloquea la construcción antes de tocar Abaqus; una advertencia informa y queda registrada en la auditoría.</a:t>
             </a:r>
           </a:p>
         </p:txBody>
@@ -4006,7 +4006,7 @@
                 </a:solidFill>
                 <a:latin typeface="Arial"/>
               </a:rPr>
-              <a:t>0 errores y 3 advertencias en la configuración por defecto.</a:t>
+              <a:t>Por defecto: 0 errores y 3 advertencias — un factor licenciado todavía neutro, la ecuación 9 optimista y una relación de aspecto axial alta esperada en la entalla.</a:t>
             </a:r>
           </a:p>
         </p:txBody>

--- a/presentation/ModelBuilder_4.2_Presentacion.pptx
+++ b/presentation/ModelBuilder_4.2_Presentacion.pptx
@@ -34,6 +34,16 @@
     <p:sldId id="282" r:id="rId33"/>
     <p:sldId id="283" r:id="rId34"/>
     <p:sldId id="284" r:id="rId35"/>
+    <p:sldId id="285" r:id="rId36"/>
+    <p:sldId id="286" r:id="rId37"/>
+    <p:sldId id="287" r:id="rId38"/>
+    <p:sldId id="288" r:id="rId39"/>
+    <p:sldId id="289" r:id="rId40"/>
+    <p:sldId id="290" r:id="rId41"/>
+    <p:sldId id="291" r:id="rId42"/>
+    <p:sldId id="292" r:id="rId43"/>
+    <p:sldId id="293" r:id="rId44"/>
+    <p:sldId id="294" r:id="rId45"/>
   </p:sldIdLst>
   <p:sldSz cx="12191695" cy="6858000" type="screen4x3"/>
   <p:notesSz cx="6858000" cy="9144000"/>
@@ -4320,7 +4330,7 @@
     <p:bg>
       <p:bgPr>
         <a:solidFill>
-          <a:srgbClr val="0A0A0C"/>
+          <a:srgbClr val="FFFFFF"/>
         </a:solidFill>
         <a:effectLst/>
       </p:bgPr>
@@ -4362,11 +4372,11 @@
             <a:r>
               <a:rPr sz="1150" b="1">
                 <a:solidFill>
-                  <a:srgbClr val="2997FF"/>
-                </a:solidFill>
-                <a:latin typeface="Arial"/>
-              </a:rPr>
-              <a:t>EL RESULTADO</a:t>
+                  <a:srgbClr val="0071E3"/>
+                </a:solidFill>
+                <a:latin typeface="Arial"/>
+              </a:rPr>
+              <a:t>PUNTOS DE PARTIDA</a:t>
             </a:r>
           </a:p>
         </p:txBody>
@@ -4379,121 +4389,742 @@
         </p:nvSpPr>
         <p:spPr>
           <a:xfrm>
-            <a:off x="777240" y="1024128"/>
-            <a:ext cx="3840480" cy="4206240"/>
-          </a:xfrm>
-          <a:prstGeom prst="rect">
-            <a:avLst/>
-          </a:prstGeom>
-          <a:noFill/>
-        </p:spPr>
-        <p:txBody>
-          <a:bodyPr wrap="square" anchor="t" lIns="0" rIns="0" tIns="0" bIns="0">
-            <a:spAutoFit/>
-          </a:bodyPr>
-          <a:lstStyle/>
-          <a:p>
-            <a:pPr algn="l">
-              <a:lnSpc>
-                <a:spcPct val="100000"/>
-              </a:lnSpc>
-            </a:pPr>
-            <a:r>
-              <a:rPr sz="2800" b="1">
-                <a:solidFill>
-                  <a:srgbClr val="FFFFFF"/>
-                </a:solidFill>
-                <a:latin typeface="Arial"/>
-              </a:rPr>
-              <a:t>Sólidos, no cascarones</a:t>
-            </a:r>
-          </a:p>
-          <a:p>
-            <a:pPr algn="l">
-              <a:lnSpc>
-                <a:spcPct val="135000"/>
+            <a:off x="777240" y="932688"/>
+            <a:ext cx="10637215" cy="914400"/>
+          </a:xfrm>
+          <a:prstGeom prst="rect">
+            <a:avLst/>
+          </a:prstGeom>
+          <a:noFill/>
+        </p:spPr>
+        <p:txBody>
+          <a:bodyPr wrap="square" anchor="t" lIns="0" rIns="0" tIns="0" bIns="0">
+            <a:spAutoFit/>
+          </a:bodyPr>
+          <a:lstStyle/>
+          <a:p>
+            <a:pPr algn="l">
+              <a:lnSpc>
+                <a:spcPct val="95000"/>
+              </a:lnSpc>
+            </a:pPr>
+            <a:r>
+              <a:rPr sz="3000" b="1">
+                <a:solidFill>
+                  <a:srgbClr val="1D1D1F"/>
+                </a:solidFill>
+                <a:latin typeface="Arial"/>
+              </a:rPr>
+              <a:t>Quince presets, ninguno que salte la validación</a:t>
+            </a:r>
+          </a:p>
+        </p:txBody>
+      </p:sp>
+      <p:sp>
+        <p:nvSpPr>
+          <p:cNvPr id="4" name="TextBox 3"/>
+          <p:cNvSpPr txBox="1"/>
+          <p:nvPr/>
+        </p:nvSpPr>
+        <p:spPr>
+          <a:xfrm>
+            <a:off x="777240" y="1700784"/>
+            <a:ext cx="9509760" cy="822960"/>
+          </a:xfrm>
+          <a:prstGeom prst="rect">
+            <a:avLst/>
+          </a:prstGeom>
+          <a:noFill/>
+        </p:spPr>
+        <p:txBody>
+          <a:bodyPr wrap="square" anchor="t" lIns="0" rIns="0" tIns="0" bIns="0">
+            <a:spAutoFit/>
+          </a:bodyPr>
+          <a:lstStyle/>
+          <a:p>
+            <a:pPr algn="l">
+              <a:lnSpc>
+                <a:spcPct val="125000"/>
+              </a:lnSpc>
+            </a:pPr>
+            <a:r>
+              <a:rPr sz="1450" b="0">
+                <a:solidFill>
+                  <a:srgbClr val="6E6E73"/>
+                </a:solidFill>
+                <a:latin typeface="Arial"/>
+              </a:rPr>
+              <a:t>Un preset sólo fija parámetros. Después se fusiona sobre los valores por defecto y se vuelve a derivar y validar como si se hubiera teclado a mano.</a:t>
+            </a:r>
+          </a:p>
+        </p:txBody>
+      </p:sp>
+      <p:sp>
+        <p:nvSpPr>
+          <p:cNvPr id="5" name="Rounded Rectangle 4"/>
+          <p:cNvSpPr/>
+          <p:nvPr/>
+        </p:nvSpPr>
+        <p:spPr>
+          <a:xfrm>
+            <a:off x="777240" y="2487168"/>
+            <a:ext cx="3411626" cy="1664208"/>
+          </a:xfrm>
+          <a:prstGeom prst="roundRect">
+            <a:avLst>
+              <a:gd name="adj" fmla="val 3500"/>
+            </a:avLst>
+          </a:prstGeom>
+          <a:solidFill>
+            <a:srgbClr val="F5F5F7"/>
+          </a:solidFill>
+          <a:ln>
+            <a:noFill/>
+          </a:ln>
+          <a:effectLst/>
+        </p:spPr>
+        <p:style>
+          <a:lnRef idx="1">
+            <a:schemeClr val="accent1"/>
+          </a:lnRef>
+          <a:fillRef idx="3">
+            <a:schemeClr val="accent1"/>
+          </a:fillRef>
+          <a:effectRef idx="2">
+            <a:schemeClr val="accent1"/>
+          </a:effectRef>
+          <a:fontRef idx="minor">
+            <a:schemeClr val="lt1"/>
+          </a:fontRef>
+        </p:style>
+        <p:txBody>
+          <a:bodyPr rtlCol="0" anchor="ctr"/>
+          <a:lstStyle/>
+          <a:p>
+            <a:pPr algn="ctr"/>
+          </a:p>
+        </p:txBody>
+      </p:sp>
+      <p:sp>
+        <p:nvSpPr>
+          <p:cNvPr id="6" name="TextBox 5"/>
+          <p:cNvSpPr txBox="1"/>
+          <p:nvPr/>
+        </p:nvSpPr>
+        <p:spPr>
+          <a:xfrm>
+            <a:off x="996696" y="2670048"/>
+            <a:ext cx="2972714" cy="1371600"/>
+          </a:xfrm>
+          <a:prstGeom prst="rect">
+            <a:avLst/>
+          </a:prstGeom>
+          <a:noFill/>
+        </p:spPr>
+        <p:txBody>
+          <a:bodyPr wrap="square" anchor="t" lIns="0" rIns="0" tIns="0" bIns="0">
+            <a:spAutoFit/>
+          </a:bodyPr>
+          <a:lstStyle/>
+          <a:p>
+            <a:pPr algn="l">
+              <a:lnSpc>
+                <a:spcPct val="110000"/>
+              </a:lnSpc>
+            </a:pPr>
+            <a:r>
+              <a:rPr sz="1350" b="1">
+                <a:solidFill>
+                  <a:srgbClr val="1D1D1F"/>
+                </a:solidFill>
+                <a:latin typeface="Arial"/>
+              </a:rPr>
+              <a:t>5 de geometría y análisis</a:t>
+            </a:r>
+          </a:p>
+          <a:p>
+            <a:pPr algn="l">
+              <a:lnSpc>
+                <a:spcPct val="130000"/>
               </a:lnSpc>
               <a:spcBef>
-                <a:spcPts val="1300"/>
+                <a:spcPts val="600"/>
               </a:spcBef>
             </a:pPr>
             <a:r>
-              <a:rPr sz="1250" b="0">
-                <a:solidFill>
-                  <a:srgbClr val="9E9EA7"/>
-                </a:solidFill>
-                <a:latin typeface="Arial"/>
-              </a:rPr>
-              <a:t>Eje, chaveta y cubo se construyen como volúmenes independientes y se ensamblan con las tolerancias de la norma.</a:t>
-            </a:r>
-          </a:p>
-          <a:p>
-            <a:pPr algn="l">
-              <a:lnSpc>
-                <a:spcPct val="135000"/>
+              <a:rPr sz="1050" b="0">
+                <a:solidFill>
+                  <a:srgbClr val="6E6E73"/>
+                </a:solidFill>
+                <a:latin typeface="Arial"/>
+              </a:rPr>
+              <a:t>D25 pequeña, D40 validada por defecto, D50 siguiente banda DIN, D40 cuadrática C3D20 y D40 con análisis de torsión.</a:t>
+            </a:r>
+          </a:p>
+        </p:txBody>
+      </p:sp>
+      <p:sp>
+        <p:nvSpPr>
+          <p:cNvPr id="7" name="Rounded Rectangle 6"/>
+          <p:cNvSpPr/>
+          <p:nvPr/>
+        </p:nvSpPr>
+        <p:spPr>
+          <a:xfrm>
+            <a:off x="4390034" y="2487168"/>
+            <a:ext cx="3411626" cy="1664208"/>
+          </a:xfrm>
+          <a:prstGeom prst="roundRect">
+            <a:avLst>
+              <a:gd name="adj" fmla="val 3500"/>
+            </a:avLst>
+          </a:prstGeom>
+          <a:solidFill>
+            <a:srgbClr val="F5F5F7"/>
+          </a:solidFill>
+          <a:ln>
+            <a:noFill/>
+          </a:ln>
+          <a:effectLst/>
+        </p:spPr>
+        <p:style>
+          <a:lnRef idx="1">
+            <a:schemeClr val="accent1"/>
+          </a:lnRef>
+          <a:fillRef idx="3">
+            <a:schemeClr val="accent1"/>
+          </a:fillRef>
+          <a:effectRef idx="2">
+            <a:schemeClr val="accent1"/>
+          </a:effectRef>
+          <a:fontRef idx="minor">
+            <a:schemeClr val="lt1"/>
+          </a:fontRef>
+        </p:style>
+        <p:txBody>
+          <a:bodyPr rtlCol="0" anchor="ctr"/>
+          <a:lstStyle/>
+          <a:p>
+            <a:pPr algn="ctr"/>
+          </a:p>
+        </p:txBody>
+      </p:sp>
+      <p:sp>
+        <p:nvSpPr>
+          <p:cNvPr id="8" name="TextBox 7"/>
+          <p:cNvSpPr txBox="1"/>
+          <p:nvPr/>
+        </p:nvSpPr>
+        <p:spPr>
+          <a:xfrm>
+            <a:off x="4609490" y="2670048"/>
+            <a:ext cx="2972714" cy="1371600"/>
+          </a:xfrm>
+          <a:prstGeom prst="rect">
+            <a:avLst/>
+          </a:prstGeom>
+          <a:noFill/>
+        </p:spPr>
+        <p:txBody>
+          <a:bodyPr wrap="square" anchor="t" lIns="0" rIns="0" tIns="0" bIns="0">
+            <a:spAutoFit/>
+          </a:bodyPr>
+          <a:lstStyle/>
+          <a:p>
+            <a:pPr algn="l">
+              <a:lnSpc>
+                <a:spcPct val="110000"/>
+              </a:lnSpc>
+            </a:pPr>
+            <a:r>
+              <a:rPr sz="1350" b="1">
+                <a:solidFill>
+                  <a:srgbClr val="1D1D1F"/>
+                </a:solidFill>
+                <a:latin typeface="Arial"/>
+              </a:rPr>
+              <a:t>8 de malla</a:t>
+            </a:r>
+          </a:p>
+          <a:p>
+            <a:pPr algn="l">
+              <a:lnSpc>
+                <a:spcPct val="130000"/>
               </a:lnSpc>
               <a:spcBef>
-                <a:spcPts val="1300"/>
+                <a:spcPts val="600"/>
               </a:spcBef>
             </a:pPr>
             <a:r>
-              <a:rPr sz="1250" b="0">
-                <a:solidFill>
-                  <a:srgbClr val="9E9EA7"/>
-                </a:solidFill>
-                <a:latin typeface="Arial"/>
-              </a:rPr>
-              <a:t>La malla es hexaédrica y coincidente en las interfaces que transmiten carga.</a:t>
-            </a:r>
-          </a:p>
-          <a:p>
-            <a:pPr algn="l">
-              <a:lnSpc>
-                <a:spcPct val="135000"/>
+              <a:rPr sz="1050" b="0">
+                <a:solidFill>
+                  <a:srgbClr val="6E6E73"/>
+                </a:solidFill>
+                <a:latin typeface="Arial"/>
+              </a:rPr>
+              <a:t>Una por plantilla: hex certificada, híbrida FVA Método A, equilibrada, calidad crítica, vista rápida, hex dominante, precisión cuadrática y respaldo robusto.</a:t>
+            </a:r>
+          </a:p>
+        </p:txBody>
+      </p:sp>
+      <p:sp>
+        <p:nvSpPr>
+          <p:cNvPr id="9" name="Rounded Rectangle 8"/>
+          <p:cNvSpPr/>
+          <p:nvPr/>
+        </p:nvSpPr>
+        <p:spPr>
+          <a:xfrm>
+            <a:off x="8002828" y="2487168"/>
+            <a:ext cx="3411626" cy="1664208"/>
+          </a:xfrm>
+          <a:prstGeom prst="roundRect">
+            <a:avLst>
+              <a:gd name="adj" fmla="val 3500"/>
+            </a:avLst>
+          </a:prstGeom>
+          <a:solidFill>
+            <a:srgbClr val="F5F5F7"/>
+          </a:solidFill>
+          <a:ln>
+            <a:noFill/>
+          </a:ln>
+          <a:effectLst/>
+        </p:spPr>
+        <p:style>
+          <a:lnRef idx="1">
+            <a:schemeClr val="accent1"/>
+          </a:lnRef>
+          <a:fillRef idx="3">
+            <a:schemeClr val="accent1"/>
+          </a:fillRef>
+          <a:effectRef idx="2">
+            <a:schemeClr val="accent1"/>
+          </a:effectRef>
+          <a:fontRef idx="minor">
+            <a:schemeClr val="lt1"/>
+          </a:fontRef>
+        </p:style>
+        <p:txBody>
+          <a:bodyPr rtlCol="0" anchor="ctr"/>
+          <a:lstStyle/>
+          <a:p>
+            <a:pPr algn="ctr"/>
+          </a:p>
+        </p:txBody>
+      </p:sp>
+      <p:sp>
+        <p:nvSpPr>
+          <p:cNvPr id="10" name="TextBox 9"/>
+          <p:cNvSpPr txBox="1"/>
+          <p:nvPr/>
+        </p:nvSpPr>
+        <p:spPr>
+          <a:xfrm>
+            <a:off x="8222284" y="2670048"/>
+            <a:ext cx="2972714" cy="1371600"/>
+          </a:xfrm>
+          <a:prstGeom prst="rect">
+            <a:avLst/>
+          </a:prstGeom>
+          <a:noFill/>
+        </p:spPr>
+        <p:txBody>
+          <a:bodyPr wrap="square" anchor="t" lIns="0" rIns="0" tIns="0" bIns="0">
+            <a:spAutoFit/>
+          </a:bodyPr>
+          <a:lstStyle/>
+          <a:p>
+            <a:pPr algn="l">
+              <a:lnSpc>
+                <a:spcPct val="110000"/>
+              </a:lnSpc>
+            </a:pPr>
+            <a:r>
+              <a:rPr sz="1350" b="1">
+                <a:solidFill>
+                  <a:srgbClr val="1D1D1F"/>
+                </a:solidFill>
+                <a:latin typeface="Arial"/>
+              </a:rPr>
+              <a:t>2 de investigación FVA</a:t>
+            </a:r>
+          </a:p>
+          <a:p>
+            <a:pPr algn="l">
+              <a:lnSpc>
+                <a:spcPct val="130000"/>
               </a:lnSpc>
               <a:spcBef>
-                <a:spcPts val="1300"/>
+                <a:spcPts val="600"/>
               </a:spcBef>
             </a:pPr>
             <a:r>
-              <a:rPr sz="1250" b="0">
-                <a:solidFill>
-                  <a:srgbClr val="9E9EA7"/>
-                </a:solidFill>
-                <a:latin typeface="Arial"/>
-              </a:rPr>
-              <a:t>La captura es la imagen que el propio motor guarda en screenshots/ al terminar.</a:t>
-            </a:r>
-          </a:p>
-        </p:txBody>
-      </p:sp>
-      <p:pic>
-        <p:nvPicPr>
-          <p:cNvPr id="4" name="Picture 3" descr="model_assembly_hex.png"/>
-          <p:cNvPicPr>
-            <a:picLocks noChangeAspect="1"/>
-          </p:cNvPicPr>
-          <p:nvPr/>
-        </p:nvPicPr>
-        <p:blipFill>
-          <a:blip r:embed="rId2"/>
-          <a:stretch>
-            <a:fillRect/>
-          </a:stretch>
-        </p:blipFill>
-        <p:spPr>
-          <a:xfrm>
-            <a:off x="5071897" y="685800"/>
-            <a:ext cx="6406845" cy="5486400"/>
-          </a:xfrm>
-          <a:prstGeom prst="rect">
-            <a:avLst/>
-          </a:prstGeom>
-        </p:spPr>
-      </p:pic>
-      <p:sp>
-        <p:nvSpPr>
-          <p:cNvPr id="5" name="TextBox 4"/>
+              <a:rPr sz="1050" b="0">
+                <a:solidFill>
+                  <a:srgbClr val="6E6E73"/>
+                </a:solidFill>
+                <a:latin typeface="Arial"/>
+              </a:rPr>
+              <a:t>D40 pre-solve de 1 ciclo y Método A D40 con malla coincidente de 20 ciclos. Las dos con el solver deliberadamente apagado.</a:t>
+            </a:r>
+          </a:p>
+        </p:txBody>
+      </p:sp>
+      <p:sp>
+        <p:nvSpPr>
+          <p:cNvPr id="11" name="Rounded Rectangle 10"/>
+          <p:cNvSpPr/>
+          <p:nvPr/>
+        </p:nvSpPr>
+        <p:spPr>
+          <a:xfrm>
+            <a:off x="777240" y="4334256"/>
+            <a:ext cx="3411626" cy="1664208"/>
+          </a:xfrm>
+          <a:prstGeom prst="roundRect">
+            <a:avLst>
+              <a:gd name="adj" fmla="val 3500"/>
+            </a:avLst>
+          </a:prstGeom>
+          <a:solidFill>
+            <a:srgbClr val="F5F5F7"/>
+          </a:solidFill>
+          <a:ln>
+            <a:noFill/>
+          </a:ln>
+          <a:effectLst/>
+        </p:spPr>
+        <p:style>
+          <a:lnRef idx="1">
+            <a:schemeClr val="accent1"/>
+          </a:lnRef>
+          <a:fillRef idx="3">
+            <a:schemeClr val="accent1"/>
+          </a:fillRef>
+          <a:effectRef idx="2">
+            <a:schemeClr val="accent1"/>
+          </a:effectRef>
+          <a:fontRef idx="minor">
+            <a:schemeClr val="lt1"/>
+          </a:fontRef>
+        </p:style>
+        <p:txBody>
+          <a:bodyPr rtlCol="0" anchor="ctr"/>
+          <a:lstStyle/>
+          <a:p>
+            <a:pPr algn="ctr"/>
+          </a:p>
+        </p:txBody>
+      </p:sp>
+      <p:sp>
+        <p:nvSpPr>
+          <p:cNvPr id="12" name="TextBox 11"/>
+          <p:cNvSpPr txBox="1"/>
+          <p:nvPr/>
+        </p:nvSpPr>
+        <p:spPr>
+          <a:xfrm>
+            <a:off x="996696" y="4517136"/>
+            <a:ext cx="2972714" cy="1371600"/>
+          </a:xfrm>
+          <a:prstGeom prst="rect">
+            <a:avLst/>
+          </a:prstGeom>
+          <a:noFill/>
+        </p:spPr>
+        <p:txBody>
+          <a:bodyPr wrap="square" anchor="t" lIns="0" rIns="0" tIns="0" bIns="0">
+            <a:spAutoFit/>
+          </a:bodyPr>
+          <a:lstStyle/>
+          <a:p>
+            <a:pPr algn="l">
+              <a:lnSpc>
+                <a:spcPct val="110000"/>
+              </a:lnSpc>
+            </a:pPr>
+            <a:r>
+              <a:rPr sz="1350" b="1">
+                <a:solidFill>
+                  <a:srgbClr val="1D1D1F"/>
+                </a:solidFill>
+                <a:latin typeface="Arial"/>
+              </a:rPr>
+              <a:t>Un preset no es un atajo</a:t>
+            </a:r>
+          </a:p>
+          <a:p>
+            <a:pPr algn="l">
+              <a:lnSpc>
+                <a:spcPct val="130000"/>
+              </a:lnSpc>
+              <a:spcBef>
+                <a:spcPts val="600"/>
+              </a:spcBef>
+            </a:pPr>
+            <a:r>
+              <a:rPr sz="1050" b="0">
+                <a:solidFill>
+                  <a:srgbClr val="6E6E73"/>
+                </a:solidFill>
+                <a:latin typeface="Arial"/>
+              </a:rPr>
+              <a:t>Pasa por las mismas puertas: si el resultado sale del sobre normativo, el error bloquea igual.</a:t>
+            </a:r>
+          </a:p>
+        </p:txBody>
+      </p:sp>
+      <p:sp>
+        <p:nvSpPr>
+          <p:cNvPr id="13" name="Rounded Rectangle 12"/>
+          <p:cNvSpPr/>
+          <p:nvPr/>
+        </p:nvSpPr>
+        <p:spPr>
+          <a:xfrm>
+            <a:off x="4390034" y="4334256"/>
+            <a:ext cx="3411626" cy="1664208"/>
+          </a:xfrm>
+          <a:prstGeom prst="roundRect">
+            <a:avLst>
+              <a:gd name="adj" fmla="val 3500"/>
+            </a:avLst>
+          </a:prstGeom>
+          <a:solidFill>
+            <a:srgbClr val="F5F5F7"/>
+          </a:solidFill>
+          <a:ln>
+            <a:noFill/>
+          </a:ln>
+          <a:effectLst/>
+        </p:spPr>
+        <p:style>
+          <a:lnRef idx="1">
+            <a:schemeClr val="accent1"/>
+          </a:lnRef>
+          <a:fillRef idx="3">
+            <a:schemeClr val="accent1"/>
+          </a:fillRef>
+          <a:effectRef idx="2">
+            <a:schemeClr val="accent1"/>
+          </a:effectRef>
+          <a:fontRef idx="minor">
+            <a:schemeClr val="lt1"/>
+          </a:fontRef>
+        </p:style>
+        <p:txBody>
+          <a:bodyPr rtlCol="0" anchor="ctr"/>
+          <a:lstStyle/>
+          <a:p>
+            <a:pPr algn="ctr"/>
+          </a:p>
+        </p:txBody>
+      </p:sp>
+      <p:sp>
+        <p:nvSpPr>
+          <p:cNvPr id="14" name="TextBox 13"/>
+          <p:cNvSpPr txBox="1"/>
+          <p:nvPr/>
+        </p:nvSpPr>
+        <p:spPr>
+          <a:xfrm>
+            <a:off x="4609490" y="4517136"/>
+            <a:ext cx="2972714" cy="1371600"/>
+          </a:xfrm>
+          <a:prstGeom prst="rect">
+            <a:avLst/>
+          </a:prstGeom>
+          <a:noFill/>
+        </p:spPr>
+        <p:txBody>
+          <a:bodyPr wrap="square" anchor="t" lIns="0" rIns="0" tIns="0" bIns="0">
+            <a:spAutoFit/>
+          </a:bodyPr>
+          <a:lstStyle/>
+          <a:p>
+            <a:pPr algn="l">
+              <a:lnSpc>
+                <a:spcPct val="110000"/>
+              </a:lnSpc>
+            </a:pPr>
+            <a:r>
+              <a:rPr sz="1350" b="1">
+                <a:solidFill>
+                  <a:srgbClr val="1D1D1F"/>
+                </a:solidFill>
+                <a:latin typeface="Arial"/>
+              </a:rPr>
+              <a:t>Se guarda y se recupera</a:t>
+            </a:r>
+          </a:p>
+          <a:p>
+            <a:pPr algn="l">
+              <a:lnSpc>
+                <a:spcPct val="130000"/>
+              </a:lnSpc>
+              <a:spcBef>
+                <a:spcPts val="600"/>
+              </a:spcBef>
+            </a:pPr>
+            <a:r>
+              <a:rPr sz="1050" b="0">
+                <a:solidFill>
+                  <a:srgbClr val="6E6E73"/>
+                </a:solidFill>
+                <a:latin typeface="Arial"/>
+              </a:rPr>
+              <a:t>La configuración va y vuelve a JSON, así que un caso se entrega como archivo y se reproduce tal cual.</a:t>
+            </a:r>
+          </a:p>
+        </p:txBody>
+      </p:sp>
+      <p:sp>
+        <p:nvSpPr>
+          <p:cNvPr id="15" name="Rounded Rectangle 14"/>
+          <p:cNvSpPr/>
+          <p:nvPr/>
+        </p:nvSpPr>
+        <p:spPr>
+          <a:xfrm>
+            <a:off x="8002828" y="4334256"/>
+            <a:ext cx="3411626" cy="1664208"/>
+          </a:xfrm>
+          <a:prstGeom prst="roundRect">
+            <a:avLst>
+              <a:gd name="adj" fmla="val 3500"/>
+            </a:avLst>
+          </a:prstGeom>
+          <a:solidFill>
+            <a:srgbClr val="F5F5F7"/>
+          </a:solidFill>
+          <a:ln>
+            <a:noFill/>
+          </a:ln>
+          <a:effectLst/>
+        </p:spPr>
+        <p:style>
+          <a:lnRef idx="1">
+            <a:schemeClr val="accent1"/>
+          </a:lnRef>
+          <a:fillRef idx="3">
+            <a:schemeClr val="accent1"/>
+          </a:fillRef>
+          <a:effectRef idx="2">
+            <a:schemeClr val="accent1"/>
+          </a:effectRef>
+          <a:fontRef idx="minor">
+            <a:schemeClr val="lt1"/>
+          </a:fontRef>
+        </p:style>
+        <p:txBody>
+          <a:bodyPr rtlCol="0" anchor="ctr"/>
+          <a:lstStyle/>
+          <a:p>
+            <a:pPr algn="ctr"/>
+          </a:p>
+        </p:txBody>
+      </p:sp>
+      <p:sp>
+        <p:nvSpPr>
+          <p:cNvPr id="16" name="TextBox 15"/>
+          <p:cNvSpPr txBox="1"/>
+          <p:nvPr/>
+        </p:nvSpPr>
+        <p:spPr>
+          <a:xfrm>
+            <a:off x="8222284" y="4517136"/>
+            <a:ext cx="2972714" cy="1371600"/>
+          </a:xfrm>
+          <a:prstGeom prst="rect">
+            <a:avLst/>
+          </a:prstGeom>
+          <a:noFill/>
+        </p:spPr>
+        <p:txBody>
+          <a:bodyPr wrap="square" anchor="t" lIns="0" rIns="0" tIns="0" bIns="0">
+            <a:spAutoFit/>
+          </a:bodyPr>
+          <a:lstStyle/>
+          <a:p>
+            <a:pPr algn="l">
+              <a:lnSpc>
+                <a:spcPct val="110000"/>
+              </a:lnSpc>
+            </a:pPr>
+            <a:r>
+              <a:rPr sz="1350" b="1">
+                <a:solidFill>
+                  <a:srgbClr val="1D1D1F"/>
+                </a:solidFill>
+                <a:latin typeface="Arial"/>
+              </a:rPr>
+              <a:t>Los presets del paquete están vigilados</a:t>
+            </a:r>
+          </a:p>
+          <a:p>
+            <a:pPr algn="l">
+              <a:lnSpc>
+                <a:spcPct val="130000"/>
+              </a:lnSpc>
+              <a:spcBef>
+                <a:spcPts val="600"/>
+              </a:spcBef>
+            </a:pPr>
+            <a:r>
+              <a:rPr sz="1050" b="0">
+                <a:solidFill>
+                  <a:srgbClr val="6E6E73"/>
+                </a:solidFill>
+                <a:latin typeface="Arial"/>
+              </a:rPr>
+              <a:t>El publicador comprueba campo por campo los dos compañeros FVA: no pueden cambiar en silencio entre versiones.</a:t>
+            </a:r>
+          </a:p>
+        </p:txBody>
+      </p:sp>
+      <p:sp>
+        <p:nvSpPr>
+          <p:cNvPr id="17" name="TextBox 16"/>
+          <p:cNvSpPr txBox="1"/>
+          <p:nvPr/>
+        </p:nvSpPr>
+        <p:spPr>
+          <a:xfrm>
+            <a:off x="777240" y="6035040"/>
+            <a:ext cx="10058400" cy="640080"/>
+          </a:xfrm>
+          <a:prstGeom prst="rect">
+            <a:avLst/>
+          </a:prstGeom>
+          <a:noFill/>
+        </p:spPr>
+        <p:txBody>
+          <a:bodyPr wrap="square" anchor="t" lIns="0" rIns="0" tIns="0" bIns="0">
+            <a:spAutoFit/>
+          </a:bodyPr>
+          <a:lstStyle/>
+          <a:p>
+            <a:pPr algn="l">
+              <a:lnSpc>
+                <a:spcPct val="125000"/>
+              </a:lnSpc>
+            </a:pPr>
+            <a:r>
+              <a:rPr sz="1150" b="0">
+                <a:solidFill>
+                  <a:srgbClr val="86868B"/>
+                </a:solidFill>
+                <a:latin typeface="Arial"/>
+              </a:rPr>
+              <a:t>Los presets de malla existen para hacer explícita la política, no para esconderla.</a:t>
+            </a:r>
+          </a:p>
+        </p:txBody>
+      </p:sp>
+      <p:sp>
+        <p:nvSpPr>
+          <p:cNvPr id="18" name="TextBox 17"/>
           <p:cNvSpPr txBox="1"/>
           <p:nvPr/>
         </p:nvSpPr>
@@ -4521,7 +5152,7 @@
             <a:r>
               <a:rPr sz="1000" b="0">
                 <a:solidFill>
-                  <a:srgbClr val="9E9EA7"/>
+                  <a:srgbClr val="86868B"/>
                 </a:solidFill>
                 <a:latin typeface="Arial"/>
               </a:rPr>
@@ -4590,7 +5221,7 @@
                 </a:solidFill>
                 <a:latin typeface="Arial"/>
               </a:rPr>
-              <a:t>EL DETALLE QUE IMPORTA</a:t>
+              <a:t>ESPACIO DE DISEÑO</a:t>
             </a:r>
           </a:p>
         </p:txBody>
@@ -4603,121 +5234,664 @@
         </p:nvSpPr>
         <p:spPr>
           <a:xfrm>
-            <a:off x="777240" y="1024128"/>
-            <a:ext cx="3840480" cy="4206240"/>
-          </a:xfrm>
-          <a:prstGeom prst="rect">
-            <a:avLst/>
-          </a:prstGeom>
-          <a:noFill/>
-        </p:spPr>
-        <p:txBody>
-          <a:bodyPr wrap="square" anchor="t" lIns="0" rIns="0" tIns="0" bIns="0">
-            <a:spAutoFit/>
-          </a:bodyPr>
-          <a:lstStyle/>
-          <a:p>
-            <a:pPr algn="l">
-              <a:lnSpc>
-                <a:spcPct val="100000"/>
-              </a:lnSpc>
-            </a:pPr>
-            <a:r>
-              <a:rPr sz="2800" b="1">
+            <a:off x="777240" y="932688"/>
+            <a:ext cx="10637215" cy="914400"/>
+          </a:xfrm>
+          <a:prstGeom prst="rect">
+            <a:avLst/>
+          </a:prstGeom>
+          <a:noFill/>
+        </p:spPr>
+        <p:txBody>
+          <a:bodyPr wrap="square" anchor="t" lIns="0" rIns="0" tIns="0" bIns="0">
+            <a:spAutoFit/>
+          </a:bodyPr>
+          <a:lstStyle/>
+          <a:p>
+            <a:pPr algn="l">
+              <a:lnSpc>
+                <a:spcPct val="95000"/>
+              </a:lnSpc>
+            </a:pPr>
+            <a:r>
+              <a:rPr sz="3000" b="1">
                 <a:solidFill>
                   <a:srgbClr val="1D1D1F"/>
                 </a:solidFill>
                 <a:latin typeface="Arial"/>
               </a:rPr>
-              <a:t>La banda del chavetero</a:t>
-            </a:r>
-          </a:p>
-          <a:p>
-            <a:pPr algn="l">
-              <a:lnSpc>
-                <a:spcPct val="135000"/>
+              <a:t>Qué se puede construir, y qué se rechaza a propósito</a:t>
+            </a:r>
+          </a:p>
+        </p:txBody>
+      </p:sp>
+      <p:sp>
+        <p:nvSpPr>
+          <p:cNvPr id="4" name="Rounded Rectangle 3"/>
+          <p:cNvSpPr/>
+          <p:nvPr/>
+        </p:nvSpPr>
+        <p:spPr>
+          <a:xfrm>
+            <a:off x="777240" y="2011680"/>
+            <a:ext cx="3411626" cy="1664208"/>
+          </a:xfrm>
+          <a:prstGeom prst="roundRect">
+            <a:avLst>
+              <a:gd name="adj" fmla="val 3500"/>
+            </a:avLst>
+          </a:prstGeom>
+          <a:solidFill>
+            <a:srgbClr val="F5F5F7"/>
+          </a:solidFill>
+          <a:ln>
+            <a:noFill/>
+          </a:ln>
+          <a:effectLst/>
+        </p:spPr>
+        <p:style>
+          <a:lnRef idx="1">
+            <a:schemeClr val="accent1"/>
+          </a:lnRef>
+          <a:fillRef idx="3">
+            <a:schemeClr val="accent1"/>
+          </a:fillRef>
+          <a:effectRef idx="2">
+            <a:schemeClr val="accent1"/>
+          </a:effectRef>
+          <a:fontRef idx="minor">
+            <a:schemeClr val="lt1"/>
+          </a:fontRef>
+        </p:style>
+        <p:txBody>
+          <a:bodyPr rtlCol="0" anchor="ctr"/>
+          <a:lstStyle/>
+          <a:p>
+            <a:pPr algn="ctr"/>
+          </a:p>
+        </p:txBody>
+      </p:sp>
+      <p:sp>
+        <p:nvSpPr>
+          <p:cNvPr id="5" name="TextBox 4"/>
+          <p:cNvSpPr txBox="1"/>
+          <p:nvPr/>
+        </p:nvSpPr>
+        <p:spPr>
+          <a:xfrm>
+            <a:off x="996696" y="2194560"/>
+            <a:ext cx="2972714" cy="1371600"/>
+          </a:xfrm>
+          <a:prstGeom prst="rect">
+            <a:avLst/>
+          </a:prstGeom>
+          <a:noFill/>
+        </p:spPr>
+        <p:txBody>
+          <a:bodyPr wrap="square" anchor="t" lIns="0" rIns="0" tIns="0" bIns="0">
+            <a:spAutoFit/>
+          </a:bodyPr>
+          <a:lstStyle/>
+          <a:p>
+            <a:pPr algn="l">
+              <a:lnSpc>
+                <a:spcPct val="110000"/>
+              </a:lnSpc>
+            </a:pPr>
+            <a:r>
+              <a:rPr sz="1350" b="1">
+                <a:solidFill>
+                  <a:srgbClr val="1D1D1F"/>
+                </a:solidFill>
+                <a:latin typeface="Arial"/>
+              </a:rPr>
+              <a:t>Formas de chaveta</a:t>
+            </a:r>
+          </a:p>
+          <a:p>
+            <a:pPr algn="l">
+              <a:lnSpc>
+                <a:spcPct val="130000"/>
               </a:lnSpc>
               <a:spcBef>
-                <a:spcPts val="1300"/>
+                <a:spcPts val="600"/>
               </a:spcBef>
             </a:pPr>
             <a:r>
-              <a:rPr sz="1250" b="0">
+              <a:rPr sz="1050" b="0">
                 <a:solidFill>
                   <a:srgbClr val="6E6E73"/>
                 </a:solidFill>
                 <a:latin typeface="Arial"/>
               </a:rPr>
-              <a:t>En la sección se ve la banda de elementos más finos que rodea la ranura: no es una malla uniforme más densa, es refinamiento donde está el gradiente.</a:t>
-            </a:r>
-          </a:p>
-          <a:p>
-            <a:pPr algn="l">
-              <a:lnSpc>
-                <a:spcPct val="135000"/>
+              <a:t>A, B y AB implementadas. De C a J se rechazan con un mensaje propio: necesitan cotas de taladro y chaflán que no están implementadas.</a:t>
+            </a:r>
+          </a:p>
+        </p:txBody>
+      </p:sp>
+      <p:sp>
+        <p:nvSpPr>
+          <p:cNvPr id="6" name="Rounded Rectangle 5"/>
+          <p:cNvSpPr/>
+          <p:nvPr/>
+        </p:nvSpPr>
+        <p:spPr>
+          <a:xfrm>
+            <a:off x="4390034" y="2011680"/>
+            <a:ext cx="3411626" cy="1664208"/>
+          </a:xfrm>
+          <a:prstGeom prst="roundRect">
+            <a:avLst>
+              <a:gd name="adj" fmla="val 3500"/>
+            </a:avLst>
+          </a:prstGeom>
+          <a:solidFill>
+            <a:srgbClr val="F5F5F7"/>
+          </a:solidFill>
+          <a:ln>
+            <a:noFill/>
+          </a:ln>
+          <a:effectLst/>
+        </p:spPr>
+        <p:style>
+          <a:lnRef idx="1">
+            <a:schemeClr val="accent1"/>
+          </a:lnRef>
+          <a:fillRef idx="3">
+            <a:schemeClr val="accent1"/>
+          </a:fillRef>
+          <a:effectRef idx="2">
+            <a:schemeClr val="accent1"/>
+          </a:effectRef>
+          <a:fontRef idx="minor">
+            <a:schemeClr val="lt1"/>
+          </a:fontRef>
+        </p:style>
+        <p:txBody>
+          <a:bodyPr rtlCol="0" anchor="ctr"/>
+          <a:lstStyle/>
+          <a:p>
+            <a:pPr algn="ctr"/>
+          </a:p>
+        </p:txBody>
+      </p:sp>
+      <p:sp>
+        <p:nvSpPr>
+          <p:cNvPr id="7" name="TextBox 6"/>
+          <p:cNvSpPr txBox="1"/>
+          <p:nvPr/>
+        </p:nvSpPr>
+        <p:spPr>
+          <a:xfrm>
+            <a:off x="4609490" y="2194560"/>
+            <a:ext cx="2972714" cy="1371600"/>
+          </a:xfrm>
+          <a:prstGeom prst="rect">
+            <a:avLst/>
+          </a:prstGeom>
+          <a:noFill/>
+        </p:spPr>
+        <p:txBody>
+          <a:bodyPr wrap="square" anchor="t" lIns="0" rIns="0" tIns="0" bIns="0">
+            <a:spAutoFit/>
+          </a:bodyPr>
+          <a:lstStyle/>
+          <a:p>
+            <a:pPr algn="l">
+              <a:lnSpc>
+                <a:spcPct val="110000"/>
+              </a:lnSpc>
+            </a:pPr>
+            <a:r>
+              <a:rPr sz="1350" b="1">
+                <a:solidFill>
+                  <a:srgbClr val="1D1D1F"/>
+                </a:solidFill>
+                <a:latin typeface="Arial"/>
+              </a:rPr>
+              <a:t>Cubo cilíndrico o cónico</a:t>
+            </a:r>
+          </a:p>
+          <a:p>
+            <a:pPr algn="l">
+              <a:lnSpc>
+                <a:spcPct val="130000"/>
               </a:lnSpc>
               <a:spcBef>
-                <a:spcPts val="1300"/>
+                <a:spcPts val="600"/>
               </a:spcBef>
             </a:pPr>
             <a:r>
-              <a:rPr sz="1250" b="0">
+              <a:rPr sz="1050" b="0">
                 <a:solidFill>
                   <a:srgbClr val="6E6E73"/>
                 </a:solidFill>
                 <a:latin typeface="Arial"/>
               </a:rPr>
-              <a:t>El ancho de la banda y el número de elementos sobre el arco del radio r2 son parámetros, y la auditoría comprueba que se hayan cumplido.</a:t>
-            </a:r>
-          </a:p>
-          <a:p>
-            <a:pPr algn="l">
-              <a:lnSpc>
-                <a:spcPct val="135000"/>
+              <a:t>El cónico añade un cuarto sólido, el casquillo, y desactiva el refinamiento de banda de la entalla; el modelo lo declara.</a:t>
+            </a:r>
+          </a:p>
+        </p:txBody>
+      </p:sp>
+      <p:sp>
+        <p:nvSpPr>
+          <p:cNvPr id="8" name="Rounded Rectangle 7"/>
+          <p:cNvSpPr/>
+          <p:nvPr/>
+        </p:nvSpPr>
+        <p:spPr>
+          <a:xfrm>
+            <a:off x="8002828" y="2011680"/>
+            <a:ext cx="3411626" cy="1664208"/>
+          </a:xfrm>
+          <a:prstGeom prst="roundRect">
+            <a:avLst>
+              <a:gd name="adj" fmla="val 3500"/>
+            </a:avLst>
+          </a:prstGeom>
+          <a:solidFill>
+            <a:srgbClr val="F5F5F7"/>
+          </a:solidFill>
+          <a:ln>
+            <a:noFill/>
+          </a:ln>
+          <a:effectLst/>
+        </p:spPr>
+        <p:style>
+          <a:lnRef idx="1">
+            <a:schemeClr val="accent1"/>
+          </a:lnRef>
+          <a:fillRef idx="3">
+            <a:schemeClr val="accent1"/>
+          </a:fillRef>
+          <a:effectRef idx="2">
+            <a:schemeClr val="accent1"/>
+          </a:effectRef>
+          <a:fontRef idx="minor">
+            <a:schemeClr val="lt1"/>
+          </a:fontRef>
+        </p:style>
+        <p:txBody>
+          <a:bodyPr rtlCol="0" anchor="ctr"/>
+          <a:lstStyle/>
+          <a:p>
+            <a:pPr algn="ctr"/>
+          </a:p>
+        </p:txBody>
+      </p:sp>
+      <p:sp>
+        <p:nvSpPr>
+          <p:cNvPr id="9" name="TextBox 8"/>
+          <p:cNvSpPr txBox="1"/>
+          <p:nvPr/>
+        </p:nvSpPr>
+        <p:spPr>
+          <a:xfrm>
+            <a:off x="8222284" y="2194560"/>
+            <a:ext cx="2972714" cy="1371600"/>
+          </a:xfrm>
+          <a:prstGeom prst="rect">
+            <a:avLst/>
+          </a:prstGeom>
+          <a:noFill/>
+        </p:spPr>
+        <p:txBody>
+          <a:bodyPr wrap="square" anchor="t" lIns="0" rIns="0" tIns="0" bIns="0">
+            <a:spAutoFit/>
+          </a:bodyPr>
+          <a:lstStyle/>
+          <a:p>
+            <a:pPr algn="l">
+              <a:lnSpc>
+                <a:spcPct val="110000"/>
+              </a:lnSpc>
+            </a:pPr>
+            <a:r>
+              <a:rPr sz="1350" b="1">
+                <a:solidFill>
+                  <a:srgbClr val="1D1D1F"/>
+                </a:solidFill>
+                <a:latin typeface="Arial"/>
+              </a:rPr>
+              <a:t>Diámetro</a:t>
+            </a:r>
+          </a:p>
+          <a:p>
+            <a:pPr algn="l">
+              <a:lnSpc>
+                <a:spcPct val="130000"/>
               </a:lnSpc>
               <a:spcBef>
-                <a:spcPts val="1300"/>
+                <a:spcPts val="600"/>
               </a:spcBef>
             </a:pPr>
             <a:r>
-              <a:rPr sz="1250" b="0">
+              <a:rPr sz="1050" b="0">
                 <a:solidFill>
                   <a:srgbClr val="6E6E73"/>
                 </a:solidFill>
                 <a:latin typeface="Arial"/>
               </a:rPr>
-              <a:t>El conjunto de elementos NOTCH_SHAFT se construye alrededor de las dos esquinas del chavetero para que la consulta de concentración no se vaya a otro punto caliente.</a:t>
-            </a:r>
-          </a:p>
-        </p:txBody>
-      </p:sp>
-      <p:pic>
-        <p:nvPicPr>
-          <p:cNvPr id="4" name="Picture 3" descr="model_notch_section.png"/>
-          <p:cNvPicPr>
-            <a:picLocks noChangeAspect="1"/>
-          </p:cNvPicPr>
-          <p:nvPr/>
-        </p:nvPicPr>
-        <p:blipFill>
-          <a:blip r:embed="rId2"/>
-          <a:stretch>
-            <a:fillRect/>
-          </a:stretch>
-        </p:blipFill>
-        <p:spPr>
-          <a:xfrm>
-            <a:off x="5046267" y="685800"/>
-            <a:ext cx="6458105" cy="5486400"/>
-          </a:xfrm>
-          <a:prstGeom prst="rect">
-            <a:avLst/>
-          </a:prstGeom>
-        </p:spPr>
-      </p:pic>
-      <p:sp>
-        <p:nvSpPr>
-          <p:cNvPr id="5" name="TextBox 4"/>
+              <a:t>Continuo en 6 &lt; d1 &lt;= 500 mm, resuelto a una de las 26 filas. Fuera de ahí lanza excepción en lugar de aproximar.</a:t>
+            </a:r>
+          </a:p>
+        </p:txBody>
+      </p:sp>
+      <p:sp>
+        <p:nvSpPr>
+          <p:cNvPr id="10" name="Rounded Rectangle 9"/>
+          <p:cNvSpPr/>
+          <p:nvPr/>
+        </p:nvSpPr>
+        <p:spPr>
+          <a:xfrm>
+            <a:off x="777240" y="3858768"/>
+            <a:ext cx="3411626" cy="1664208"/>
+          </a:xfrm>
+          <a:prstGeom prst="roundRect">
+            <a:avLst>
+              <a:gd name="adj" fmla="val 3500"/>
+            </a:avLst>
+          </a:prstGeom>
+          <a:solidFill>
+            <a:srgbClr val="F5F5F7"/>
+          </a:solidFill>
+          <a:ln>
+            <a:noFill/>
+          </a:ln>
+          <a:effectLst/>
+        </p:spPr>
+        <p:style>
+          <a:lnRef idx="1">
+            <a:schemeClr val="accent1"/>
+          </a:lnRef>
+          <a:fillRef idx="3">
+            <a:schemeClr val="accent1"/>
+          </a:fillRef>
+          <a:effectRef idx="2">
+            <a:schemeClr val="accent1"/>
+          </a:effectRef>
+          <a:fontRef idx="minor">
+            <a:schemeClr val="lt1"/>
+          </a:fontRef>
+        </p:style>
+        <p:txBody>
+          <a:bodyPr rtlCol="0" anchor="ctr"/>
+          <a:lstStyle/>
+          <a:p>
+            <a:pPr algn="ctr"/>
+          </a:p>
+        </p:txBody>
+      </p:sp>
+      <p:sp>
+        <p:nvSpPr>
+          <p:cNvPr id="11" name="TextBox 10"/>
+          <p:cNvSpPr txBox="1"/>
+          <p:nvPr/>
+        </p:nvSpPr>
+        <p:spPr>
+          <a:xfrm>
+            <a:off x="996696" y="4041648"/>
+            <a:ext cx="2972714" cy="1371600"/>
+          </a:xfrm>
+          <a:prstGeom prst="rect">
+            <a:avLst/>
+          </a:prstGeom>
+          <a:noFill/>
+        </p:spPr>
+        <p:txBody>
+          <a:bodyPr wrap="square" anchor="t" lIns="0" rIns="0" tIns="0" bIns="0">
+            <a:spAutoFit/>
+          </a:bodyPr>
+          <a:lstStyle/>
+          <a:p>
+            <a:pPr algn="l">
+              <a:lnSpc>
+                <a:spcPct val="110000"/>
+              </a:lnSpc>
+            </a:pPr>
+            <a:r>
+              <a:rPr sz="1350" b="1">
+                <a:solidFill>
+                  <a:srgbClr val="1D1D1F"/>
+                </a:solidFill>
+                <a:latin typeface="Arial"/>
+              </a:rPr>
+              <a:t>Orden y tipo de elemento</a:t>
+            </a:r>
+          </a:p>
+          <a:p>
+            <a:pPr algn="l">
+              <a:lnSpc>
+                <a:spcPct val="130000"/>
+              </a:lnSpc>
+              <a:spcBef>
+                <a:spcPts val="600"/>
+              </a:spcBef>
+            </a:pPr>
+            <a:r>
+              <a:rPr sz="1050" b="0">
+                <a:solidFill>
+                  <a:srgbClr val="6E6E73"/>
+                </a:solidFill>
+                <a:latin typeface="Arial"/>
+              </a:rPr>
+              <a:t>Lineal o cuadrático (por defecto), C3D8/C3D8I o C3D20/C3D20R. C3D8R sólo se acepta como elección explícita heredada, y levanta advertencia.</a:t>
+            </a:r>
+          </a:p>
+        </p:txBody>
+      </p:sp>
+      <p:sp>
+        <p:nvSpPr>
+          <p:cNvPr id="12" name="Rounded Rectangle 11"/>
+          <p:cNvSpPr/>
+          <p:nvPr/>
+        </p:nvSpPr>
+        <p:spPr>
+          <a:xfrm>
+            <a:off x="4390034" y="3858768"/>
+            <a:ext cx="3411626" cy="1664208"/>
+          </a:xfrm>
+          <a:prstGeom prst="roundRect">
+            <a:avLst>
+              <a:gd name="adj" fmla="val 3500"/>
+            </a:avLst>
+          </a:prstGeom>
+          <a:solidFill>
+            <a:srgbClr val="F5F5F7"/>
+          </a:solidFill>
+          <a:ln>
+            <a:noFill/>
+          </a:ln>
+          <a:effectLst/>
+        </p:spPr>
+        <p:style>
+          <a:lnRef idx="1">
+            <a:schemeClr val="accent1"/>
+          </a:lnRef>
+          <a:fillRef idx="3">
+            <a:schemeClr val="accent1"/>
+          </a:fillRef>
+          <a:effectRef idx="2">
+            <a:schemeClr val="accent1"/>
+          </a:effectRef>
+          <a:fontRef idx="minor">
+            <a:schemeClr val="lt1"/>
+          </a:fontRef>
+        </p:style>
+        <p:txBody>
+          <a:bodyPr rtlCol="0" anchor="ctr"/>
+          <a:lstStyle/>
+          <a:p>
+            <a:pPr algn="ctr"/>
+          </a:p>
+        </p:txBody>
+      </p:sp>
+      <p:sp>
+        <p:nvSpPr>
+          <p:cNvPr id="13" name="TextBox 12"/>
+          <p:cNvSpPr txBox="1"/>
+          <p:nvPr/>
+        </p:nvSpPr>
+        <p:spPr>
+          <a:xfrm>
+            <a:off x="4609490" y="4041648"/>
+            <a:ext cx="2972714" cy="1371600"/>
+          </a:xfrm>
+          <a:prstGeom prst="rect">
+            <a:avLst/>
+          </a:prstGeom>
+          <a:noFill/>
+        </p:spPr>
+        <p:txBody>
+          <a:bodyPr wrap="square" anchor="t" lIns="0" rIns="0" tIns="0" bIns="0">
+            <a:spAutoFit/>
+          </a:bodyPr>
+          <a:lstStyle/>
+          <a:p>
+            <a:pPr algn="l">
+              <a:lnSpc>
+                <a:spcPct val="110000"/>
+              </a:lnSpc>
+            </a:pPr>
+            <a:r>
+              <a:rPr sz="1350" b="1">
+                <a:solidFill>
+                  <a:srgbClr val="1D1D1F"/>
+                </a:solidFill>
+                <a:latin typeface="Arial"/>
+              </a:rPr>
+              <a:t>Semillas automáticas</a:t>
+            </a:r>
+          </a:p>
+          <a:p>
+            <a:pPr algn="l">
+              <a:lnSpc>
+                <a:spcPct val="130000"/>
+              </a:lnSpc>
+              <a:spcBef>
+                <a:spcPts val="600"/>
+              </a:spcBef>
+            </a:pPr>
+            <a:r>
+              <a:rPr sz="1050" b="0">
+                <a:solidFill>
+                  <a:srgbClr val="6E6E73"/>
+                </a:solidFill>
+                <a:latin typeface="Arial"/>
+              </a:rPr>
+              <a:t>Con refinamiento de entalla, que es el defecto: D/16 en el eje y d_a/40 en el cubo. Sin él, D/32 y d_a/80. La regla aplicada se escribe en la auditoría.</a:t>
+            </a:r>
+          </a:p>
+        </p:txBody>
+      </p:sp>
+      <p:sp>
+        <p:nvSpPr>
+          <p:cNvPr id="14" name="Rounded Rectangle 13"/>
+          <p:cNvSpPr/>
+          <p:nvPr/>
+        </p:nvSpPr>
+        <p:spPr>
+          <a:xfrm>
+            <a:off x="8002828" y="3858768"/>
+            <a:ext cx="3411626" cy="1664208"/>
+          </a:xfrm>
+          <a:prstGeom prst="roundRect">
+            <a:avLst>
+              <a:gd name="adj" fmla="val 3500"/>
+            </a:avLst>
+          </a:prstGeom>
+          <a:solidFill>
+            <a:srgbClr val="F5F5F7"/>
+          </a:solidFill>
+          <a:ln>
+            <a:noFill/>
+          </a:ln>
+          <a:effectLst/>
+        </p:spPr>
+        <p:style>
+          <a:lnRef idx="1">
+            <a:schemeClr val="accent1"/>
+          </a:lnRef>
+          <a:fillRef idx="3">
+            <a:schemeClr val="accent1"/>
+          </a:fillRef>
+          <a:effectRef idx="2">
+            <a:schemeClr val="accent1"/>
+          </a:effectRef>
+          <a:fontRef idx="minor">
+            <a:schemeClr val="lt1"/>
+          </a:fontRef>
+        </p:style>
+        <p:txBody>
+          <a:bodyPr rtlCol="0" anchor="ctr"/>
+          <a:lstStyle/>
+          <a:p>
+            <a:pPr algn="ctr"/>
+          </a:p>
+        </p:txBody>
+      </p:sp>
+      <p:sp>
+        <p:nvSpPr>
+          <p:cNvPr id="15" name="TextBox 14"/>
+          <p:cNvSpPr txBox="1"/>
+          <p:nvPr/>
+        </p:nvSpPr>
+        <p:spPr>
+          <a:xfrm>
+            <a:off x="8222284" y="4041648"/>
+            <a:ext cx="2972714" cy="1371600"/>
+          </a:xfrm>
+          <a:prstGeom prst="rect">
+            <a:avLst/>
+          </a:prstGeom>
+          <a:noFill/>
+        </p:spPr>
+        <p:txBody>
+          <a:bodyPr wrap="square" anchor="t" lIns="0" rIns="0" tIns="0" bIns="0">
+            <a:spAutoFit/>
+          </a:bodyPr>
+          <a:lstStyle/>
+          <a:p>
+            <a:pPr algn="l">
+              <a:lnSpc>
+                <a:spcPct val="110000"/>
+              </a:lnSpc>
+            </a:pPr>
+            <a:r>
+              <a:rPr sz="1350" b="1">
+                <a:solidFill>
+                  <a:srgbClr val="1D1D1F"/>
+                </a:solidFill>
+                <a:latin typeface="Arial"/>
+              </a:rPr>
+              <a:t>Modo de cumplimiento</a:t>
+            </a:r>
+          </a:p>
+          <a:p>
+            <a:pPr algn="l">
+              <a:lnSpc>
+                <a:spcPct val="130000"/>
+              </a:lnSpc>
+              <a:spcBef>
+                <a:spcPts val="600"/>
+              </a:spcBef>
+            </a:pPr>
+            <a:r>
+              <a:rPr sz="1050" b="0">
+                <a:solidFill>
+                  <a:srgbClr val="6E6E73"/>
+                </a:solidFill>
+                <a:latin typeface="Arial"/>
+              </a:rPr>
+              <a:t>Normativo o anulación del usuario. Salirse del sobre está permitido; lo que no está permitido es que no se note.</a:t>
+            </a:r>
+          </a:p>
+        </p:txBody>
+      </p:sp>
+      <p:sp>
+        <p:nvSpPr>
+          <p:cNvPr id="16" name="TextBox 15"/>
           <p:cNvSpPr txBox="1"/>
           <p:nvPr/>
         </p:nvSpPr>
@@ -4768,7 +5942,7 @@
     <p:bg>
       <p:bgPr>
         <a:solidFill>
-          <a:srgbClr val="FFFFFF"/>
+          <a:srgbClr val="0A0A0C"/>
         </a:solidFill>
         <a:effectLst/>
       </p:bgPr>
@@ -4810,18 +5984,114 @@
             <a:r>
               <a:rPr sz="1150" b="1">
                 <a:solidFill>
-                  <a:srgbClr val="0071E3"/>
-                </a:solidFill>
-                <a:latin typeface="Arial"/>
-              </a:rPr>
-              <a:t>POLÍTICA DE MALLA</a:t>
+                  <a:srgbClr val="2997FF"/>
+                </a:solidFill>
+                <a:latin typeface="Arial"/>
+              </a:rPr>
+              <a:t>EL RESULTADO</a:t>
+            </a:r>
+          </a:p>
+        </p:txBody>
+      </p:sp>
+      <p:sp>
+        <p:nvSpPr>
+          <p:cNvPr id="3" name="TextBox 2"/>
+          <p:cNvSpPr txBox="1"/>
+          <p:nvPr/>
+        </p:nvSpPr>
+        <p:spPr>
+          <a:xfrm>
+            <a:off x="777240" y="1024128"/>
+            <a:ext cx="3840480" cy="4206240"/>
+          </a:xfrm>
+          <a:prstGeom prst="rect">
+            <a:avLst/>
+          </a:prstGeom>
+          <a:noFill/>
+        </p:spPr>
+        <p:txBody>
+          <a:bodyPr wrap="square" anchor="t" lIns="0" rIns="0" tIns="0" bIns="0">
+            <a:spAutoFit/>
+          </a:bodyPr>
+          <a:lstStyle/>
+          <a:p>
+            <a:pPr algn="l">
+              <a:lnSpc>
+                <a:spcPct val="100000"/>
+              </a:lnSpc>
+            </a:pPr>
+            <a:r>
+              <a:rPr sz="2800" b="1">
+                <a:solidFill>
+                  <a:srgbClr val="FFFFFF"/>
+                </a:solidFill>
+                <a:latin typeface="Arial"/>
+              </a:rPr>
+              <a:t>Sólidos, no cascarones</a:t>
+            </a:r>
+          </a:p>
+          <a:p>
+            <a:pPr algn="l">
+              <a:lnSpc>
+                <a:spcPct val="135000"/>
+              </a:lnSpc>
+              <a:spcBef>
+                <a:spcPts val="1300"/>
+              </a:spcBef>
+            </a:pPr>
+            <a:r>
+              <a:rPr sz="1250" b="0">
+                <a:solidFill>
+                  <a:srgbClr val="9E9EA7"/>
+                </a:solidFill>
+                <a:latin typeface="Arial"/>
+              </a:rPr>
+              <a:t>Eje, chaveta y cubo se construyen como volúmenes independientes y se ensamblan con las tolerancias de la norma.</a:t>
+            </a:r>
+          </a:p>
+          <a:p>
+            <a:pPr algn="l">
+              <a:lnSpc>
+                <a:spcPct val="135000"/>
+              </a:lnSpc>
+              <a:spcBef>
+                <a:spcPts val="1300"/>
+              </a:spcBef>
+            </a:pPr>
+            <a:r>
+              <a:rPr sz="1250" b="0">
+                <a:solidFill>
+                  <a:srgbClr val="9E9EA7"/>
+                </a:solidFill>
+                <a:latin typeface="Arial"/>
+              </a:rPr>
+              <a:t>La malla es hexaédrica y coincidente en las interfaces que transmiten carga.</a:t>
+            </a:r>
+          </a:p>
+          <a:p>
+            <a:pPr algn="l">
+              <a:lnSpc>
+                <a:spcPct val="135000"/>
+              </a:lnSpc>
+              <a:spcBef>
+                <a:spcPts val="1300"/>
+              </a:spcBef>
+            </a:pPr>
+            <a:r>
+              <a:rPr sz="1250" b="0">
+                <a:solidFill>
+                  <a:srgbClr val="9E9EA7"/>
+                </a:solidFill>
+                <a:latin typeface="Arial"/>
+              </a:rPr>
+              <a:t>La captura es la imagen que el propio motor guarda en screenshots/ al terminar.</a:t>
             </a:r>
           </a:p>
         </p:txBody>
       </p:sp>
       <p:pic>
         <p:nvPicPr>
-          <p:cNvPr id="3" name="Picture 2" descr="dia_malla.png"/>
+          <p:cNvPr id="4" name="Picture 3" descr="model_assembly_hex.png"/>
           <p:cNvPicPr>
             <a:picLocks noChangeAspect="1"/>
           </p:cNvPicPr>
@@ -4835,8 +6105,8 @@
         </p:blipFill>
         <p:spPr>
           <a:xfrm>
-            <a:off x="1639618" y="1170432"/>
-            <a:ext cx="8912458" cy="4727448"/>
+            <a:off x="5071897" y="685800"/>
+            <a:ext cx="6406845" cy="5486400"/>
           </a:xfrm>
           <a:prstGeom prst="rect">
             <a:avLst/>
@@ -4845,7 +6115,7 @@
       </p:pic>
       <p:sp>
         <p:nvSpPr>
-          <p:cNvPr id="4" name="TextBox 3"/>
+          <p:cNvPr id="5" name="TextBox 4"/>
           <p:cNvSpPr txBox="1"/>
           <p:nvPr/>
         </p:nvSpPr>
@@ -4873,7 +6143,7 @@
             <a:r>
               <a:rPr sz="1000" b="0">
                 <a:solidFill>
-                  <a:srgbClr val="86868B"/>
+                  <a:srgbClr val="9E9EA7"/>
                 </a:solidFill>
                 <a:latin typeface="Arial"/>
               </a:rPr>
@@ -4942,14 +6212,110 @@
                 </a:solidFill>
                 <a:latin typeface="Arial"/>
               </a:rPr>
-              <a:t>TRAZABILIDAD</a:t>
+              <a:t>EL DETALLE QUE IMPORTA</a:t>
+            </a:r>
+          </a:p>
+        </p:txBody>
+      </p:sp>
+      <p:sp>
+        <p:nvSpPr>
+          <p:cNvPr id="3" name="TextBox 2"/>
+          <p:cNvSpPr txBox="1"/>
+          <p:nvPr/>
+        </p:nvSpPr>
+        <p:spPr>
+          <a:xfrm>
+            <a:off x="777240" y="1024128"/>
+            <a:ext cx="3840480" cy="4206240"/>
+          </a:xfrm>
+          <a:prstGeom prst="rect">
+            <a:avLst/>
+          </a:prstGeom>
+          <a:noFill/>
+        </p:spPr>
+        <p:txBody>
+          <a:bodyPr wrap="square" anchor="t" lIns="0" rIns="0" tIns="0" bIns="0">
+            <a:spAutoFit/>
+          </a:bodyPr>
+          <a:lstStyle/>
+          <a:p>
+            <a:pPr algn="l">
+              <a:lnSpc>
+                <a:spcPct val="100000"/>
+              </a:lnSpc>
+            </a:pPr>
+            <a:r>
+              <a:rPr sz="2800" b="1">
+                <a:solidFill>
+                  <a:srgbClr val="1D1D1F"/>
+                </a:solidFill>
+                <a:latin typeface="Arial"/>
+              </a:rPr>
+              <a:t>La banda del chavetero</a:t>
+            </a:r>
+          </a:p>
+          <a:p>
+            <a:pPr algn="l">
+              <a:lnSpc>
+                <a:spcPct val="135000"/>
+              </a:lnSpc>
+              <a:spcBef>
+                <a:spcPts val="1300"/>
+              </a:spcBef>
+            </a:pPr>
+            <a:r>
+              <a:rPr sz="1250" b="0">
+                <a:solidFill>
+                  <a:srgbClr val="6E6E73"/>
+                </a:solidFill>
+                <a:latin typeface="Arial"/>
+              </a:rPr>
+              <a:t>En la sección se ve la banda de elementos más finos que rodea la ranura: no es una malla uniforme más densa, es refinamiento donde está el gradiente.</a:t>
+            </a:r>
+          </a:p>
+          <a:p>
+            <a:pPr algn="l">
+              <a:lnSpc>
+                <a:spcPct val="135000"/>
+              </a:lnSpc>
+              <a:spcBef>
+                <a:spcPts val="1300"/>
+              </a:spcBef>
+            </a:pPr>
+            <a:r>
+              <a:rPr sz="1250" b="0">
+                <a:solidFill>
+                  <a:srgbClr val="6E6E73"/>
+                </a:solidFill>
+                <a:latin typeface="Arial"/>
+              </a:rPr>
+              <a:t>El ancho de la banda y el número de elementos sobre el arco del radio r2 son parámetros, y la auditoría comprueba que se hayan cumplido.</a:t>
+            </a:r>
+          </a:p>
+          <a:p>
+            <a:pPr algn="l">
+              <a:lnSpc>
+                <a:spcPct val="135000"/>
+              </a:lnSpc>
+              <a:spcBef>
+                <a:spcPts val="1300"/>
+              </a:spcBef>
+            </a:pPr>
+            <a:r>
+              <a:rPr sz="1250" b="0">
+                <a:solidFill>
+                  <a:srgbClr val="6E6E73"/>
+                </a:solidFill>
+                <a:latin typeface="Arial"/>
+              </a:rPr>
+              <a:t>El conjunto de elementos NOTCH_SHAFT se construye alrededor de las dos esquinas del chavetero para que la consulta de concentración no se vaya a otro punto caliente.</a:t>
             </a:r>
           </a:p>
         </p:txBody>
       </p:sp>
       <p:pic>
         <p:nvPicPr>
-          <p:cNvPr id="3" name="Picture 2" descr="dia_badges.png"/>
+          <p:cNvPr id="4" name="Picture 3" descr="model_notch_section.png"/>
           <p:cNvPicPr>
             <a:picLocks noChangeAspect="1"/>
           </p:cNvPicPr>
@@ -4963,8 +6329,8 @@
         </p:blipFill>
         <p:spPr>
           <a:xfrm>
-            <a:off x="1126965" y="1170432"/>
-            <a:ext cx="9937765" cy="4727448"/>
+            <a:off x="5046267" y="685800"/>
+            <a:ext cx="6458105" cy="5486400"/>
           </a:xfrm>
           <a:prstGeom prst="rect">
             <a:avLst/>
@@ -4973,7 +6339,7 @@
       </p:pic>
       <p:sp>
         <p:nvSpPr>
-          <p:cNvPr id="4" name="TextBox 3"/>
+          <p:cNvPr id="5" name="TextBox 4"/>
           <p:cNvSpPr txBox="1"/>
           <p:nvPr/>
         </p:nvSpPr>
@@ -5070,605 +6436,38 @@
                 </a:solidFill>
                 <a:latin typeface="Arial"/>
               </a:rPr>
-              <a:t>EL DATO NORMATIVO</a:t>
-            </a:r>
-          </a:p>
-        </p:txBody>
-      </p:sp>
-      <p:sp>
-        <p:nvSpPr>
-          <p:cNvPr id="3" name="TextBox 2"/>
-          <p:cNvSpPr txBox="1"/>
-          <p:nvPr/>
-        </p:nvSpPr>
-        <p:spPr>
-          <a:xfrm>
-            <a:off x="777240" y="932688"/>
-            <a:ext cx="10637215" cy="914400"/>
-          </a:xfrm>
-          <a:prstGeom prst="rect">
-            <a:avLst/>
-          </a:prstGeom>
-          <a:noFill/>
-        </p:spPr>
-        <p:txBody>
-          <a:bodyPr wrap="square" anchor="t" lIns="0" rIns="0" tIns="0" bIns="0">
-            <a:spAutoFit/>
-          </a:bodyPr>
-          <a:lstStyle/>
-          <a:p>
-            <a:pPr algn="l">
-              <a:lnSpc>
-                <a:spcPct val="95000"/>
-              </a:lnSpc>
-            </a:pPr>
-            <a:r>
-              <a:rPr sz="3100" b="1">
-                <a:solidFill>
-                  <a:srgbClr val="1D1D1F"/>
-                </a:solidFill>
-                <a:latin typeface="Arial"/>
-              </a:rPr>
-              <a:t>La tabla no se interpola: o hay fila, o hay error</a:t>
-            </a:r>
-          </a:p>
-        </p:txBody>
-      </p:sp>
+              <a:t>POLÍTICA DE MALLA</a:t>
+            </a:r>
+          </a:p>
+        </p:txBody>
+      </p:sp>
+      <p:pic>
+        <p:nvPicPr>
+          <p:cNvPr id="3" name="Picture 2" descr="dia_malla.png"/>
+          <p:cNvPicPr>
+            <a:picLocks noChangeAspect="1"/>
+          </p:cNvPicPr>
+          <p:nvPr/>
+        </p:nvPicPr>
+        <p:blipFill>
+          <a:blip r:embed="rId2"/>
+          <a:stretch>
+            <a:fillRect/>
+          </a:stretch>
+        </p:blipFill>
+        <p:spPr>
+          <a:xfrm>
+            <a:off x="1639618" y="1170432"/>
+            <a:ext cx="8912458" cy="4727448"/>
+          </a:xfrm>
+          <a:prstGeom prst="rect">
+            <a:avLst/>
+          </a:prstGeom>
+        </p:spPr>
+      </p:pic>
       <p:sp>
         <p:nvSpPr>
           <p:cNvPr id="4" name="TextBox 3"/>
-          <p:cNvSpPr txBox="1"/>
-          <p:nvPr/>
-        </p:nvSpPr>
-        <p:spPr>
-          <a:xfrm>
-            <a:off x="777240" y="1700784"/>
-            <a:ext cx="9509760" cy="822960"/>
-          </a:xfrm>
-          <a:prstGeom prst="rect">
-            <a:avLst/>
-          </a:prstGeom>
-          <a:noFill/>
-        </p:spPr>
-        <p:txBody>
-          <a:bodyPr wrap="square" anchor="t" lIns="0" rIns="0" tIns="0" bIns="0">
-            <a:spAutoFit/>
-          </a:bodyPr>
-          <a:lstStyle/>
-          <a:p>
-            <a:pPr algn="l">
-              <a:lnSpc>
-                <a:spcPct val="125000"/>
-              </a:lnSpc>
-            </a:pPr>
-            <a:r>
-              <a:rPr sz="1450" b="0">
-                <a:solidFill>
-                  <a:srgbClr val="6E6E73"/>
-                </a:solidFill>
-                <a:latin typeface="Arial"/>
-              </a:rPr>
-              <a:t>din6885_row() devuelve la fila exacta con su etiqueta NORMATIVE. Fuera del rango de la norma lanza una excepción, para que nadie pueda declarar conformidad DIN con la fila más parecida.</a:t>
-            </a:r>
-          </a:p>
-        </p:txBody>
-      </p:sp>
-      <p:sp>
-        <p:nvSpPr>
-          <p:cNvPr id="5" name="Rounded Rectangle 4"/>
-          <p:cNvSpPr/>
-          <p:nvPr/>
-        </p:nvSpPr>
-        <p:spPr>
-          <a:xfrm>
-            <a:off x="777240" y="2788920"/>
-            <a:ext cx="2542032" cy="1627632"/>
-          </a:xfrm>
-          <a:prstGeom prst="roundRect">
-            <a:avLst>
-              <a:gd name="adj" fmla="val 3500"/>
-            </a:avLst>
-          </a:prstGeom>
-          <a:solidFill>
-            <a:srgbClr val="F5F5F7"/>
-          </a:solidFill>
-          <a:ln>
-            <a:noFill/>
-          </a:ln>
-          <a:effectLst/>
-        </p:spPr>
-        <p:style>
-          <a:lnRef idx="1">
-            <a:schemeClr val="accent1"/>
-          </a:lnRef>
-          <a:fillRef idx="3">
-            <a:schemeClr val="accent1"/>
-          </a:fillRef>
-          <a:effectRef idx="2">
-            <a:schemeClr val="accent1"/>
-          </a:effectRef>
-          <a:fontRef idx="minor">
-            <a:schemeClr val="lt1"/>
-          </a:fontRef>
-        </p:style>
-        <p:txBody>
-          <a:bodyPr rtlCol="0" anchor="ctr"/>
-          <a:lstStyle/>
-          <a:p>
-            <a:pPr algn="ctr"/>
-          </a:p>
-        </p:txBody>
-      </p:sp>
-      <p:sp>
-        <p:nvSpPr>
-          <p:cNvPr id="6" name="TextBox 5"/>
-          <p:cNvSpPr txBox="1"/>
-          <p:nvPr/>
-        </p:nvSpPr>
-        <p:spPr>
-          <a:xfrm>
-            <a:off x="1014984" y="2990088"/>
-            <a:ext cx="2084832" cy="1298448"/>
-          </a:xfrm>
-          <a:prstGeom prst="rect">
-            <a:avLst/>
-          </a:prstGeom>
-          <a:noFill/>
-        </p:spPr>
-        <p:txBody>
-          <a:bodyPr wrap="square" anchor="t" lIns="0" rIns="0" tIns="0" bIns="0">
-            <a:spAutoFit/>
-          </a:bodyPr>
-          <a:lstStyle/>
-          <a:p>
-            <a:pPr algn="l">
-              <a:lnSpc>
-                <a:spcPct val="105000"/>
-              </a:lnSpc>
-            </a:pPr>
-            <a:r>
-              <a:rPr sz="1450" b="1">
-                <a:solidFill>
-                  <a:srgbClr val="1D1D1F"/>
-                </a:solidFill>
-                <a:latin typeface="Arial"/>
-              </a:rPr>
-              <a:t>26   filas de sección</a:t>
-            </a:r>
-          </a:p>
-          <a:p>
-            <a:pPr algn="l">
-              <a:lnSpc>
-                <a:spcPct val="130000"/>
-              </a:lnSpc>
-              <a:spcBef>
-                <a:spcPts val="600"/>
-              </a:spcBef>
-            </a:pPr>
-            <a:r>
-              <a:rPr sz="1050" b="0">
-                <a:solidFill>
-                  <a:srgbClr val="6E6E73"/>
-                </a:solidFill>
-                <a:latin typeface="Arial"/>
-              </a:rPr>
-              <a:t>b × h, t1, t2, tolerancia de t1 y el incremento d2 para cada banda de diámetro</a:t>
-            </a:r>
-          </a:p>
-        </p:txBody>
-      </p:sp>
-      <p:sp>
-        <p:nvSpPr>
-          <p:cNvPr id="7" name="Rounded Rectangle 6"/>
-          <p:cNvSpPr/>
-          <p:nvPr/>
-        </p:nvSpPr>
-        <p:spPr>
-          <a:xfrm>
-            <a:off x="3474720" y="2788920"/>
-            <a:ext cx="2542032" cy="1627632"/>
-          </a:xfrm>
-          <a:prstGeom prst="roundRect">
-            <a:avLst>
-              <a:gd name="adj" fmla="val 3500"/>
-            </a:avLst>
-          </a:prstGeom>
-          <a:solidFill>
-            <a:srgbClr val="F5F5F7"/>
-          </a:solidFill>
-          <a:ln>
-            <a:noFill/>
-          </a:ln>
-          <a:effectLst/>
-        </p:spPr>
-        <p:style>
-          <a:lnRef idx="1">
-            <a:schemeClr val="accent1"/>
-          </a:lnRef>
-          <a:fillRef idx="3">
-            <a:schemeClr val="accent1"/>
-          </a:fillRef>
-          <a:effectRef idx="2">
-            <a:schemeClr val="accent1"/>
-          </a:effectRef>
-          <a:fontRef idx="minor">
-            <a:schemeClr val="lt1"/>
-          </a:fontRef>
-        </p:style>
-        <p:txBody>
-          <a:bodyPr rtlCol="0" anchor="ctr"/>
-          <a:lstStyle/>
-          <a:p>
-            <a:pPr algn="ctr"/>
-          </a:p>
-        </p:txBody>
-      </p:sp>
-      <p:sp>
-        <p:nvSpPr>
-          <p:cNvPr id="8" name="TextBox 7"/>
-          <p:cNvSpPr txBox="1"/>
-          <p:nvPr/>
-        </p:nvSpPr>
-        <p:spPr>
-          <a:xfrm>
-            <a:off x="3712464" y="2990088"/>
-            <a:ext cx="2084832" cy="1298448"/>
-          </a:xfrm>
-          <a:prstGeom prst="rect">
-            <a:avLst/>
-          </a:prstGeom>
-          <a:noFill/>
-        </p:spPr>
-        <p:txBody>
-          <a:bodyPr wrap="square" anchor="t" lIns="0" rIns="0" tIns="0" bIns="0">
-            <a:spAutoFit/>
-          </a:bodyPr>
-          <a:lstStyle/>
-          <a:p>
-            <a:pPr algn="l">
-              <a:lnSpc>
-                <a:spcPct val="105000"/>
-              </a:lnSpc>
-            </a:pPr>
-            <a:r>
-              <a:rPr sz="1450" b="1">
-                <a:solidFill>
-                  <a:srgbClr val="1D1D1F"/>
-                </a:solidFill>
-                <a:latin typeface="Arial"/>
-              </a:rPr>
-              <a:t>34   longitudes normalizadas</a:t>
-            </a:r>
-          </a:p>
-          <a:p>
-            <a:pPr algn="l">
-              <a:lnSpc>
-                <a:spcPct val="130000"/>
-              </a:lnSpc>
-              <a:spcBef>
-                <a:spcPts val="600"/>
-              </a:spcBef>
-            </a:pPr>
-            <a:r>
-              <a:rPr sz="1050" b="0">
-                <a:solidFill>
-                  <a:srgbClr val="6E6E73"/>
-                </a:solidFill>
-                <a:latin typeface="Arial"/>
-              </a:rPr>
-              <a:t>de 6 a 400 mm; la chaveta se ajusta hacia abajo, nunca hacia arriba</a:t>
-            </a:r>
-          </a:p>
-        </p:txBody>
-      </p:sp>
-      <p:sp>
-        <p:nvSpPr>
-          <p:cNvPr id="9" name="Rounded Rectangle 8"/>
-          <p:cNvSpPr/>
-          <p:nvPr/>
-        </p:nvSpPr>
-        <p:spPr>
-          <a:xfrm>
-            <a:off x="6172200" y="2788920"/>
-            <a:ext cx="2542032" cy="1627632"/>
-          </a:xfrm>
-          <a:prstGeom prst="roundRect">
-            <a:avLst>
-              <a:gd name="adj" fmla="val 3500"/>
-            </a:avLst>
-          </a:prstGeom>
-          <a:solidFill>
-            <a:srgbClr val="F5F5F7"/>
-          </a:solidFill>
-          <a:ln>
-            <a:noFill/>
-          </a:ln>
-          <a:effectLst/>
-        </p:spPr>
-        <p:style>
-          <a:lnRef idx="1">
-            <a:schemeClr val="accent1"/>
-          </a:lnRef>
-          <a:fillRef idx="3">
-            <a:schemeClr val="accent1"/>
-          </a:fillRef>
-          <a:effectRef idx="2">
-            <a:schemeClr val="accent1"/>
-          </a:effectRef>
-          <a:fontRef idx="minor">
-            <a:schemeClr val="lt1"/>
-          </a:fontRef>
-        </p:style>
-        <p:txBody>
-          <a:bodyPr rtlCol="0" anchor="ctr"/>
-          <a:lstStyle/>
-          <a:p>
-            <a:pPr algn="ctr"/>
-          </a:p>
-        </p:txBody>
-      </p:sp>
-      <p:sp>
-        <p:nvSpPr>
-          <p:cNvPr id="10" name="TextBox 9"/>
-          <p:cNvSpPr txBox="1"/>
-          <p:nvPr/>
-        </p:nvSpPr>
-        <p:spPr>
-          <a:xfrm>
-            <a:off x="6409944" y="2990088"/>
-            <a:ext cx="2084832" cy="1298448"/>
-          </a:xfrm>
-          <a:prstGeom prst="rect">
-            <a:avLst/>
-          </a:prstGeom>
-          <a:noFill/>
-        </p:spPr>
-        <p:txBody>
-          <a:bodyPr wrap="square" anchor="t" lIns="0" rIns="0" tIns="0" bIns="0">
-            <a:spAutoFit/>
-          </a:bodyPr>
-          <a:lstStyle/>
-          <a:p>
-            <a:pPr algn="l">
-              <a:lnSpc>
-                <a:spcPct val="105000"/>
-              </a:lnSpc>
-            </a:pPr>
-            <a:r>
-              <a:rPr sz="1450" b="1">
-                <a:solidFill>
-                  <a:srgbClr val="1D1D1F"/>
-                </a:solidFill>
-                <a:latin typeface="Arial"/>
-              </a:rPr>
-              <a:t>7   bandas de radios</a:t>
-            </a:r>
-          </a:p>
-          <a:p>
-            <a:pPr algn="l">
-              <a:lnSpc>
-                <a:spcPct val="130000"/>
-              </a:lnSpc>
-              <a:spcBef>
-                <a:spcPts val="600"/>
-              </a:spcBef>
-            </a:pPr>
-            <a:r>
-              <a:rPr sz="1050" b="0">
-                <a:solidFill>
-                  <a:srgbClr val="6E6E73"/>
-                </a:solidFill>
-                <a:latin typeface="Arial"/>
-              </a:rPr>
-              <a:t>r1 de boca y r2 de fondo por separado: no son el mismo radio</a:t>
-            </a:r>
-          </a:p>
-        </p:txBody>
-      </p:sp>
-      <p:sp>
-        <p:nvSpPr>
-          <p:cNvPr id="11" name="Rounded Rectangle 10"/>
-          <p:cNvSpPr/>
-          <p:nvPr/>
-        </p:nvSpPr>
-        <p:spPr>
-          <a:xfrm>
-            <a:off x="8869680" y="2788920"/>
-            <a:ext cx="2542032" cy="1627632"/>
-          </a:xfrm>
-          <a:prstGeom prst="roundRect">
-            <a:avLst>
-              <a:gd name="adj" fmla="val 3500"/>
-            </a:avLst>
-          </a:prstGeom>
-          <a:solidFill>
-            <a:srgbClr val="F5F5F7"/>
-          </a:solidFill>
-          <a:ln>
-            <a:noFill/>
-          </a:ln>
-          <a:effectLst/>
-        </p:spPr>
-        <p:style>
-          <a:lnRef idx="1">
-            <a:schemeClr val="accent1"/>
-          </a:lnRef>
-          <a:fillRef idx="3">
-            <a:schemeClr val="accent1"/>
-          </a:fillRef>
-          <a:effectRef idx="2">
-            <a:schemeClr val="accent1"/>
-          </a:effectRef>
-          <a:fontRef idx="minor">
-            <a:schemeClr val="lt1"/>
-          </a:fontRef>
-        </p:style>
-        <p:txBody>
-          <a:bodyPr rtlCol="0" anchor="ctr"/>
-          <a:lstStyle/>
-          <a:p>
-            <a:pPr algn="ctr"/>
-          </a:p>
-        </p:txBody>
-      </p:sp>
-      <p:sp>
-        <p:nvSpPr>
-          <p:cNvPr id="12" name="TextBox 11"/>
-          <p:cNvSpPr txBox="1"/>
-          <p:nvPr/>
-        </p:nvSpPr>
-        <p:spPr>
-          <a:xfrm>
-            <a:off x="9107424" y="2990088"/>
-            <a:ext cx="2084832" cy="1298448"/>
-          </a:xfrm>
-          <a:prstGeom prst="rect">
-            <a:avLst/>
-          </a:prstGeom>
-          <a:noFill/>
-        </p:spPr>
-        <p:txBody>
-          <a:bodyPr wrap="square" anchor="t" lIns="0" rIns="0" tIns="0" bIns="0">
-            <a:spAutoFit/>
-          </a:bodyPr>
-          <a:lstStyle/>
-          <a:p>
-            <a:pPr algn="l">
-              <a:lnSpc>
-                <a:spcPct val="105000"/>
-              </a:lnSpc>
-            </a:pPr>
-            <a:r>
-              <a:rPr sz="1450" b="1">
-                <a:solidFill>
-                  <a:srgbClr val="1D1D1F"/>
-                </a:solidFill>
-                <a:latin typeface="Arial"/>
-              </a:rPr>
-              <a:t>3   formas implementadas</a:t>
-            </a:r>
-          </a:p>
-          <a:p>
-            <a:pPr algn="l">
-              <a:lnSpc>
-                <a:spcPct val="130000"/>
-              </a:lnSpc>
-              <a:spcBef>
-                <a:spcPts val="600"/>
-              </a:spcBef>
-            </a:pPr>
-            <a:r>
-              <a:rPr sz="1050" b="0">
-                <a:solidFill>
-                  <a:srgbClr val="6E6E73"/>
-                </a:solidFill>
-                <a:latin typeface="Arial"/>
-              </a:rPr>
-              <a:t>A, B y AB. De C a J se rechazan con un mensaje propio, no en silencio</a:t>
-            </a:r>
-          </a:p>
-        </p:txBody>
-      </p:sp>
-      <p:sp>
-        <p:nvSpPr>
-          <p:cNvPr id="13" name="TextBox 12"/>
-          <p:cNvSpPr txBox="1"/>
-          <p:nvPr/>
-        </p:nvSpPr>
-        <p:spPr>
-          <a:xfrm>
-            <a:off x="777240" y="4736592"/>
-            <a:ext cx="10637215" cy="1280160"/>
-          </a:xfrm>
-          <a:prstGeom prst="rect">
-            <a:avLst/>
-          </a:prstGeom>
-          <a:noFill/>
-        </p:spPr>
-        <p:txBody>
-          <a:bodyPr wrap="square" anchor="t" lIns="0" rIns="0" tIns="0" bIns="0">
-            <a:spAutoFit/>
-          </a:bodyPr>
-          <a:lstStyle/>
-          <a:p>
-            <a:pPr algn="l">
-              <a:lnSpc>
-                <a:spcPct val="100000"/>
-              </a:lnSpc>
-            </a:pPr>
-            <a:r>
-              <a:rPr sz="1500" b="1">
-                <a:solidFill>
-                  <a:srgbClr val="1D1D1F"/>
-                </a:solidFill>
-                <a:latin typeface="Arial"/>
-              </a:rPr>
-              <a:t>D40, la fila de referencia del proyecto</a:t>
-            </a:r>
-          </a:p>
-          <a:p>
-            <a:pPr algn="l">
-              <a:lnSpc>
-                <a:spcPct val="135000"/>
-              </a:lnSpc>
-              <a:spcBef>
-                <a:spcPts val="1000"/>
-              </a:spcBef>
-            </a:pPr>
-            <a:r>
-              <a:rPr sz="1300" b="0">
-                <a:solidFill>
-                  <a:srgbClr val="6E6E73"/>
-                </a:solidFill>
-                <a:latin typeface="Consolas"/>
-              </a:rPr>
-              <a:t>38 &lt; d1 ≤ 44 mm     b × h = 12 × 8 mm     t1 = 5,00 +0,20 mm     t2 = 3,30 mm     d2(ref) = 48,00 mm     r1 = 0,25…0,40 mm     r2 = 0,16…0,25 mm</a:t>
-            </a:r>
-          </a:p>
-        </p:txBody>
-      </p:sp>
-      <p:sp>
-        <p:nvSpPr>
-          <p:cNvPr id="14" name="TextBox 13"/>
-          <p:cNvSpPr txBox="1"/>
-          <p:nvPr/>
-        </p:nvSpPr>
-        <p:spPr>
-          <a:xfrm>
-            <a:off x="777240" y="5943600"/>
-            <a:ext cx="10058400" cy="640080"/>
-          </a:xfrm>
-          <a:prstGeom prst="rect">
-            <a:avLst/>
-          </a:prstGeom>
-          <a:noFill/>
-        </p:spPr>
-        <p:txBody>
-          <a:bodyPr wrap="square" anchor="t" lIns="0" rIns="0" tIns="0" bIns="0">
-            <a:spAutoFit/>
-          </a:bodyPr>
-          <a:lstStyle/>
-          <a:p>
-            <a:pPr algn="l">
-              <a:lnSpc>
-                <a:spcPct val="125000"/>
-              </a:lnSpc>
-            </a:pPr>
-            <a:r>
-              <a:rPr sz="1150" b="0">
-                <a:solidFill>
-                  <a:srgbClr val="86868B"/>
-                </a:solidFill>
-                <a:latin typeface="Arial"/>
-              </a:rPr>
-              <a:t>El chaflán de la chaveta no está en la tabla: es un parámetro del usuario (c = 0,8 mm por defecto) y así se declara en el informe.</a:t>
-            </a:r>
-          </a:p>
-        </p:txBody>
-      </p:sp>
-      <p:sp>
-        <p:nvSpPr>
-          <p:cNvPr id="15" name="TextBox 14"/>
           <p:cNvSpPr txBox="1"/>
           <p:nvPr/>
         </p:nvSpPr>
@@ -6215,14 +7014,14 @@
                 </a:solidFill>
                 <a:latin typeface="Arial"/>
               </a:rPr>
-              <a:t>CAPACIDAD RESISTENTE</a:t>
+              <a:t>SELECCIÓN DE MALLA</a:t>
             </a:r>
           </a:p>
         </p:txBody>
       </p:sp>
       <p:pic>
         <p:nvPicPr>
-          <p:cNvPr id="3" name="Picture 2" descr="dia_metodos.png"/>
+          <p:cNvPr id="3" name="Picture 2" descr="dia_mesh_loop.png"/>
           <p:cNvPicPr>
             <a:picLocks noChangeAspect="1"/>
           </p:cNvPicPr>
@@ -6236,8 +7035,8 @@
         </p:blipFill>
         <p:spPr>
           <a:xfrm>
-            <a:off x="973788" y="1170432"/>
-            <a:ext cx="10244119" cy="4727448"/>
+            <a:off x="777240" y="1366557"/>
+            <a:ext cx="10637215" cy="4335197"/>
           </a:xfrm>
           <a:prstGeom prst="rect">
             <a:avLst/>
@@ -6343,38 +7142,716 @@
                 </a:solidFill>
                 <a:latin typeface="Arial"/>
               </a:rPr>
-              <a:t>RESULTADOS</a:t>
-            </a:r>
-          </a:p>
-        </p:txBody>
-      </p:sp>
-      <p:pic>
-        <p:nvPicPr>
-          <p:cNvPr id="3" name="Picture 2" descr="chart_pares.png"/>
-          <p:cNvPicPr>
-            <a:picLocks noChangeAspect="1"/>
-          </p:cNvPicPr>
-          <p:nvPr/>
-        </p:nvPicPr>
-        <p:blipFill>
-          <a:blip r:embed="rId2"/>
-          <a:stretch>
-            <a:fillRect/>
-          </a:stretch>
-        </p:blipFill>
-        <p:spPr>
-          <a:xfrm>
-            <a:off x="777240" y="1192479"/>
-            <a:ext cx="10637215" cy="4683353"/>
-          </a:xfrm>
-          <a:prstGeom prst="rect">
-            <a:avLst/>
-          </a:prstGeom>
-        </p:spPr>
-      </p:pic>
-      <p:sp>
-        <p:nvSpPr>
-          <p:cNvPr id="4" name="TextBox 3"/>
+              <a:t>MONTAJE DEL ANÁLISIS</a:t>
+            </a:r>
+          </a:p>
+        </p:txBody>
+      </p:sp>
+      <p:sp>
+        <p:nvSpPr>
+          <p:cNvPr id="3" name="TextBox 2"/>
+          <p:cNvSpPr txBox="1"/>
+          <p:nvPr/>
+        </p:nvSpPr>
+        <p:spPr>
+          <a:xfrm>
+            <a:off x="777240" y="932688"/>
+            <a:ext cx="10637215" cy="914400"/>
+          </a:xfrm>
+          <a:prstGeom prst="rect">
+            <a:avLst/>
+          </a:prstGeom>
+          <a:noFill/>
+        </p:spPr>
+        <p:txBody>
+          <a:bodyPr wrap="square" anchor="t" lIns="0" rIns="0" tIns="0" bIns="0">
+            <a:spAutoFit/>
+          </a:bodyPr>
+          <a:lstStyle/>
+          <a:p>
+            <a:pPr algn="l">
+              <a:lnSpc>
+                <a:spcPct val="95000"/>
+              </a:lnSpc>
+            </a:pPr>
+            <a:r>
+              <a:rPr sz="3000" b="1">
+                <a:solidFill>
+                  <a:srgbClr val="1D1D1F"/>
+                </a:solidFill>
+                <a:latin typeface="Arial"/>
+              </a:rPr>
+              <a:t>Si se pide análisis, esto es lo que se monta</a:t>
+            </a:r>
+          </a:p>
+        </p:txBody>
+      </p:sp>
+      <p:sp>
+        <p:nvSpPr>
+          <p:cNvPr id="4" name="Rounded Rectangle 3"/>
+          <p:cNvSpPr/>
+          <p:nvPr/>
+        </p:nvSpPr>
+        <p:spPr>
+          <a:xfrm>
+            <a:off x="777240" y="2011680"/>
+            <a:ext cx="3411626" cy="1664208"/>
+          </a:xfrm>
+          <a:prstGeom prst="roundRect">
+            <a:avLst>
+              <a:gd name="adj" fmla="val 3500"/>
+            </a:avLst>
+          </a:prstGeom>
+          <a:solidFill>
+            <a:srgbClr val="F5F5F7"/>
+          </a:solidFill>
+          <a:ln>
+            <a:noFill/>
+          </a:ln>
+          <a:effectLst/>
+        </p:spPr>
+        <p:style>
+          <a:lnRef idx="1">
+            <a:schemeClr val="accent1"/>
+          </a:lnRef>
+          <a:fillRef idx="3">
+            <a:schemeClr val="accent1"/>
+          </a:fillRef>
+          <a:effectRef idx="2">
+            <a:schemeClr val="accent1"/>
+          </a:effectRef>
+          <a:fontRef idx="minor">
+            <a:schemeClr val="lt1"/>
+          </a:fontRef>
+        </p:style>
+        <p:txBody>
+          <a:bodyPr rtlCol="0" anchor="ctr"/>
+          <a:lstStyle/>
+          <a:p>
+            <a:pPr algn="ctr"/>
+          </a:p>
+        </p:txBody>
+      </p:sp>
+      <p:sp>
+        <p:nvSpPr>
+          <p:cNvPr id="5" name="TextBox 4"/>
+          <p:cNvSpPr txBox="1"/>
+          <p:nvPr/>
+        </p:nvSpPr>
+        <p:spPr>
+          <a:xfrm>
+            <a:off x="996696" y="2194560"/>
+            <a:ext cx="2972714" cy="1371600"/>
+          </a:xfrm>
+          <a:prstGeom prst="rect">
+            <a:avLst/>
+          </a:prstGeom>
+          <a:noFill/>
+        </p:spPr>
+        <p:txBody>
+          <a:bodyPr wrap="square" anchor="t" lIns="0" rIns="0" tIns="0" bIns="0">
+            <a:spAutoFit/>
+          </a:bodyPr>
+          <a:lstStyle/>
+          <a:p>
+            <a:pPr algn="l">
+              <a:lnSpc>
+                <a:spcPct val="110000"/>
+              </a:lnSpc>
+            </a:pPr>
+            <a:r>
+              <a:rPr sz="1350" b="1">
+                <a:solidFill>
+                  <a:srgbClr val="1D1D1F"/>
+                </a:solidFill>
+                <a:latin typeface="Arial"/>
+              </a:rPr>
+              <a:t>Contacto</a:t>
+            </a:r>
+          </a:p>
+          <a:p>
+            <a:pPr algn="l">
+              <a:lnSpc>
+                <a:spcPct val="130000"/>
+              </a:lnSpc>
+              <a:spcBef>
+                <a:spcPts val="600"/>
+              </a:spcBef>
+            </a:pPr>
+            <a:r>
+              <a:rPr sz="1050" b="0">
+                <a:solidFill>
+                  <a:srgbClr val="6E6E73"/>
+                </a:solidFill>
+                <a:latin typeface="Arial"/>
+              </a:rPr>
+              <a:t>Contacto general con rozamiento por penalización isótropo y comportamiento normal duro con separación permitida.</a:t>
+            </a:r>
+          </a:p>
+        </p:txBody>
+      </p:sp>
+      <p:sp>
+        <p:nvSpPr>
+          <p:cNvPr id="6" name="Rounded Rectangle 5"/>
+          <p:cNvSpPr/>
+          <p:nvPr/>
+        </p:nvSpPr>
+        <p:spPr>
+          <a:xfrm>
+            <a:off x="4390034" y="2011680"/>
+            <a:ext cx="3411626" cy="1664208"/>
+          </a:xfrm>
+          <a:prstGeom prst="roundRect">
+            <a:avLst>
+              <a:gd name="adj" fmla="val 3500"/>
+            </a:avLst>
+          </a:prstGeom>
+          <a:solidFill>
+            <a:srgbClr val="F5F5F7"/>
+          </a:solidFill>
+          <a:ln>
+            <a:noFill/>
+          </a:ln>
+          <a:effectLst/>
+        </p:spPr>
+        <p:style>
+          <a:lnRef idx="1">
+            <a:schemeClr val="accent1"/>
+          </a:lnRef>
+          <a:fillRef idx="3">
+            <a:schemeClr val="accent1"/>
+          </a:fillRef>
+          <a:effectRef idx="2">
+            <a:schemeClr val="accent1"/>
+          </a:effectRef>
+          <a:fontRef idx="minor">
+            <a:schemeClr val="lt1"/>
+          </a:fontRef>
+        </p:style>
+        <p:txBody>
+          <a:bodyPr rtlCol="0" anchor="ctr"/>
+          <a:lstStyle/>
+          <a:p>
+            <a:pPr algn="ctr"/>
+          </a:p>
+        </p:txBody>
+      </p:sp>
+      <p:sp>
+        <p:nvSpPr>
+          <p:cNvPr id="7" name="TextBox 6"/>
+          <p:cNvSpPr txBox="1"/>
+          <p:nvPr/>
+        </p:nvSpPr>
+        <p:spPr>
+          <a:xfrm>
+            <a:off x="4609490" y="2194560"/>
+            <a:ext cx="2972714" cy="1371600"/>
+          </a:xfrm>
+          <a:prstGeom prst="rect">
+            <a:avLst/>
+          </a:prstGeom>
+          <a:noFill/>
+        </p:spPr>
+        <p:txBody>
+          <a:bodyPr wrap="square" anchor="t" lIns="0" rIns="0" tIns="0" bIns="0">
+            <a:spAutoFit/>
+          </a:bodyPr>
+          <a:lstStyle/>
+          <a:p>
+            <a:pPr algn="l">
+              <a:lnSpc>
+                <a:spcPct val="110000"/>
+              </a:lnSpc>
+            </a:pPr>
+            <a:r>
+              <a:rPr sz="1350" b="1">
+                <a:solidFill>
+                  <a:srgbClr val="1D1D1F"/>
+                </a:solidFill>
+                <a:latin typeface="Arial"/>
+              </a:rPr>
+              <a:t>Extremo motriz</a:t>
+            </a:r>
+          </a:p>
+          <a:p>
+            <a:pPr algn="l">
+              <a:lnSpc>
+                <a:spcPct val="130000"/>
+              </a:lnSpc>
+              <a:spcBef>
+                <a:spcPts val="600"/>
+              </a:spcBef>
+            </a:pPr>
+            <a:r>
+              <a:rPr sz="1050" b="0">
+                <a:solidFill>
+                  <a:srgbClr val="6E6E73"/>
+                </a:solidFill>
+                <a:latin typeface="Arial"/>
+              </a:rPr>
+              <a:t>Superficie en el extremo del eje, punto de referencia y acoplamiento cinemático sobre toda la superficie.</a:t>
+            </a:r>
+          </a:p>
+        </p:txBody>
+      </p:sp>
+      <p:sp>
+        <p:nvSpPr>
+          <p:cNvPr id="8" name="Rounded Rectangle 7"/>
+          <p:cNvSpPr/>
+          <p:nvPr/>
+        </p:nvSpPr>
+        <p:spPr>
+          <a:xfrm>
+            <a:off x="8002828" y="2011680"/>
+            <a:ext cx="3411626" cy="1664208"/>
+          </a:xfrm>
+          <a:prstGeom prst="roundRect">
+            <a:avLst>
+              <a:gd name="adj" fmla="val 3500"/>
+            </a:avLst>
+          </a:prstGeom>
+          <a:solidFill>
+            <a:srgbClr val="F5F5F7"/>
+          </a:solidFill>
+          <a:ln>
+            <a:noFill/>
+          </a:ln>
+          <a:effectLst/>
+        </p:spPr>
+        <p:style>
+          <a:lnRef idx="1">
+            <a:schemeClr val="accent1"/>
+          </a:lnRef>
+          <a:fillRef idx="3">
+            <a:schemeClr val="accent1"/>
+          </a:fillRef>
+          <a:effectRef idx="2">
+            <a:schemeClr val="accent1"/>
+          </a:effectRef>
+          <a:fontRef idx="minor">
+            <a:schemeClr val="lt1"/>
+          </a:fontRef>
+        </p:style>
+        <p:txBody>
+          <a:bodyPr rtlCol="0" anchor="ctr"/>
+          <a:lstStyle/>
+          <a:p>
+            <a:pPr algn="ctr"/>
+          </a:p>
+        </p:txBody>
+      </p:sp>
+      <p:sp>
+        <p:nvSpPr>
+          <p:cNvPr id="9" name="TextBox 8"/>
+          <p:cNvSpPr txBox="1"/>
+          <p:nvPr/>
+        </p:nvSpPr>
+        <p:spPr>
+          <a:xfrm>
+            <a:off x="8222284" y="2194560"/>
+            <a:ext cx="2972714" cy="1371600"/>
+          </a:xfrm>
+          <a:prstGeom prst="rect">
+            <a:avLst/>
+          </a:prstGeom>
+          <a:noFill/>
+        </p:spPr>
+        <p:txBody>
+          <a:bodyPr wrap="square" anchor="t" lIns="0" rIns="0" tIns="0" bIns="0">
+            <a:spAutoFit/>
+          </a:bodyPr>
+          <a:lstStyle/>
+          <a:p>
+            <a:pPr algn="l">
+              <a:lnSpc>
+                <a:spcPct val="110000"/>
+              </a:lnSpc>
+            </a:pPr>
+            <a:r>
+              <a:rPr sz="1350" b="1">
+                <a:solidFill>
+                  <a:srgbClr val="1D1D1F"/>
+                </a:solidFill>
+                <a:latin typeface="Arial"/>
+              </a:rPr>
+              <a:t>Región sujeta</a:t>
+            </a:r>
+          </a:p>
+          <a:p>
+            <a:pPr algn="l">
+              <a:lnSpc>
+                <a:spcPct val="130000"/>
+              </a:lnSpc>
+              <a:spcBef>
+                <a:spcPts val="600"/>
+              </a:spcBef>
+            </a:pPr>
+            <a:r>
+              <a:rPr sz="1050" b="0">
+                <a:solidFill>
+                  <a:srgbClr val="6E6E73"/>
+                </a:solidFill>
+                <a:latin typeface="Arial"/>
+              </a:rPr>
+              <a:t>El diámetro exterior del cubo o sus dos caras, empotrado. Es una elección del usuario, no un supuesto oculto.</a:t>
+            </a:r>
+          </a:p>
+        </p:txBody>
+      </p:sp>
+      <p:sp>
+        <p:nvSpPr>
+          <p:cNvPr id="10" name="Rounded Rectangle 9"/>
+          <p:cNvSpPr/>
+          <p:nvPr/>
+        </p:nvSpPr>
+        <p:spPr>
+          <a:xfrm>
+            <a:off x="777240" y="3858768"/>
+            <a:ext cx="3411626" cy="1664208"/>
+          </a:xfrm>
+          <a:prstGeom prst="roundRect">
+            <a:avLst>
+              <a:gd name="adj" fmla="val 3500"/>
+            </a:avLst>
+          </a:prstGeom>
+          <a:solidFill>
+            <a:srgbClr val="F5F5F7"/>
+          </a:solidFill>
+          <a:ln>
+            <a:noFill/>
+          </a:ln>
+          <a:effectLst/>
+        </p:spPr>
+        <p:style>
+          <a:lnRef idx="1">
+            <a:schemeClr val="accent1"/>
+          </a:lnRef>
+          <a:fillRef idx="3">
+            <a:schemeClr val="accent1"/>
+          </a:fillRef>
+          <a:effectRef idx="2">
+            <a:schemeClr val="accent1"/>
+          </a:effectRef>
+          <a:fontRef idx="minor">
+            <a:schemeClr val="lt1"/>
+          </a:fontRef>
+        </p:style>
+        <p:txBody>
+          <a:bodyPr rtlCol="0" anchor="ctr"/>
+          <a:lstStyle/>
+          <a:p>
+            <a:pPr algn="ctr"/>
+          </a:p>
+        </p:txBody>
+      </p:sp>
+      <p:sp>
+        <p:nvSpPr>
+          <p:cNvPr id="11" name="TextBox 10"/>
+          <p:cNvSpPr txBox="1"/>
+          <p:nvPr/>
+        </p:nvSpPr>
+        <p:spPr>
+          <a:xfrm>
+            <a:off x="996696" y="4041648"/>
+            <a:ext cx="2972714" cy="1371600"/>
+          </a:xfrm>
+          <a:prstGeom prst="rect">
+            <a:avLst/>
+          </a:prstGeom>
+          <a:noFill/>
+        </p:spPr>
+        <p:txBody>
+          <a:bodyPr wrap="square" anchor="t" lIns="0" rIns="0" tIns="0" bIns="0">
+            <a:spAutoFit/>
+          </a:bodyPr>
+          <a:lstStyle/>
+          <a:p>
+            <a:pPr algn="l">
+              <a:lnSpc>
+                <a:spcPct val="110000"/>
+              </a:lnSpc>
+            </a:pPr>
+            <a:r>
+              <a:rPr sz="1350" b="1">
+                <a:solidFill>
+                  <a:srgbClr val="1D1D1F"/>
+                </a:solidFill>
+                <a:latin typeface="Arial"/>
+              </a:rPr>
+              <a:t>Paso</a:t>
+            </a:r>
+          </a:p>
+          <a:p>
+            <a:pPr algn="l">
+              <a:lnSpc>
+                <a:spcPct val="130000"/>
+              </a:lnSpc>
+              <a:spcBef>
+                <a:spcPts val="600"/>
+              </a:spcBef>
+            </a:pPr>
+            <a:r>
+              <a:rPr sz="1050" b="0">
+                <a:solidFill>
+                  <a:srgbClr val="6E6E73"/>
+                </a:solidFill>
+                <a:latin typeface="Arial"/>
+              </a:rPr>
+              <a:t>Paso estático TORSION, con no linealidad geométrica y estabilización opcionales y control de incremento del formulario.</a:t>
+            </a:r>
+          </a:p>
+        </p:txBody>
+      </p:sp>
+      <p:sp>
+        <p:nvSpPr>
+          <p:cNvPr id="12" name="Rounded Rectangle 11"/>
+          <p:cNvSpPr/>
+          <p:nvPr/>
+        </p:nvSpPr>
+        <p:spPr>
+          <a:xfrm>
+            <a:off x="4390034" y="3858768"/>
+            <a:ext cx="3411626" cy="1664208"/>
+          </a:xfrm>
+          <a:prstGeom prst="roundRect">
+            <a:avLst>
+              <a:gd name="adj" fmla="val 3500"/>
+            </a:avLst>
+          </a:prstGeom>
+          <a:solidFill>
+            <a:srgbClr val="F5F5F7"/>
+          </a:solidFill>
+          <a:ln>
+            <a:noFill/>
+          </a:ln>
+          <a:effectLst/>
+        </p:spPr>
+        <p:style>
+          <a:lnRef idx="1">
+            <a:schemeClr val="accent1"/>
+          </a:lnRef>
+          <a:fillRef idx="3">
+            <a:schemeClr val="accent1"/>
+          </a:fillRef>
+          <a:effectRef idx="2">
+            <a:schemeClr val="accent1"/>
+          </a:effectRef>
+          <a:fontRef idx="minor">
+            <a:schemeClr val="lt1"/>
+          </a:fontRef>
+        </p:style>
+        <p:txBody>
+          <a:bodyPr rtlCol="0" anchor="ctr"/>
+          <a:lstStyle/>
+          <a:p>
+            <a:pPr algn="ctr"/>
+          </a:p>
+        </p:txBody>
+      </p:sp>
+      <p:sp>
+        <p:nvSpPr>
+          <p:cNvPr id="13" name="TextBox 12"/>
+          <p:cNvSpPr txBox="1"/>
+          <p:nvPr/>
+        </p:nvSpPr>
+        <p:spPr>
+          <a:xfrm>
+            <a:off x="4609490" y="4041648"/>
+            <a:ext cx="2972714" cy="1371600"/>
+          </a:xfrm>
+          <a:prstGeom prst="rect">
+            <a:avLst/>
+          </a:prstGeom>
+          <a:noFill/>
+        </p:spPr>
+        <p:txBody>
+          <a:bodyPr wrap="square" anchor="t" lIns="0" rIns="0" tIns="0" bIns="0">
+            <a:spAutoFit/>
+          </a:bodyPr>
+          <a:lstStyle/>
+          <a:p>
+            <a:pPr algn="l">
+              <a:lnSpc>
+                <a:spcPct val="110000"/>
+              </a:lnSpc>
+            </a:pPr>
+            <a:r>
+              <a:rPr sz="1350" b="1">
+                <a:solidFill>
+                  <a:srgbClr val="1D1D1F"/>
+                </a:solidFill>
+                <a:latin typeface="Arial"/>
+              </a:rPr>
+              <a:t>Carga</a:t>
+            </a:r>
+          </a:p>
+          <a:p>
+            <a:pPr algn="l">
+              <a:lnSpc>
+                <a:spcPct val="130000"/>
+              </a:lnSpc>
+              <a:spcBef>
+                <a:spcPts val="600"/>
+              </a:spcBef>
+            </a:pPr>
+            <a:r>
+              <a:rPr sz="1050" b="0">
+                <a:solidFill>
+                  <a:srgbClr val="6E6E73"/>
+                </a:solidFill>
+                <a:latin typeface="Arial"/>
+              </a:rPr>
+              <a:t>Momento sobre el eje aplicado en el punto de referencia; el punto guía bloquea todos los grados de libertad menos el giro.</a:t>
+            </a:r>
+          </a:p>
+        </p:txBody>
+      </p:sp>
+      <p:sp>
+        <p:nvSpPr>
+          <p:cNvPr id="14" name="Rounded Rectangle 13"/>
+          <p:cNvSpPr/>
+          <p:nvPr/>
+        </p:nvSpPr>
+        <p:spPr>
+          <a:xfrm>
+            <a:off x="8002828" y="3858768"/>
+            <a:ext cx="3411626" cy="1664208"/>
+          </a:xfrm>
+          <a:prstGeom prst="roundRect">
+            <a:avLst>
+              <a:gd name="adj" fmla="val 3500"/>
+            </a:avLst>
+          </a:prstGeom>
+          <a:solidFill>
+            <a:srgbClr val="F5F5F7"/>
+          </a:solidFill>
+          <a:ln>
+            <a:noFill/>
+          </a:ln>
+          <a:effectLst/>
+        </p:spPr>
+        <p:style>
+          <a:lnRef idx="1">
+            <a:schemeClr val="accent1"/>
+          </a:lnRef>
+          <a:fillRef idx="3">
+            <a:schemeClr val="accent1"/>
+          </a:fillRef>
+          <a:effectRef idx="2">
+            <a:schemeClr val="accent1"/>
+          </a:effectRef>
+          <a:fontRef idx="minor">
+            <a:schemeClr val="lt1"/>
+          </a:fontRef>
+        </p:style>
+        <p:txBody>
+          <a:bodyPr rtlCol="0" anchor="ctr"/>
+          <a:lstStyle/>
+          <a:p>
+            <a:pPr algn="ctr"/>
+          </a:p>
+        </p:txBody>
+      </p:sp>
+      <p:sp>
+        <p:nvSpPr>
+          <p:cNvPr id="15" name="TextBox 14"/>
+          <p:cNvSpPr txBox="1"/>
+          <p:nvPr/>
+        </p:nvSpPr>
+        <p:spPr>
+          <a:xfrm>
+            <a:off x="8222284" y="4041648"/>
+            <a:ext cx="2972714" cy="1371600"/>
+          </a:xfrm>
+          <a:prstGeom prst="rect">
+            <a:avLst/>
+          </a:prstGeom>
+          <a:noFill/>
+        </p:spPr>
+        <p:txBody>
+          <a:bodyPr wrap="square" anchor="t" lIns="0" rIns="0" tIns="0" bIns="0">
+            <a:spAutoFit/>
+          </a:bodyPr>
+          <a:lstStyle/>
+          <a:p>
+            <a:pPr algn="l">
+              <a:lnSpc>
+                <a:spcPct val="110000"/>
+              </a:lnSpc>
+            </a:pPr>
+            <a:r>
+              <a:rPr sz="1350" b="1">
+                <a:solidFill>
+                  <a:srgbClr val="1D1D1F"/>
+                </a:solidFill>
+                <a:latin typeface="Arial"/>
+              </a:rPr>
+              <a:t>Salidas</a:t>
+            </a:r>
+          </a:p>
+          <a:p>
+            <a:pPr algn="l">
+              <a:lnSpc>
+                <a:spcPct val="130000"/>
+              </a:lnSpc>
+              <a:spcBef>
+                <a:spcPts val="600"/>
+              </a:spcBef>
+            </a:pPr>
+            <a:r>
+              <a:rPr sz="1050" b="0">
+                <a:solidFill>
+                  <a:srgbClr val="6E6E73"/>
+                </a:solidFill>
+                <a:latin typeface="Arial"/>
+              </a:rPr>
+              <a:t>Campo S, U, E, RF, CSTRESS y CDISP en cuatro intervalos; historia UR3 y RM3 en el punto de referencia.</a:t>
+            </a:r>
+          </a:p>
+        </p:txBody>
+      </p:sp>
+      <p:sp>
+        <p:nvSpPr>
+          <p:cNvPr id="16" name="TextBox 15"/>
+          <p:cNvSpPr txBox="1"/>
+          <p:nvPr/>
+        </p:nvSpPr>
+        <p:spPr>
+          <a:xfrm>
+            <a:off x="777240" y="6035040"/>
+            <a:ext cx="10058400" cy="640080"/>
+          </a:xfrm>
+          <a:prstGeom prst="rect">
+            <a:avLst/>
+          </a:prstGeom>
+          <a:noFill/>
+        </p:spPr>
+        <p:txBody>
+          <a:bodyPr wrap="square" anchor="t" lIns="0" rIns="0" tIns="0" bIns="0">
+            <a:spAutoFit/>
+          </a:bodyPr>
+          <a:lstStyle/>
+          <a:p>
+            <a:pPr algn="l">
+              <a:lnSpc>
+                <a:spcPct val="125000"/>
+              </a:lnSpc>
+            </a:pPr>
+            <a:r>
+              <a:rPr sz="1150" b="0">
+                <a:solidFill>
+                  <a:srgbClr val="86868B"/>
+                </a:solidFill>
+                <a:latin typeface="Arial"/>
+              </a:rPr>
+              <a:t>Crear el trabajo y enviarlo al solver siguen siendo dos decisiones separadas, y ninguna es el valor por defecto.</a:t>
+            </a:r>
+          </a:p>
+        </p:txBody>
+      </p:sp>
+      <p:sp>
+        <p:nvSpPr>
+          <p:cNvPr id="17" name="TextBox 16"/>
           <p:cNvSpPr txBox="1"/>
           <p:nvPr/>
         </p:nvSpPr>
@@ -6471,14 +7948,14 @@
                 </a:solidFill>
                 <a:latin typeface="Arial"/>
               </a:rPr>
-              <a:t>CORRECCIÓN 1 DE 2</a:t>
+              <a:t>TRAZABILIDAD</a:t>
             </a:r>
           </a:p>
         </p:txBody>
       </p:sp>
       <p:pic>
         <p:nvPicPr>
-          <p:cNvPr id="3" name="Picture 2" descr="dia_t2tr.png"/>
+          <p:cNvPr id="3" name="Picture 2" descr="dia_badges.png"/>
           <p:cNvPicPr>
             <a:picLocks noChangeAspect="1"/>
           </p:cNvPicPr>
@@ -6492,8 +7969,8 @@
         </p:blipFill>
         <p:spPr>
           <a:xfrm>
-            <a:off x="1552423" y="1170432"/>
-            <a:ext cx="9086848" cy="4727448"/>
+            <a:off x="1126965" y="1170432"/>
+            <a:ext cx="9937765" cy="4727448"/>
           </a:xfrm>
           <a:prstGeom prst="rect">
             <a:avLst/>
@@ -6599,38 +8076,605 @@
                 </a:solidFill>
                 <a:latin typeface="Arial"/>
               </a:rPr>
-              <a:t>CORRECCIÓN 2 DE 2</a:t>
-            </a:r>
-          </a:p>
-        </p:txBody>
-      </p:sp>
-      <p:pic>
-        <p:nvPicPr>
-          <p:cNvPr id="3" name="Picture 2" descr="chart_fw.png"/>
-          <p:cNvPicPr>
-            <a:picLocks noChangeAspect="1"/>
-          </p:cNvPicPr>
-          <p:nvPr/>
-        </p:nvPicPr>
-        <p:blipFill>
-          <a:blip r:embed="rId2"/>
-          <a:stretch>
-            <a:fillRect/>
-          </a:stretch>
-        </p:blipFill>
-        <p:spPr>
-          <a:xfrm>
-            <a:off x="811838" y="1170432"/>
-            <a:ext cx="10568019" cy="4727448"/>
-          </a:xfrm>
-          <a:prstGeom prst="rect">
-            <a:avLst/>
-          </a:prstGeom>
-        </p:spPr>
-      </p:pic>
+              <a:t>EL DATO NORMATIVO</a:t>
+            </a:r>
+          </a:p>
+        </p:txBody>
+      </p:sp>
+      <p:sp>
+        <p:nvSpPr>
+          <p:cNvPr id="3" name="TextBox 2"/>
+          <p:cNvSpPr txBox="1"/>
+          <p:nvPr/>
+        </p:nvSpPr>
+        <p:spPr>
+          <a:xfrm>
+            <a:off x="777240" y="932688"/>
+            <a:ext cx="10637215" cy="914400"/>
+          </a:xfrm>
+          <a:prstGeom prst="rect">
+            <a:avLst/>
+          </a:prstGeom>
+          <a:noFill/>
+        </p:spPr>
+        <p:txBody>
+          <a:bodyPr wrap="square" anchor="t" lIns="0" rIns="0" tIns="0" bIns="0">
+            <a:spAutoFit/>
+          </a:bodyPr>
+          <a:lstStyle/>
+          <a:p>
+            <a:pPr algn="l">
+              <a:lnSpc>
+                <a:spcPct val="95000"/>
+              </a:lnSpc>
+            </a:pPr>
+            <a:r>
+              <a:rPr sz="3100" b="1">
+                <a:solidFill>
+                  <a:srgbClr val="1D1D1F"/>
+                </a:solidFill>
+                <a:latin typeface="Arial"/>
+              </a:rPr>
+              <a:t>La tabla no se interpola: o hay fila, o hay error</a:t>
+            </a:r>
+          </a:p>
+        </p:txBody>
+      </p:sp>
       <p:sp>
         <p:nvSpPr>
           <p:cNvPr id="4" name="TextBox 3"/>
+          <p:cNvSpPr txBox="1"/>
+          <p:nvPr/>
+        </p:nvSpPr>
+        <p:spPr>
+          <a:xfrm>
+            <a:off x="777240" y="1700784"/>
+            <a:ext cx="9509760" cy="822960"/>
+          </a:xfrm>
+          <a:prstGeom prst="rect">
+            <a:avLst/>
+          </a:prstGeom>
+          <a:noFill/>
+        </p:spPr>
+        <p:txBody>
+          <a:bodyPr wrap="square" anchor="t" lIns="0" rIns="0" tIns="0" bIns="0">
+            <a:spAutoFit/>
+          </a:bodyPr>
+          <a:lstStyle/>
+          <a:p>
+            <a:pPr algn="l">
+              <a:lnSpc>
+                <a:spcPct val="125000"/>
+              </a:lnSpc>
+            </a:pPr>
+            <a:r>
+              <a:rPr sz="1450" b="0">
+                <a:solidFill>
+                  <a:srgbClr val="6E6E73"/>
+                </a:solidFill>
+                <a:latin typeface="Arial"/>
+              </a:rPr>
+              <a:t>din6885_row() devuelve la fila exacta con su etiqueta NORMATIVE. Fuera del rango de la norma lanza una excepción, para que nadie pueda declarar conformidad DIN con la fila más parecida.</a:t>
+            </a:r>
+          </a:p>
+        </p:txBody>
+      </p:sp>
+      <p:sp>
+        <p:nvSpPr>
+          <p:cNvPr id="5" name="Rounded Rectangle 4"/>
+          <p:cNvSpPr/>
+          <p:nvPr/>
+        </p:nvSpPr>
+        <p:spPr>
+          <a:xfrm>
+            <a:off x="777240" y="2788920"/>
+            <a:ext cx="2542032" cy="1627632"/>
+          </a:xfrm>
+          <a:prstGeom prst="roundRect">
+            <a:avLst>
+              <a:gd name="adj" fmla="val 3500"/>
+            </a:avLst>
+          </a:prstGeom>
+          <a:solidFill>
+            <a:srgbClr val="F5F5F7"/>
+          </a:solidFill>
+          <a:ln>
+            <a:noFill/>
+          </a:ln>
+          <a:effectLst/>
+        </p:spPr>
+        <p:style>
+          <a:lnRef idx="1">
+            <a:schemeClr val="accent1"/>
+          </a:lnRef>
+          <a:fillRef idx="3">
+            <a:schemeClr val="accent1"/>
+          </a:fillRef>
+          <a:effectRef idx="2">
+            <a:schemeClr val="accent1"/>
+          </a:effectRef>
+          <a:fontRef idx="minor">
+            <a:schemeClr val="lt1"/>
+          </a:fontRef>
+        </p:style>
+        <p:txBody>
+          <a:bodyPr rtlCol="0" anchor="ctr"/>
+          <a:lstStyle/>
+          <a:p>
+            <a:pPr algn="ctr"/>
+          </a:p>
+        </p:txBody>
+      </p:sp>
+      <p:sp>
+        <p:nvSpPr>
+          <p:cNvPr id="6" name="TextBox 5"/>
+          <p:cNvSpPr txBox="1"/>
+          <p:nvPr/>
+        </p:nvSpPr>
+        <p:spPr>
+          <a:xfrm>
+            <a:off x="1014984" y="2990088"/>
+            <a:ext cx="2084832" cy="1298448"/>
+          </a:xfrm>
+          <a:prstGeom prst="rect">
+            <a:avLst/>
+          </a:prstGeom>
+          <a:noFill/>
+        </p:spPr>
+        <p:txBody>
+          <a:bodyPr wrap="square" anchor="t" lIns="0" rIns="0" tIns="0" bIns="0">
+            <a:spAutoFit/>
+          </a:bodyPr>
+          <a:lstStyle/>
+          <a:p>
+            <a:pPr algn="l">
+              <a:lnSpc>
+                <a:spcPct val="105000"/>
+              </a:lnSpc>
+            </a:pPr>
+            <a:r>
+              <a:rPr sz="1450" b="1">
+                <a:solidFill>
+                  <a:srgbClr val="1D1D1F"/>
+                </a:solidFill>
+                <a:latin typeface="Arial"/>
+              </a:rPr>
+              <a:t>26   filas de sección</a:t>
+            </a:r>
+          </a:p>
+          <a:p>
+            <a:pPr algn="l">
+              <a:lnSpc>
+                <a:spcPct val="130000"/>
+              </a:lnSpc>
+              <a:spcBef>
+                <a:spcPts val="600"/>
+              </a:spcBef>
+            </a:pPr>
+            <a:r>
+              <a:rPr sz="1050" b="0">
+                <a:solidFill>
+                  <a:srgbClr val="6E6E73"/>
+                </a:solidFill>
+                <a:latin typeface="Arial"/>
+              </a:rPr>
+              <a:t>b × h, t1, t2, tolerancia de t1 y el incremento d2 para cada banda de diámetro</a:t>
+            </a:r>
+          </a:p>
+        </p:txBody>
+      </p:sp>
+      <p:sp>
+        <p:nvSpPr>
+          <p:cNvPr id="7" name="Rounded Rectangle 6"/>
+          <p:cNvSpPr/>
+          <p:nvPr/>
+        </p:nvSpPr>
+        <p:spPr>
+          <a:xfrm>
+            <a:off x="3474720" y="2788920"/>
+            <a:ext cx="2542032" cy="1627632"/>
+          </a:xfrm>
+          <a:prstGeom prst="roundRect">
+            <a:avLst>
+              <a:gd name="adj" fmla="val 3500"/>
+            </a:avLst>
+          </a:prstGeom>
+          <a:solidFill>
+            <a:srgbClr val="F5F5F7"/>
+          </a:solidFill>
+          <a:ln>
+            <a:noFill/>
+          </a:ln>
+          <a:effectLst/>
+        </p:spPr>
+        <p:style>
+          <a:lnRef idx="1">
+            <a:schemeClr val="accent1"/>
+          </a:lnRef>
+          <a:fillRef idx="3">
+            <a:schemeClr val="accent1"/>
+          </a:fillRef>
+          <a:effectRef idx="2">
+            <a:schemeClr val="accent1"/>
+          </a:effectRef>
+          <a:fontRef idx="minor">
+            <a:schemeClr val="lt1"/>
+          </a:fontRef>
+        </p:style>
+        <p:txBody>
+          <a:bodyPr rtlCol="0" anchor="ctr"/>
+          <a:lstStyle/>
+          <a:p>
+            <a:pPr algn="ctr"/>
+          </a:p>
+        </p:txBody>
+      </p:sp>
+      <p:sp>
+        <p:nvSpPr>
+          <p:cNvPr id="8" name="TextBox 7"/>
+          <p:cNvSpPr txBox="1"/>
+          <p:nvPr/>
+        </p:nvSpPr>
+        <p:spPr>
+          <a:xfrm>
+            <a:off x="3712464" y="2990088"/>
+            <a:ext cx="2084832" cy="1298448"/>
+          </a:xfrm>
+          <a:prstGeom prst="rect">
+            <a:avLst/>
+          </a:prstGeom>
+          <a:noFill/>
+        </p:spPr>
+        <p:txBody>
+          <a:bodyPr wrap="square" anchor="t" lIns="0" rIns="0" tIns="0" bIns="0">
+            <a:spAutoFit/>
+          </a:bodyPr>
+          <a:lstStyle/>
+          <a:p>
+            <a:pPr algn="l">
+              <a:lnSpc>
+                <a:spcPct val="105000"/>
+              </a:lnSpc>
+            </a:pPr>
+            <a:r>
+              <a:rPr sz="1450" b="1">
+                <a:solidFill>
+                  <a:srgbClr val="1D1D1F"/>
+                </a:solidFill>
+                <a:latin typeface="Arial"/>
+              </a:rPr>
+              <a:t>34   longitudes normalizadas</a:t>
+            </a:r>
+          </a:p>
+          <a:p>
+            <a:pPr algn="l">
+              <a:lnSpc>
+                <a:spcPct val="130000"/>
+              </a:lnSpc>
+              <a:spcBef>
+                <a:spcPts val="600"/>
+              </a:spcBef>
+            </a:pPr>
+            <a:r>
+              <a:rPr sz="1050" b="0">
+                <a:solidFill>
+                  <a:srgbClr val="6E6E73"/>
+                </a:solidFill>
+                <a:latin typeface="Arial"/>
+              </a:rPr>
+              <a:t>de 6 a 400 mm; la chaveta se ajusta hacia abajo, nunca hacia arriba</a:t>
+            </a:r>
+          </a:p>
+        </p:txBody>
+      </p:sp>
+      <p:sp>
+        <p:nvSpPr>
+          <p:cNvPr id="9" name="Rounded Rectangle 8"/>
+          <p:cNvSpPr/>
+          <p:nvPr/>
+        </p:nvSpPr>
+        <p:spPr>
+          <a:xfrm>
+            <a:off x="6172200" y="2788920"/>
+            <a:ext cx="2542032" cy="1627632"/>
+          </a:xfrm>
+          <a:prstGeom prst="roundRect">
+            <a:avLst>
+              <a:gd name="adj" fmla="val 3500"/>
+            </a:avLst>
+          </a:prstGeom>
+          <a:solidFill>
+            <a:srgbClr val="F5F5F7"/>
+          </a:solidFill>
+          <a:ln>
+            <a:noFill/>
+          </a:ln>
+          <a:effectLst/>
+        </p:spPr>
+        <p:style>
+          <a:lnRef idx="1">
+            <a:schemeClr val="accent1"/>
+          </a:lnRef>
+          <a:fillRef idx="3">
+            <a:schemeClr val="accent1"/>
+          </a:fillRef>
+          <a:effectRef idx="2">
+            <a:schemeClr val="accent1"/>
+          </a:effectRef>
+          <a:fontRef idx="minor">
+            <a:schemeClr val="lt1"/>
+          </a:fontRef>
+        </p:style>
+        <p:txBody>
+          <a:bodyPr rtlCol="0" anchor="ctr"/>
+          <a:lstStyle/>
+          <a:p>
+            <a:pPr algn="ctr"/>
+          </a:p>
+        </p:txBody>
+      </p:sp>
+      <p:sp>
+        <p:nvSpPr>
+          <p:cNvPr id="10" name="TextBox 9"/>
+          <p:cNvSpPr txBox="1"/>
+          <p:nvPr/>
+        </p:nvSpPr>
+        <p:spPr>
+          <a:xfrm>
+            <a:off x="6409944" y="2990088"/>
+            <a:ext cx="2084832" cy="1298448"/>
+          </a:xfrm>
+          <a:prstGeom prst="rect">
+            <a:avLst/>
+          </a:prstGeom>
+          <a:noFill/>
+        </p:spPr>
+        <p:txBody>
+          <a:bodyPr wrap="square" anchor="t" lIns="0" rIns="0" tIns="0" bIns="0">
+            <a:spAutoFit/>
+          </a:bodyPr>
+          <a:lstStyle/>
+          <a:p>
+            <a:pPr algn="l">
+              <a:lnSpc>
+                <a:spcPct val="105000"/>
+              </a:lnSpc>
+            </a:pPr>
+            <a:r>
+              <a:rPr sz="1450" b="1">
+                <a:solidFill>
+                  <a:srgbClr val="1D1D1F"/>
+                </a:solidFill>
+                <a:latin typeface="Arial"/>
+              </a:rPr>
+              <a:t>7   bandas de radios</a:t>
+            </a:r>
+          </a:p>
+          <a:p>
+            <a:pPr algn="l">
+              <a:lnSpc>
+                <a:spcPct val="130000"/>
+              </a:lnSpc>
+              <a:spcBef>
+                <a:spcPts val="600"/>
+              </a:spcBef>
+            </a:pPr>
+            <a:r>
+              <a:rPr sz="1050" b="0">
+                <a:solidFill>
+                  <a:srgbClr val="6E6E73"/>
+                </a:solidFill>
+                <a:latin typeface="Arial"/>
+              </a:rPr>
+              <a:t>r1 de boca y r2 de fondo por separado: no son el mismo radio</a:t>
+            </a:r>
+          </a:p>
+        </p:txBody>
+      </p:sp>
+      <p:sp>
+        <p:nvSpPr>
+          <p:cNvPr id="11" name="Rounded Rectangle 10"/>
+          <p:cNvSpPr/>
+          <p:nvPr/>
+        </p:nvSpPr>
+        <p:spPr>
+          <a:xfrm>
+            <a:off x="8869680" y="2788920"/>
+            <a:ext cx="2542032" cy="1627632"/>
+          </a:xfrm>
+          <a:prstGeom prst="roundRect">
+            <a:avLst>
+              <a:gd name="adj" fmla="val 3500"/>
+            </a:avLst>
+          </a:prstGeom>
+          <a:solidFill>
+            <a:srgbClr val="F5F5F7"/>
+          </a:solidFill>
+          <a:ln>
+            <a:noFill/>
+          </a:ln>
+          <a:effectLst/>
+        </p:spPr>
+        <p:style>
+          <a:lnRef idx="1">
+            <a:schemeClr val="accent1"/>
+          </a:lnRef>
+          <a:fillRef idx="3">
+            <a:schemeClr val="accent1"/>
+          </a:fillRef>
+          <a:effectRef idx="2">
+            <a:schemeClr val="accent1"/>
+          </a:effectRef>
+          <a:fontRef idx="minor">
+            <a:schemeClr val="lt1"/>
+          </a:fontRef>
+        </p:style>
+        <p:txBody>
+          <a:bodyPr rtlCol="0" anchor="ctr"/>
+          <a:lstStyle/>
+          <a:p>
+            <a:pPr algn="ctr"/>
+          </a:p>
+        </p:txBody>
+      </p:sp>
+      <p:sp>
+        <p:nvSpPr>
+          <p:cNvPr id="12" name="TextBox 11"/>
+          <p:cNvSpPr txBox="1"/>
+          <p:nvPr/>
+        </p:nvSpPr>
+        <p:spPr>
+          <a:xfrm>
+            <a:off x="9107424" y="2990088"/>
+            <a:ext cx="2084832" cy="1298448"/>
+          </a:xfrm>
+          <a:prstGeom prst="rect">
+            <a:avLst/>
+          </a:prstGeom>
+          <a:noFill/>
+        </p:spPr>
+        <p:txBody>
+          <a:bodyPr wrap="square" anchor="t" lIns="0" rIns="0" tIns="0" bIns="0">
+            <a:spAutoFit/>
+          </a:bodyPr>
+          <a:lstStyle/>
+          <a:p>
+            <a:pPr algn="l">
+              <a:lnSpc>
+                <a:spcPct val="105000"/>
+              </a:lnSpc>
+            </a:pPr>
+            <a:r>
+              <a:rPr sz="1450" b="1">
+                <a:solidFill>
+                  <a:srgbClr val="1D1D1F"/>
+                </a:solidFill>
+                <a:latin typeface="Arial"/>
+              </a:rPr>
+              <a:t>3   formas implementadas</a:t>
+            </a:r>
+          </a:p>
+          <a:p>
+            <a:pPr algn="l">
+              <a:lnSpc>
+                <a:spcPct val="130000"/>
+              </a:lnSpc>
+              <a:spcBef>
+                <a:spcPts val="600"/>
+              </a:spcBef>
+            </a:pPr>
+            <a:r>
+              <a:rPr sz="1050" b="0">
+                <a:solidFill>
+                  <a:srgbClr val="6E6E73"/>
+                </a:solidFill>
+                <a:latin typeface="Arial"/>
+              </a:rPr>
+              <a:t>A, B y AB. De C a J se rechazan con un mensaje propio, no en silencio</a:t>
+            </a:r>
+          </a:p>
+        </p:txBody>
+      </p:sp>
+      <p:sp>
+        <p:nvSpPr>
+          <p:cNvPr id="13" name="TextBox 12"/>
+          <p:cNvSpPr txBox="1"/>
+          <p:nvPr/>
+        </p:nvSpPr>
+        <p:spPr>
+          <a:xfrm>
+            <a:off x="777240" y="4736592"/>
+            <a:ext cx="10637215" cy="1280160"/>
+          </a:xfrm>
+          <a:prstGeom prst="rect">
+            <a:avLst/>
+          </a:prstGeom>
+          <a:noFill/>
+        </p:spPr>
+        <p:txBody>
+          <a:bodyPr wrap="square" anchor="t" lIns="0" rIns="0" tIns="0" bIns="0">
+            <a:spAutoFit/>
+          </a:bodyPr>
+          <a:lstStyle/>
+          <a:p>
+            <a:pPr algn="l">
+              <a:lnSpc>
+                <a:spcPct val="100000"/>
+              </a:lnSpc>
+            </a:pPr>
+            <a:r>
+              <a:rPr sz="1500" b="1">
+                <a:solidFill>
+                  <a:srgbClr val="1D1D1F"/>
+                </a:solidFill>
+                <a:latin typeface="Arial"/>
+              </a:rPr>
+              <a:t>D40, la fila de referencia del proyecto</a:t>
+            </a:r>
+          </a:p>
+          <a:p>
+            <a:pPr algn="l">
+              <a:lnSpc>
+                <a:spcPct val="135000"/>
+              </a:lnSpc>
+              <a:spcBef>
+                <a:spcPts val="1000"/>
+              </a:spcBef>
+            </a:pPr>
+            <a:r>
+              <a:rPr sz="1300" b="0">
+                <a:solidFill>
+                  <a:srgbClr val="6E6E73"/>
+                </a:solidFill>
+                <a:latin typeface="Consolas"/>
+              </a:rPr>
+              <a:t>38 &lt; d1 ≤ 44 mm     b × h = 12 × 8 mm     t1 = 5,00 +0,20 mm     t2 = 3,30 mm     d2(ref) = 48,00 mm     r1 = 0,25…0,40 mm     r2 = 0,16…0,25 mm</a:t>
+            </a:r>
+          </a:p>
+        </p:txBody>
+      </p:sp>
+      <p:sp>
+        <p:nvSpPr>
+          <p:cNvPr id="14" name="TextBox 13"/>
+          <p:cNvSpPr txBox="1"/>
+          <p:nvPr/>
+        </p:nvSpPr>
+        <p:spPr>
+          <a:xfrm>
+            <a:off x="777240" y="5943600"/>
+            <a:ext cx="10058400" cy="640080"/>
+          </a:xfrm>
+          <a:prstGeom prst="rect">
+            <a:avLst/>
+          </a:prstGeom>
+          <a:noFill/>
+        </p:spPr>
+        <p:txBody>
+          <a:bodyPr wrap="square" anchor="t" lIns="0" rIns="0" tIns="0" bIns="0">
+            <a:spAutoFit/>
+          </a:bodyPr>
+          <a:lstStyle/>
+          <a:p>
+            <a:pPr algn="l">
+              <a:lnSpc>
+                <a:spcPct val="125000"/>
+              </a:lnSpc>
+            </a:pPr>
+            <a:r>
+              <a:rPr sz="1150" b="0">
+                <a:solidFill>
+                  <a:srgbClr val="86868B"/>
+                </a:solidFill>
+                <a:latin typeface="Arial"/>
+              </a:rPr>
+              <a:t>El chaflán de la chaveta no está en la tabla: es un parámetro del usuario (c = 0,8 mm por defecto) y así se declara en el informe.</a:t>
+            </a:r>
+          </a:p>
+        </p:txBody>
+      </p:sp>
+      <p:sp>
+        <p:nvSpPr>
+          <p:cNvPr id="15" name="TextBox 14"/>
           <p:cNvSpPr txBox="1"/>
           <p:nvPr/>
         </p:nvSpPr>
@@ -6727,38 +8771,677 @@
                 </a:solidFill>
                 <a:latin typeface="Arial"/>
               </a:rPr>
-              <a:t>HALLAZGO ABIERTO</a:t>
-            </a:r>
-          </a:p>
-        </p:txBody>
-      </p:sp>
-      <p:pic>
-        <p:nvPicPr>
-          <p:cNvPr id="3" name="Picture 2" descr="dia_eq9.png"/>
-          <p:cNvPicPr>
-            <a:picLocks noChangeAspect="1"/>
-          </p:cNvPicPr>
-          <p:nvPr/>
-        </p:nvPicPr>
-        <p:blipFill>
-          <a:blip r:embed="rId2"/>
-          <a:stretch>
-            <a:fillRect/>
-          </a:stretch>
-        </p:blipFill>
-        <p:spPr>
-          <a:xfrm>
-            <a:off x="1675805" y="1170432"/>
-            <a:ext cx="8840084" cy="4727448"/>
-          </a:xfrm>
-          <a:prstGeom prst="rect">
-            <a:avLst/>
-          </a:prstGeom>
-        </p:spPr>
-      </p:pic>
-      <p:sp>
-        <p:nvSpPr>
-          <p:cNvPr id="4" name="TextBox 3"/>
+              <a:t>LA AUDITORÍA</a:t>
+            </a:r>
+          </a:p>
+        </p:txBody>
+      </p:sp>
+      <p:sp>
+        <p:nvSpPr>
+          <p:cNvPr id="3" name="TextBox 2"/>
+          <p:cNvSpPr txBox="1"/>
+          <p:nvPr/>
+        </p:nvSpPr>
+        <p:spPr>
+          <a:xfrm>
+            <a:off x="777240" y="932688"/>
+            <a:ext cx="10637215" cy="914400"/>
+          </a:xfrm>
+          <a:prstGeom prst="rect">
+            <a:avLst/>
+          </a:prstGeom>
+          <a:noFill/>
+        </p:spPr>
+        <p:txBody>
+          <a:bodyPr wrap="square" anchor="t" lIns="0" rIns="0" tIns="0" bIns="0">
+            <a:spAutoFit/>
+          </a:bodyPr>
+          <a:lstStyle/>
+          <a:p>
+            <a:pPr algn="l">
+              <a:lnSpc>
+                <a:spcPct val="95000"/>
+              </a:lnSpc>
+            </a:pPr>
+            <a:r>
+              <a:rPr sz="3000" b="1">
+                <a:solidFill>
+                  <a:srgbClr val="1D1D1F"/>
+                </a:solidFill>
+                <a:latin typeface="Arial"/>
+              </a:rPr>
+              <a:t>El archivo que dice qué se construyó de verdad</a:t>
+            </a:r>
+          </a:p>
+        </p:txBody>
+      </p:sp>
+      <p:sp>
+        <p:nvSpPr>
+          <p:cNvPr id="4" name="Rounded Rectangle 3"/>
+          <p:cNvSpPr/>
+          <p:nvPr/>
+        </p:nvSpPr>
+        <p:spPr>
+          <a:xfrm>
+            <a:off x="777240" y="2011680"/>
+            <a:ext cx="3411626" cy="1664208"/>
+          </a:xfrm>
+          <a:prstGeom prst="roundRect">
+            <a:avLst>
+              <a:gd name="adj" fmla="val 3500"/>
+            </a:avLst>
+          </a:prstGeom>
+          <a:solidFill>
+            <a:srgbClr val="F5F5F7"/>
+          </a:solidFill>
+          <a:ln>
+            <a:noFill/>
+          </a:ln>
+          <a:effectLst/>
+        </p:spPr>
+        <p:style>
+          <a:lnRef idx="1">
+            <a:schemeClr val="accent1"/>
+          </a:lnRef>
+          <a:fillRef idx="3">
+            <a:schemeClr val="accent1"/>
+          </a:fillRef>
+          <a:effectRef idx="2">
+            <a:schemeClr val="accent1"/>
+          </a:effectRef>
+          <a:fontRef idx="minor">
+            <a:schemeClr val="lt1"/>
+          </a:fontRef>
+        </p:style>
+        <p:txBody>
+          <a:bodyPr rtlCol="0" anchor="ctr"/>
+          <a:lstStyle/>
+          <a:p>
+            <a:pPr algn="ctr"/>
+          </a:p>
+        </p:txBody>
+      </p:sp>
+      <p:sp>
+        <p:nvSpPr>
+          <p:cNvPr id="5" name="TextBox 4"/>
+          <p:cNvSpPr txBox="1"/>
+          <p:nvPr/>
+        </p:nvSpPr>
+        <p:spPr>
+          <a:xfrm>
+            <a:off x="996696" y="2194560"/>
+            <a:ext cx="2972714" cy="1371600"/>
+          </a:xfrm>
+          <a:prstGeom prst="rect">
+            <a:avLst/>
+          </a:prstGeom>
+          <a:noFill/>
+        </p:spPr>
+        <p:txBody>
+          <a:bodyPr wrap="square" anchor="t" lIns="0" rIns="0" tIns="0" bIns="0">
+            <a:spAutoFit/>
+          </a:bodyPr>
+          <a:lstStyle/>
+          <a:p>
+            <a:pPr algn="l">
+              <a:lnSpc>
+                <a:spcPct val="110000"/>
+              </a:lnSpc>
+            </a:pPr>
+            <a:r>
+              <a:rPr sz="1350" b="1">
+                <a:solidFill>
+                  <a:srgbClr val="1D1D1F"/>
+                </a:solidFill>
+                <a:latin typeface="Arial"/>
+              </a:rPr>
+              <a:t>Dos formatos</a:t>
+            </a:r>
+          </a:p>
+          <a:p>
+            <a:pPr algn="l">
+              <a:lnSpc>
+                <a:spcPct val="130000"/>
+              </a:lnSpc>
+              <a:spcBef>
+                <a:spcPts val="600"/>
+              </a:spcBef>
+            </a:pPr>
+            <a:r>
+              <a:rPr sz="1050" b="0">
+                <a:solidFill>
+                  <a:srgbClr val="6E6E73"/>
+                </a:solidFill>
+                <a:latin typeface="Arial"/>
+              </a:rPr>
+              <a:t>PARAM_BUILD_AUDIT.txt para leerlo con los ojos y .json para procesarlo con una herramienta.</a:t>
+            </a:r>
+          </a:p>
+        </p:txBody>
+      </p:sp>
+      <p:sp>
+        <p:nvSpPr>
+          <p:cNvPr id="6" name="Rounded Rectangle 5"/>
+          <p:cNvSpPr/>
+          <p:nvPr/>
+        </p:nvSpPr>
+        <p:spPr>
+          <a:xfrm>
+            <a:off x="4390034" y="2011680"/>
+            <a:ext cx="3411626" cy="1664208"/>
+          </a:xfrm>
+          <a:prstGeom prst="roundRect">
+            <a:avLst>
+              <a:gd name="adj" fmla="val 3500"/>
+            </a:avLst>
+          </a:prstGeom>
+          <a:solidFill>
+            <a:srgbClr val="F5F5F7"/>
+          </a:solidFill>
+          <a:ln>
+            <a:noFill/>
+          </a:ln>
+          <a:effectLst/>
+        </p:spPr>
+        <p:style>
+          <a:lnRef idx="1">
+            <a:schemeClr val="accent1"/>
+          </a:lnRef>
+          <a:fillRef idx="3">
+            <a:schemeClr val="accent1"/>
+          </a:fillRef>
+          <a:effectRef idx="2">
+            <a:schemeClr val="accent1"/>
+          </a:effectRef>
+          <a:fontRef idx="minor">
+            <a:schemeClr val="lt1"/>
+          </a:fontRef>
+        </p:style>
+        <p:txBody>
+          <a:bodyPr rtlCol="0" anchor="ctr"/>
+          <a:lstStyle/>
+          <a:p>
+            <a:pPr algn="ctr"/>
+          </a:p>
+        </p:txBody>
+      </p:sp>
+      <p:sp>
+        <p:nvSpPr>
+          <p:cNvPr id="7" name="TextBox 6"/>
+          <p:cNvSpPr txBox="1"/>
+          <p:nvPr/>
+        </p:nvSpPr>
+        <p:spPr>
+          <a:xfrm>
+            <a:off x="4609490" y="2194560"/>
+            <a:ext cx="2972714" cy="1371600"/>
+          </a:xfrm>
+          <a:prstGeom prst="rect">
+            <a:avLst/>
+          </a:prstGeom>
+          <a:noFill/>
+        </p:spPr>
+        <p:txBody>
+          <a:bodyPr wrap="square" anchor="t" lIns="0" rIns="0" tIns="0" bIns="0">
+            <a:spAutoFit/>
+          </a:bodyPr>
+          <a:lstStyle/>
+          <a:p>
+            <a:pPr algn="l">
+              <a:lnSpc>
+                <a:spcPct val="110000"/>
+              </a:lnSpc>
+            </a:pPr>
+            <a:r>
+              <a:rPr sz="1350" b="1">
+                <a:solidFill>
+                  <a:srgbClr val="1D1D1F"/>
+                </a:solidFill>
+                <a:latin typeface="Arial"/>
+              </a:rPr>
+              <a:t>Un veredicto</a:t>
+            </a:r>
+          </a:p>
+          <a:p>
+            <a:pPr algn="l">
+              <a:lnSpc>
+                <a:spcPct val="130000"/>
+              </a:lnSpc>
+              <a:spcBef>
+                <a:spcPts val="600"/>
+              </a:spcBef>
+            </a:pPr>
+            <a:r>
+              <a:rPr sz="1050" b="0">
+                <a:solidFill>
+                  <a:srgbClr val="6E6E73"/>
+                </a:solidFill>
+                <a:latin typeface="Arial"/>
+              </a:rPr>
+              <a:t>OK o CHECK, y el mismo veredicto se refleja en el resultado del build: no hay dos versiones de la verdad.</a:t>
+            </a:r>
+          </a:p>
+        </p:txBody>
+      </p:sp>
+      <p:sp>
+        <p:nvSpPr>
+          <p:cNvPr id="8" name="Rounded Rectangle 7"/>
+          <p:cNvSpPr/>
+          <p:nvPr/>
+        </p:nvSpPr>
+        <p:spPr>
+          <a:xfrm>
+            <a:off x="8002828" y="2011680"/>
+            <a:ext cx="3411626" cy="1664208"/>
+          </a:xfrm>
+          <a:prstGeom prst="roundRect">
+            <a:avLst>
+              <a:gd name="adj" fmla="val 3500"/>
+            </a:avLst>
+          </a:prstGeom>
+          <a:solidFill>
+            <a:srgbClr val="F5F5F7"/>
+          </a:solidFill>
+          <a:ln>
+            <a:noFill/>
+          </a:ln>
+          <a:effectLst/>
+        </p:spPr>
+        <p:style>
+          <a:lnRef idx="1">
+            <a:schemeClr val="accent1"/>
+          </a:lnRef>
+          <a:fillRef idx="3">
+            <a:schemeClr val="accent1"/>
+          </a:fillRef>
+          <a:effectRef idx="2">
+            <a:schemeClr val="accent1"/>
+          </a:effectRef>
+          <a:fontRef idx="minor">
+            <a:schemeClr val="lt1"/>
+          </a:fontRef>
+        </p:style>
+        <p:txBody>
+          <a:bodyPr rtlCol="0" anchor="ctr"/>
+          <a:lstStyle/>
+          <a:p>
+            <a:pPr algn="ctr"/>
+          </a:p>
+        </p:txBody>
+      </p:sp>
+      <p:sp>
+        <p:nvSpPr>
+          <p:cNvPr id="9" name="TextBox 8"/>
+          <p:cNvSpPr txBox="1"/>
+          <p:nvPr/>
+        </p:nvSpPr>
+        <p:spPr>
+          <a:xfrm>
+            <a:off x="8222284" y="2194560"/>
+            <a:ext cx="2972714" cy="1371600"/>
+          </a:xfrm>
+          <a:prstGeom prst="rect">
+            <a:avLst/>
+          </a:prstGeom>
+          <a:noFill/>
+        </p:spPr>
+        <p:txBody>
+          <a:bodyPr wrap="square" anchor="t" lIns="0" rIns="0" tIns="0" bIns="0">
+            <a:spAutoFit/>
+          </a:bodyPr>
+          <a:lstStyle/>
+          <a:p>
+            <a:pPr algn="l">
+              <a:lnSpc>
+                <a:spcPct val="110000"/>
+              </a:lnSpc>
+            </a:pPr>
+            <a:r>
+              <a:rPr sz="1350" b="1">
+                <a:solidFill>
+                  <a:srgbClr val="1D1D1F"/>
+                </a:solidFill>
+                <a:latin typeface="Arial"/>
+              </a:rPr>
+              <a:t>Procedencia</a:t>
+            </a:r>
+          </a:p>
+          <a:p>
+            <a:pPr algn="l">
+              <a:lnSpc>
+                <a:spcPct val="130000"/>
+              </a:lnSpc>
+              <a:spcBef>
+                <a:spcPts val="600"/>
+              </a:spcBef>
+            </a:pPr>
+            <a:r>
+              <a:rPr sz="1050" b="0">
+                <a:solidFill>
+                  <a:srgbClr val="6E6E73"/>
+                </a:solidFill>
+                <a:latin typeface="Arial"/>
+              </a:rPr>
+              <a:t>SHA-256 de los archivos del motor y del núcleo que produjeron ese modelo, no de los que estén hoy en disco.</a:t>
+            </a:r>
+          </a:p>
+        </p:txBody>
+      </p:sp>
+      <p:sp>
+        <p:nvSpPr>
+          <p:cNvPr id="10" name="Rounded Rectangle 9"/>
+          <p:cNvSpPr/>
+          <p:nvPr/>
+        </p:nvSpPr>
+        <p:spPr>
+          <a:xfrm>
+            <a:off x="777240" y="3858768"/>
+            <a:ext cx="3411626" cy="1664208"/>
+          </a:xfrm>
+          <a:prstGeom prst="roundRect">
+            <a:avLst>
+              <a:gd name="adj" fmla="val 3500"/>
+            </a:avLst>
+          </a:prstGeom>
+          <a:solidFill>
+            <a:srgbClr val="F5F5F7"/>
+          </a:solidFill>
+          <a:ln>
+            <a:noFill/>
+          </a:ln>
+          <a:effectLst/>
+        </p:spPr>
+        <p:style>
+          <a:lnRef idx="1">
+            <a:schemeClr val="accent1"/>
+          </a:lnRef>
+          <a:fillRef idx="3">
+            <a:schemeClr val="accent1"/>
+          </a:fillRef>
+          <a:effectRef idx="2">
+            <a:schemeClr val="accent1"/>
+          </a:effectRef>
+          <a:fontRef idx="minor">
+            <a:schemeClr val="lt1"/>
+          </a:fontRef>
+        </p:style>
+        <p:txBody>
+          <a:bodyPr rtlCol="0" anchor="ctr"/>
+          <a:lstStyle/>
+          <a:p>
+            <a:pPr algn="ctr"/>
+          </a:p>
+        </p:txBody>
+      </p:sp>
+      <p:sp>
+        <p:nvSpPr>
+          <p:cNvPr id="11" name="TextBox 10"/>
+          <p:cNvSpPr txBox="1"/>
+          <p:nvPr/>
+        </p:nvSpPr>
+        <p:spPr>
+          <a:xfrm>
+            <a:off x="996696" y="4041648"/>
+            <a:ext cx="2972714" cy="1371600"/>
+          </a:xfrm>
+          <a:prstGeom prst="rect">
+            <a:avLst/>
+          </a:prstGeom>
+          <a:noFill/>
+        </p:spPr>
+        <p:txBody>
+          <a:bodyPr wrap="square" anchor="t" lIns="0" rIns="0" tIns="0" bIns="0">
+            <a:spAutoFit/>
+          </a:bodyPr>
+          <a:lstStyle/>
+          <a:p>
+            <a:pPr algn="l">
+              <a:lnSpc>
+                <a:spcPct val="110000"/>
+              </a:lnSpc>
+            </a:pPr>
+            <a:r>
+              <a:rPr sz="1350" b="1">
+                <a:solidFill>
+                  <a:srgbClr val="1D1D1F"/>
+                </a:solidFill>
+                <a:latin typeface="Arial"/>
+              </a:rPr>
+              <a:t>Plan frente a realidad</a:t>
+            </a:r>
+          </a:p>
+          <a:p>
+            <a:pPr algn="l">
+              <a:lnSpc>
+                <a:spcPct val="130000"/>
+              </a:lnSpc>
+              <a:spcBef>
+                <a:spcPts val="600"/>
+              </a:spcBef>
+            </a:pPr>
+            <a:r>
+              <a:rPr sz="1050" b="0">
+                <a:solidFill>
+                  <a:srgbClr val="6E6E73"/>
+                </a:solidFill>
+                <a:latin typeface="Arial"/>
+              </a:rPr>
+              <a:t>La malla planificada y la realizada, pieza por pieza. Si no coinciden, el proyecto no se declara correcto.</a:t>
+            </a:r>
+          </a:p>
+        </p:txBody>
+      </p:sp>
+      <p:sp>
+        <p:nvSpPr>
+          <p:cNvPr id="12" name="Rounded Rectangle 11"/>
+          <p:cNvSpPr/>
+          <p:nvPr/>
+        </p:nvSpPr>
+        <p:spPr>
+          <a:xfrm>
+            <a:off x="4390034" y="3858768"/>
+            <a:ext cx="3411626" cy="1664208"/>
+          </a:xfrm>
+          <a:prstGeom prst="roundRect">
+            <a:avLst>
+              <a:gd name="adj" fmla="val 3500"/>
+            </a:avLst>
+          </a:prstGeom>
+          <a:solidFill>
+            <a:srgbClr val="F5F5F7"/>
+          </a:solidFill>
+          <a:ln>
+            <a:noFill/>
+          </a:ln>
+          <a:effectLst/>
+        </p:spPr>
+        <p:style>
+          <a:lnRef idx="1">
+            <a:schemeClr val="accent1"/>
+          </a:lnRef>
+          <a:fillRef idx="3">
+            <a:schemeClr val="accent1"/>
+          </a:fillRef>
+          <a:effectRef idx="2">
+            <a:schemeClr val="accent1"/>
+          </a:effectRef>
+          <a:fontRef idx="minor">
+            <a:schemeClr val="lt1"/>
+          </a:fontRef>
+        </p:style>
+        <p:txBody>
+          <a:bodyPr rtlCol="0" anchor="ctr"/>
+          <a:lstStyle/>
+          <a:p>
+            <a:pPr algn="ctr"/>
+          </a:p>
+        </p:txBody>
+      </p:sp>
+      <p:sp>
+        <p:nvSpPr>
+          <p:cNvPr id="13" name="TextBox 12"/>
+          <p:cNvSpPr txBox="1"/>
+          <p:nvPr/>
+        </p:nvSpPr>
+        <p:spPr>
+          <a:xfrm>
+            <a:off x="4609490" y="4041648"/>
+            <a:ext cx="2972714" cy="1371600"/>
+          </a:xfrm>
+          <a:prstGeom prst="rect">
+            <a:avLst/>
+          </a:prstGeom>
+          <a:noFill/>
+        </p:spPr>
+        <p:txBody>
+          <a:bodyPr wrap="square" anchor="t" lIns="0" rIns="0" tIns="0" bIns="0">
+            <a:spAutoFit/>
+          </a:bodyPr>
+          <a:lstStyle/>
+          <a:p>
+            <a:pPr algn="l">
+              <a:lnSpc>
+                <a:spcPct val="110000"/>
+              </a:lnSpc>
+            </a:pPr>
+            <a:r>
+              <a:rPr sz="1350" b="1">
+                <a:solidFill>
+                  <a:srgbClr val="1D1D1F"/>
+                </a:solidFill>
+                <a:latin typeface="Arial"/>
+              </a:rPr>
+              <a:t>Por pieza</a:t>
+            </a:r>
+          </a:p>
+          <a:p>
+            <a:pPr algn="l">
+              <a:lnSpc>
+                <a:spcPct val="130000"/>
+              </a:lnSpc>
+              <a:spcBef>
+                <a:spcPts val="600"/>
+              </a:spcBef>
+            </a:pPr>
+            <a:r>
+              <a:rPr sz="1050" b="0">
+                <a:solidFill>
+                  <a:srgbClr val="6E6E73"/>
+                </a:solidFill>
+                <a:latin typeface="Arial"/>
+              </a:rPr>
+              <a:t>Elementos, score de calidad, proporción de hexaedros, relación de aspecto, reparaciones e historial de intentos.</a:t>
+            </a:r>
+          </a:p>
+        </p:txBody>
+      </p:sp>
+      <p:sp>
+        <p:nvSpPr>
+          <p:cNvPr id="14" name="Rounded Rectangle 13"/>
+          <p:cNvSpPr/>
+          <p:nvPr/>
+        </p:nvSpPr>
+        <p:spPr>
+          <a:xfrm>
+            <a:off x="8002828" y="3858768"/>
+            <a:ext cx="3411626" cy="1664208"/>
+          </a:xfrm>
+          <a:prstGeom prst="roundRect">
+            <a:avLst>
+              <a:gd name="adj" fmla="val 3500"/>
+            </a:avLst>
+          </a:prstGeom>
+          <a:solidFill>
+            <a:srgbClr val="F5F5F7"/>
+          </a:solidFill>
+          <a:ln>
+            <a:noFill/>
+          </a:ln>
+          <a:effectLst/>
+        </p:spPr>
+        <p:style>
+          <a:lnRef idx="1">
+            <a:schemeClr val="accent1"/>
+          </a:lnRef>
+          <a:fillRef idx="3">
+            <a:schemeClr val="accent1"/>
+          </a:fillRef>
+          <a:effectRef idx="2">
+            <a:schemeClr val="accent1"/>
+          </a:effectRef>
+          <a:fontRef idx="minor">
+            <a:schemeClr val="lt1"/>
+          </a:fontRef>
+        </p:style>
+        <p:txBody>
+          <a:bodyPr rtlCol="0" anchor="ctr"/>
+          <a:lstStyle/>
+          <a:p>
+            <a:pPr algn="ctr"/>
+          </a:p>
+        </p:txBody>
+      </p:sp>
+      <p:sp>
+        <p:nvSpPr>
+          <p:cNvPr id="15" name="TextBox 14"/>
+          <p:cNvSpPr txBox="1"/>
+          <p:nvPr/>
+        </p:nvSpPr>
+        <p:spPr>
+          <a:xfrm>
+            <a:off x="8222284" y="4041648"/>
+            <a:ext cx="2972714" cy="1371600"/>
+          </a:xfrm>
+          <a:prstGeom prst="rect">
+            <a:avLst/>
+          </a:prstGeom>
+          <a:noFill/>
+        </p:spPr>
+        <p:txBody>
+          <a:bodyPr wrap="square" anchor="t" lIns="0" rIns="0" tIns="0" bIns="0">
+            <a:spAutoFit/>
+          </a:bodyPr>
+          <a:lstStyle/>
+          <a:p>
+            <a:pPr algn="l">
+              <a:lnSpc>
+                <a:spcPct val="110000"/>
+              </a:lnSpc>
+            </a:pPr>
+            <a:r>
+              <a:rPr sz="1350" b="1">
+                <a:solidFill>
+                  <a:srgbClr val="1D1D1F"/>
+                </a:solidFill>
+                <a:latin typeface="Arial"/>
+              </a:rPr>
+              <a:t>La lista de avisos</a:t>
+            </a:r>
+          </a:p>
+          <a:p>
+            <a:pPr algn="l">
+              <a:lnSpc>
+                <a:spcPct val="130000"/>
+              </a:lnSpc>
+              <a:spcBef>
+                <a:spcPts val="600"/>
+              </a:spcBef>
+            </a:pPr>
+            <a:r>
+              <a:rPr sz="1050" b="0">
+                <a:solidFill>
+                  <a:srgbClr val="6E6E73"/>
+                </a:solidFill>
+                <a:latin typeface="Arial"/>
+              </a:rPr>
+              <a:t>Cada advertencia con su código estable, más las etiquetas de evidencia y los conjuntos y superficies creados.</a:t>
+            </a:r>
+          </a:p>
+        </p:txBody>
+      </p:sp>
+      <p:sp>
+        <p:nvSpPr>
+          <p:cNvPr id="16" name="TextBox 15"/>
           <p:cNvSpPr txBox="1"/>
           <p:nvPr/>
         </p:nvSpPr>
@@ -6855,7 +9538,7 @@
                 </a:solidFill>
                 <a:latin typeface="Arial"/>
               </a:rPr>
-              <a:t>VERIFICACIÓN</a:t>
+              <a:t>EL ENTREGABLE</a:t>
             </a:r>
           </a:p>
         </p:txBody>
@@ -6888,33 +9571,35 @@
               </a:lnSpc>
             </a:pPr>
             <a:r>
-              <a:rPr sz="3300" b="1">
+              <a:rPr sz="3000" b="1">
                 <a:solidFill>
                   <a:srgbClr val="1D1D1F"/>
                 </a:solidFill>
                 <a:latin typeface="Arial"/>
               </a:rPr>
-              <a:t>Lo que se ha comprobado, y cómo</a:t>
-            </a:r>
-          </a:p>
-        </p:txBody>
-      </p:sp>
-      <p:sp>
-        <p:nvSpPr>
-          <p:cNvPr id="4" name="Rectangle 3"/>
+              <a:t>El informe es el producto, no un extra</a:t>
+            </a:r>
+          </a:p>
+        </p:txBody>
+      </p:sp>
+      <p:sp>
+        <p:nvSpPr>
+          <p:cNvPr id="4" name="Rounded Rectangle 3"/>
           <p:cNvSpPr/>
           <p:nvPr/>
         </p:nvSpPr>
         <p:spPr>
           <a:xfrm>
-            <a:off x="777240" y="2148840"/>
-            <a:ext cx="685800" cy="27940"/>
-          </a:xfrm>
-          <a:prstGeom prst="rect">
-            <a:avLst/>
+            <a:off x="777240" y="2011680"/>
+            <a:ext cx="3411626" cy="1664208"/>
+          </a:xfrm>
+          <a:prstGeom prst="roundRect">
+            <a:avLst>
+              <a:gd name="adj" fmla="val 3500"/>
+            </a:avLst>
           </a:prstGeom>
           <a:solidFill>
-            <a:srgbClr val="1B5E20"/>
+            <a:srgbClr val="F5F5F7"/>
           </a:solidFill>
           <a:ln>
             <a:noFill/>
@@ -6951,8 +9636,8 @@
         </p:nvSpPr>
         <p:spPr>
           <a:xfrm>
-            <a:off x="777240" y="2331720"/>
-            <a:ext cx="4937760" cy="1280160"/>
+            <a:off x="996696" y="2194560"/>
+            <a:ext cx="2972714" cy="1371600"/>
           </a:xfrm>
           <a:prstGeom prst="rect">
             <a:avLst/>
@@ -6971,52 +9656,54 @@
               </a:lnSpc>
             </a:pPr>
             <a:r>
-              <a:rPr sz="1500" b="1">
+              <a:rPr sz="1350" b="1">
                 <a:solidFill>
                   <a:srgbClr val="1D1D1F"/>
                 </a:solidFill>
                 <a:latin typeface="Arial"/>
               </a:rPr>
-              <a:t>Autotest empaquetado</a:t>
-            </a:r>
-          </a:p>
-          <a:p>
-            <a:pPr algn="l">
-              <a:lnSpc>
-                <a:spcPct val="132000"/>
+              <a:t>Diez secciones</a:t>
+            </a:r>
+          </a:p>
+          <a:p>
+            <a:pPr algn="l">
+              <a:lnSpc>
+                <a:spcPct val="130000"/>
               </a:lnSpc>
               <a:spcBef>
                 <a:spcPts val="600"/>
               </a:spcBef>
             </a:pPr>
             <a:r>
-              <a:rPr sz="1150" b="0">
+              <a:rPr sz="1050" b="0">
                 <a:solidFill>
                   <a:srgbClr val="6E6E73"/>
                 </a:solidFill>
                 <a:latin typeface="Arial"/>
               </a:rPr>
-              <a:t>identidad 4.2 y esquema 6, migración 5→6, catálogos DIN y FVA, cálculos de referencia, seis plantillas de malla, informes en los tres idiomas. Termina con código 0.</a:t>
-            </a:r>
-          </a:p>
-        </p:txBody>
-      </p:sp>
-      <p:sp>
-        <p:nvSpPr>
-          <p:cNvPr id="6" name="Rectangle 5"/>
+              <a:t>Proyecto y procedencia, alcance, geometría, DIN 6892 y normas, validación, malla y política, comprobaciones, evidencia, entregables y limitaciones.</a:t>
+            </a:r>
+          </a:p>
+        </p:txBody>
+      </p:sp>
+      <p:sp>
+        <p:nvSpPr>
+          <p:cNvPr id="6" name="Rounded Rectangle 5"/>
           <p:cNvSpPr/>
           <p:nvPr/>
         </p:nvSpPr>
         <p:spPr>
           <a:xfrm>
-            <a:off x="777240" y="3447288"/>
-            <a:ext cx="685800" cy="27940"/>
-          </a:xfrm>
-          <a:prstGeom prst="rect">
-            <a:avLst/>
+            <a:off x="4390034" y="2011680"/>
+            <a:ext cx="3411626" cy="1664208"/>
+          </a:xfrm>
+          <a:prstGeom prst="roundRect">
+            <a:avLst>
+              <a:gd name="adj" fmla="val 3500"/>
+            </a:avLst>
           </a:prstGeom>
           <a:solidFill>
-            <a:srgbClr val="1B5E20"/>
+            <a:srgbClr val="F5F5F7"/>
           </a:solidFill>
           <a:ln>
             <a:noFill/>
@@ -7053,8 +9740,8 @@
         </p:nvSpPr>
         <p:spPr>
           <a:xfrm>
-            <a:off x="777240" y="3630168"/>
-            <a:ext cx="4937760" cy="1280160"/>
+            <a:off x="4609490" y="2194560"/>
+            <a:ext cx="2972714" cy="1371600"/>
           </a:xfrm>
           <a:prstGeom prst="rect">
             <a:avLst/>
@@ -7073,52 +9760,54 @@
               </a:lnSpc>
             </a:pPr>
             <a:r>
-              <a:rPr sz="1500" b="1">
+              <a:rPr sz="1350" b="1">
                 <a:solidFill>
                   <a:srgbClr val="1D1D1F"/>
                 </a:solidFill>
                 <a:latin typeface="Arial"/>
               </a:rPr>
-              <a:t>Paridad de los tres catálogos</a:t>
-            </a:r>
-          </a:p>
-          <a:p>
-            <a:pPr algn="l">
-              <a:lnSpc>
-                <a:spcPct val="132000"/>
+              <a:t>Tres archivos y un log</a:t>
+            </a:r>
+          </a:p>
+          <a:p>
+            <a:pPr algn="l">
+              <a:lnSpc>
+                <a:spcPct val="130000"/>
               </a:lnSpc>
               <a:spcBef>
                 <a:spcPts val="600"/>
               </a:spcBef>
             </a:pPr>
             <a:r>
-              <a:rPr sz="1150" b="0">
+              <a:rPr sz="1050" b="0">
                 <a:solidFill>
                   <a:srgbClr val="6E6E73"/>
                 </a:solidFill>
                 <a:latin typeface="Arial"/>
               </a:rPr>
-              <a:t>650 claves por idioma, sin huecos; cada código de validación tiene su presentación traducida.</a:t>
-            </a:r>
-          </a:p>
-        </p:txBody>
-      </p:sp>
-      <p:sp>
-        <p:nvSpPr>
-          <p:cNvPr id="8" name="Rectangle 7"/>
+              <a:t>report.tex para revisar, report.pdf para firmar, report_data.json para procesar y latex_build.log para depurar.</a:t>
+            </a:r>
+          </a:p>
+        </p:txBody>
+      </p:sp>
+      <p:sp>
+        <p:nvSpPr>
+          <p:cNvPr id="8" name="Rounded Rectangle 7"/>
           <p:cNvSpPr/>
           <p:nvPr/>
         </p:nvSpPr>
         <p:spPr>
           <a:xfrm>
-            <a:off x="777240" y="4745736"/>
-            <a:ext cx="685800" cy="27940"/>
-          </a:xfrm>
-          <a:prstGeom prst="rect">
-            <a:avLst/>
+            <a:off x="8002828" y="2011680"/>
+            <a:ext cx="3411626" cy="1664208"/>
+          </a:xfrm>
+          <a:prstGeom prst="roundRect">
+            <a:avLst>
+              <a:gd name="adj" fmla="val 3500"/>
+            </a:avLst>
           </a:prstGeom>
           <a:solidFill>
-            <a:srgbClr val="1B5E20"/>
+            <a:srgbClr val="F5F5F7"/>
           </a:solidFill>
           <a:ln>
             <a:noFill/>
@@ -7155,8 +9844,8 @@
         </p:nvSpPr>
         <p:spPr>
           <a:xfrm>
-            <a:off x="777240" y="4928616"/>
-            <a:ext cx="4937760" cy="1280160"/>
+            <a:off x="8222284" y="2194560"/>
+            <a:ext cx="2972714" cy="1371600"/>
           </a:xfrm>
           <a:prstGeom prst="rect">
             <a:avLst/>
@@ -7175,52 +9864,54 @@
               </a:lnSpc>
             </a:pPr>
             <a:r>
-              <a:rPr sz="1500" b="1">
+              <a:rPr sz="1350" b="1">
                 <a:solidFill>
                   <a:srgbClr val="1D1D1F"/>
                 </a:solidFill>
                 <a:latin typeface="Arial"/>
               </a:rPr>
-              <a:t>Los cuatro presets</a:t>
-            </a:r>
-          </a:p>
-          <a:p>
-            <a:pPr algn="l">
-              <a:lnSpc>
-                <a:spcPct val="132000"/>
+              <a:t>Trilingüe</a:t>
+            </a:r>
+          </a:p>
+          <a:p>
+            <a:pPr algn="l">
+              <a:lnSpc>
+                <a:spcPct val="130000"/>
               </a:lnSpc>
               <a:spcBef>
                 <a:spcPts val="600"/>
               </a:spcBef>
             </a:pPr>
             <a:r>
-              <a:rPr sz="1150" b="0">
+              <a:rPr sz="1050" b="0">
                 <a:solidFill>
                   <a:srgbClr val="6E6E73"/>
                 </a:solidFill>
                 <a:latin typeface="Arial"/>
               </a:rPr>
-              <a:t>normalizan y validan con esquema 6 y cero errores, incluido el de resolución de 10 ciclos.</a:t>
-            </a:r>
-          </a:p>
-        </p:txBody>
-      </p:sp>
-      <p:sp>
-        <p:nvSpPr>
-          <p:cNvPr id="10" name="Rectangle 9"/>
+              <a:t>Se emite en el idioma del proyecto, desde los mismos catálogos de 650 claves que usa la interfaz.</a:t>
+            </a:r>
+          </a:p>
+        </p:txBody>
+      </p:sp>
+      <p:sp>
+        <p:nvSpPr>
+          <p:cNvPr id="10" name="Rounded Rectangle 9"/>
           <p:cNvSpPr/>
           <p:nvPr/>
         </p:nvSpPr>
         <p:spPr>
           <a:xfrm>
-            <a:off x="6217920" y="2148840"/>
-            <a:ext cx="685800" cy="27940"/>
-          </a:xfrm>
-          <a:prstGeom prst="rect">
-            <a:avLst/>
+            <a:off x="777240" y="3858768"/>
+            <a:ext cx="3411626" cy="1664208"/>
+          </a:xfrm>
+          <a:prstGeom prst="roundRect">
+            <a:avLst>
+              <a:gd name="adj" fmla="val 3500"/>
+            </a:avLst>
           </a:prstGeom>
           <a:solidFill>
-            <a:srgbClr val="1B5E20"/>
+            <a:srgbClr val="F5F5F7"/>
           </a:solidFill>
           <a:ln>
             <a:noFill/>
@@ -7257,8 +9948,8 @@
         </p:nvSpPr>
         <p:spPr>
           <a:xfrm>
-            <a:off x="6217920" y="2331720"/>
-            <a:ext cx="4937760" cy="1280160"/>
+            <a:off x="996696" y="4041648"/>
+            <a:ext cx="2972714" cy="1371600"/>
           </a:xfrm>
           <a:prstGeom prst="rect">
             <a:avLst/>
@@ -7277,52 +9968,54 @@
               </a:lnSpc>
             </a:pPr>
             <a:r>
-              <a:rPr sz="1500" b="1">
+              <a:rPr sz="1350" b="1">
                 <a:solidFill>
                   <a:srgbClr val="1D1D1F"/>
                 </a:solidFill>
                 <a:latin typeface="Arial"/>
               </a:rPr>
-              <a:t>Compatibilidad con el kernel</a:t>
-            </a:r>
-          </a:p>
-          <a:p>
-            <a:pPr algn="l">
-              <a:lnSpc>
-                <a:spcPct val="132000"/>
+              <a:t>Las etiquetas sobreviven</a:t>
+            </a:r>
+          </a:p>
+          <a:p>
+            <a:pPr algn="l">
+              <a:lnSpc>
+                <a:spcPct val="130000"/>
               </a:lnSpc>
               <a:spcBef>
                 <a:spcPts val="600"/>
               </a:spcBef>
             </a:pPr>
             <a:r>
-              <a:rPr sz="1150" b="0">
+              <a:rPr sz="1050" b="0">
                 <a:solidFill>
                   <a:srgbClr val="6E6E73"/>
                 </a:solidFill>
                 <a:latin typeface="Arial"/>
               </a:rPr>
-              <a:t>los seis módulos que corren dentro de Abaqus se auditaron con AST: sin f-strings, sin anotaciones, sólo os, sys, json, math, time y hashlib. División importada del futuro.</a:t>
-            </a:r>
-          </a:p>
-        </p:txBody>
-      </p:sp>
-      <p:sp>
-        <p:nvSpPr>
-          <p:cNvPr id="12" name="Rectangle 11"/>
+              <a:t>Cada valor llega al PDF con su etiqueta de procedencia como distintivo de color, no como nota al pie.</a:t>
+            </a:r>
+          </a:p>
+        </p:txBody>
+      </p:sp>
+      <p:sp>
+        <p:nvSpPr>
+          <p:cNvPr id="12" name="Rounded Rectangle 11"/>
           <p:cNvSpPr/>
           <p:nvPr/>
         </p:nvSpPr>
         <p:spPr>
           <a:xfrm>
-            <a:off x="6217920" y="3447288"/>
-            <a:ext cx="685800" cy="27940"/>
-          </a:xfrm>
-          <a:prstGeom prst="rect">
-            <a:avLst/>
+            <a:off x="4390034" y="3858768"/>
+            <a:ext cx="3411626" cy="1664208"/>
+          </a:xfrm>
+          <a:prstGeom prst="roundRect">
+            <a:avLst>
+              <a:gd name="adj" fmla="val 3500"/>
+            </a:avLst>
           </a:prstGeom>
           <a:solidFill>
-            <a:srgbClr val="1B5E20"/>
+            <a:srgbClr val="F5F5F7"/>
           </a:solidFill>
           <a:ln>
             <a:noFill/>
@@ -7359,8 +10052,8 @@
         </p:nvSpPr>
         <p:spPr>
           <a:xfrm>
-            <a:off x="6217920" y="3630168"/>
-            <a:ext cx="4937760" cy="1280160"/>
+            <a:off x="4609490" y="4041648"/>
+            <a:ext cx="2972714" cy="1371600"/>
           </a:xfrm>
           <a:prstGeom prst="rect">
             <a:avLst/>
@@ -7379,52 +10072,54 @@
               </a:lnSpc>
             </a:pPr>
             <a:r>
-              <a:rPr sz="1500" b="1">
+              <a:rPr sz="1350" b="1">
                 <a:solidFill>
                   <a:srgbClr val="1D1D1F"/>
                 </a:solidFill>
                 <a:latin typeface="Arial"/>
               </a:rPr>
-              <a:t>Contrato de artefactos</a:t>
-            </a:r>
-          </a:p>
-          <a:p>
-            <a:pPr algn="l">
-              <a:lnSpc>
-                <a:spcPct val="132000"/>
+              <a:t>Compilación</a:t>
+            </a:r>
+          </a:p>
+          <a:p>
+            <a:pPr algn="l">
+              <a:lnSpc>
+                <a:spcPct val="130000"/>
               </a:lnSpc>
               <a:spcBef>
                 <a:spcPts val="600"/>
               </a:spcBef>
             </a:pPr>
             <a:r>
-              <a:rPr sz="1150" b="0">
+              <a:rPr sz="1050" b="0">
                 <a:solidFill>
                   <a:srgbClr val="6E6E73"/>
                 </a:solidFill>
                 <a:latin typeface="Arial"/>
               </a:rPr>
-              <a:t>el proyecto se declara correcto sólo si existen auditoría, BUILD_RESULT, CAE, capturas e informe, y si la malla realizada coincide con la planificada.</a:t>
-            </a:r>
-          </a:p>
-        </p:txBody>
-      </p:sp>
-      <p:sp>
-        <p:nvSpPr>
-          <p:cNvPr id="14" name="Rectangle 13"/>
+              <a:t>latexmk si está, dos pasadas de pdflatex si no, sin shell y con tiempo límite finito.</a:t>
+            </a:r>
+          </a:p>
+        </p:txBody>
+      </p:sp>
+      <p:sp>
+        <p:nvSpPr>
+          <p:cNvPr id="14" name="Rounded Rectangle 13"/>
           <p:cNvSpPr/>
           <p:nvPr/>
         </p:nvSpPr>
         <p:spPr>
           <a:xfrm>
-            <a:off x="6217920" y="4745736"/>
-            <a:ext cx="685800" cy="27940"/>
-          </a:xfrm>
-          <a:prstGeom prst="rect">
-            <a:avLst/>
+            <a:off x="8002828" y="3858768"/>
+            <a:ext cx="3411626" cy="1664208"/>
+          </a:xfrm>
+          <a:prstGeom prst="roundRect">
+            <a:avLst>
+              <a:gd name="adj" fmla="val 3500"/>
+            </a:avLst>
           </a:prstGeom>
           <a:solidFill>
-            <a:srgbClr val="1B5E20"/>
+            <a:srgbClr val="F5F5F7"/>
           </a:solidFill>
           <a:ln>
             <a:noFill/>
@@ -7461,8 +10156,8 @@
         </p:nvSpPr>
         <p:spPr>
           <a:xfrm>
-            <a:off x="6217920" y="4928616"/>
-            <a:ext cx="4937760" cy="1280160"/>
+            <a:off x="8222284" y="4041648"/>
+            <a:ext cx="2972714" cy="1371600"/>
           </a:xfrm>
           <a:prstGeom prst="rect">
             <a:avLst/>
@@ -7481,32 +10176,32 @@
               </a:lnSpc>
             </a:pPr>
             <a:r>
-              <a:rPr sz="1500" b="1">
+              <a:rPr sz="1350" b="1">
                 <a:solidFill>
                   <a:srgbClr val="1D1D1F"/>
                 </a:solidFill>
                 <a:latin typeface="Arial"/>
               </a:rPr>
-              <a:t>Cifras fijadas en el test</a:t>
-            </a:r>
-          </a:p>
-          <a:p>
-            <a:pPr algn="l">
-              <a:lnSpc>
-                <a:spcPct val="132000"/>
+              <a:t>Sin LaTeX instalado</a:t>
+            </a:r>
+          </a:p>
+          <a:p>
+            <a:pPr algn="l">
+              <a:lnSpc>
+                <a:spcPct val="130000"/>
               </a:lnSpc>
               <a:spcBef>
                 <a:spcPts val="600"/>
               </a:spcBef>
             </a:pPr>
             <a:r>
-              <a:rPr sz="1150" b="0">
+              <a:rPr sz="1050" b="0">
                 <a:solidFill>
                   <a:srgbClr val="6E6E73"/>
                 </a:solidFill>
                 <a:latin typeface="Arial"/>
               </a:rPr>
-              <a:t>999,18 N·m gobernado por el cubo, t2tr = 3,141 mm, f_W de la ecuación 3 y el dominio de K_λ.</a:t>
+              <a:t>Escribe el .tex, lo dice con un mensaje traducido y no tumba el build por algo que no es del modelo.</a:t>
             </a:r>
           </a:p>
         </p:txBody>
@@ -7514,45 +10209,6 @@
       <p:sp>
         <p:nvSpPr>
           <p:cNvPr id="16" name="TextBox 15"/>
-          <p:cNvSpPr txBox="1"/>
-          <p:nvPr/>
-        </p:nvSpPr>
-        <p:spPr>
-          <a:xfrm>
-            <a:off x="777240" y="6144768"/>
-            <a:ext cx="10058400" cy="640080"/>
-          </a:xfrm>
-          <a:prstGeom prst="rect">
-            <a:avLst/>
-          </a:prstGeom>
-          <a:noFill/>
-        </p:spPr>
-        <p:txBody>
-          <a:bodyPr wrap="square" anchor="t" lIns="0" rIns="0" tIns="0" bIns="0">
-            <a:spAutoFit/>
-          </a:bodyPr>
-          <a:lstStyle/>
-          <a:p>
-            <a:pPr algn="l">
-              <a:lnSpc>
-                <a:spcPct val="125000"/>
-              </a:lnSpc>
-            </a:pPr>
-            <a:r>
-              <a:rPr sz="1150" b="0">
-                <a:solidFill>
-                  <a:srgbClr val="86868B"/>
-                </a:solidFill>
-                <a:latin typeface="Arial"/>
-              </a:rPr>
-              <a:t>Lo que el autotest no hace, y así lo declara: no arranca Abaqus, no resuelve, no compila LaTeX y no valida un especimen FVA.</a:t>
-            </a:r>
-          </a:p>
-        </p:txBody>
-      </p:sp>
-      <p:sp>
-        <p:nvSpPr>
-          <p:cNvPr id="17" name="TextBox 16"/>
           <p:cNvSpPr txBox="1"/>
           <p:nvPr/>
         </p:nvSpPr>
@@ -7649,14 +10305,14 @@
                 </a:solidFill>
                 <a:latin typeface="Arial"/>
               </a:rPr>
-              <a:t>DISTRIBUCIÓN</a:t>
+              <a:t>CAPACIDAD RESISTENTE</a:t>
             </a:r>
           </a:p>
         </p:txBody>
       </p:sp>
       <p:pic>
         <p:nvPicPr>
-          <p:cNvPr id="3" name="Picture 2" descr="dia_release.png"/>
+          <p:cNvPr id="3" name="Picture 2" descr="dia_metodos.png"/>
           <p:cNvPicPr>
             <a:picLocks noChangeAspect="1"/>
           </p:cNvPicPr>
@@ -7670,8 +10326,8 @@
         </p:blipFill>
         <p:spPr>
           <a:xfrm>
-            <a:off x="777240" y="1556351"/>
-            <a:ext cx="10637215" cy="3955610"/>
+            <a:off x="973788" y="1170432"/>
+            <a:ext cx="10244119" cy="4727448"/>
           </a:xfrm>
           <a:prstGeom prst="rect">
             <a:avLst/>
@@ -7777,14 +10433,14 @@
                 </a:solidFill>
                 <a:latin typeface="Arial"/>
               </a:rPr>
-              <a:t>ESTADO</a:t>
+              <a:t>RESULTADOS</a:t>
             </a:r>
           </a:p>
         </p:txBody>
       </p:sp>
       <p:pic>
         <p:nvPicPr>
-          <p:cNvPr id="3" name="Picture 2" descr="dia_estado.png"/>
+          <p:cNvPr id="3" name="Picture 2" descr="chart_pares.png"/>
           <p:cNvPicPr>
             <a:picLocks noChangeAspect="1"/>
           </p:cNvPicPr>
@@ -7798,8 +10454,8 @@
         </p:blipFill>
         <p:spPr>
           <a:xfrm>
-            <a:off x="1372101" y="1170432"/>
-            <a:ext cx="9447492" cy="4727448"/>
+            <a:off x="777240" y="1192479"/>
+            <a:ext cx="10637215" cy="4683353"/>
           </a:xfrm>
           <a:prstGeom prst="rect">
             <a:avLst/>
@@ -7859,7 +10515,7 @@
     <p:bg>
       <p:bgPr>
         <a:solidFill>
-          <a:srgbClr val="0A0A0C"/>
+          <a:srgbClr val="FFFFFF"/>
         </a:solidFill>
         <a:effectLst/>
       </p:bgPr>
@@ -7901,480 +10557,42 @@
             <a:r>
               <a:rPr sz="1150" b="1">
                 <a:solidFill>
-                  <a:srgbClr val="2997FF"/>
-                </a:solidFill>
-                <a:latin typeface="Arial"/>
-              </a:rPr>
-              <a:t>PRÓXIMOS PASOS</a:t>
-            </a:r>
-          </a:p>
-        </p:txBody>
-      </p:sp>
-      <p:sp>
-        <p:nvSpPr>
-          <p:cNvPr id="3" name="TextBox 2"/>
-          <p:cNvSpPr txBox="1"/>
-          <p:nvPr/>
-        </p:nvSpPr>
-        <p:spPr>
-          <a:xfrm>
-            <a:off x="777240" y="932688"/>
-            <a:ext cx="10637215" cy="914400"/>
-          </a:xfrm>
-          <a:prstGeom prst="rect">
-            <a:avLst/>
-          </a:prstGeom>
-          <a:noFill/>
-        </p:spPr>
-        <p:txBody>
-          <a:bodyPr wrap="square" anchor="t" lIns="0" rIns="0" tIns="0" bIns="0">
-            <a:spAutoFit/>
-          </a:bodyPr>
-          <a:lstStyle/>
-          <a:p>
-            <a:pPr algn="l">
-              <a:lnSpc>
-                <a:spcPct val="95000"/>
-              </a:lnSpc>
-            </a:pPr>
-            <a:r>
-              <a:rPr sz="3600" b="1">
-                <a:solidFill>
-                  <a:srgbClr val="FFFFFF"/>
-                </a:solidFill>
-                <a:latin typeface="Arial"/>
-              </a:rPr>
-              <a:t>Tres decisiones y una compilación</a:t>
-            </a:r>
-          </a:p>
-        </p:txBody>
-      </p:sp>
+                  <a:srgbClr val="0071E3"/>
+                </a:solidFill>
+                <a:latin typeface="Arial"/>
+              </a:rPr>
+              <a:t>CORRECCIÓN 1 DE 2</a:t>
+            </a:r>
+          </a:p>
+        </p:txBody>
+      </p:sp>
+      <p:pic>
+        <p:nvPicPr>
+          <p:cNvPr id="3" name="Picture 2" descr="dia_t2tr.png"/>
+          <p:cNvPicPr>
+            <a:picLocks noChangeAspect="1"/>
+          </p:cNvPicPr>
+          <p:nvPr/>
+        </p:nvPicPr>
+        <p:blipFill>
+          <a:blip r:embed="rId2"/>
+          <a:stretch>
+            <a:fillRect/>
+          </a:stretch>
+        </p:blipFill>
+        <p:spPr>
+          <a:xfrm>
+            <a:off x="1552423" y="1170432"/>
+            <a:ext cx="9086848" cy="4727448"/>
+          </a:xfrm>
+          <a:prstGeom prst="rect">
+            <a:avLst/>
+          </a:prstGeom>
+        </p:spPr>
+      </p:pic>
       <p:sp>
         <p:nvSpPr>
           <p:cNvPr id="4" name="TextBox 3"/>
-          <p:cNvSpPr txBox="1"/>
-          <p:nvPr/>
-        </p:nvSpPr>
-        <p:spPr>
-          <a:xfrm>
-            <a:off x="777240" y="2468880"/>
-            <a:ext cx="914400" cy="548640"/>
-          </a:xfrm>
-          <a:prstGeom prst="rect">
-            <a:avLst/>
-          </a:prstGeom>
-          <a:noFill/>
-        </p:spPr>
-        <p:txBody>
-          <a:bodyPr wrap="square" anchor="t" lIns="0" rIns="0" tIns="0" bIns="0">
-            <a:spAutoFit/>
-          </a:bodyPr>
-          <a:lstStyle/>
-          <a:p>
-            <a:pPr algn="l">
-              <a:lnSpc>
-                <a:spcPct val="100000"/>
-              </a:lnSpc>
-            </a:pPr>
-            <a:r>
-              <a:rPr sz="1700" b="1">
-                <a:solidFill>
-                  <a:srgbClr val="2997FF"/>
-                </a:solidFill>
-                <a:latin typeface="Arial"/>
-              </a:rPr>
-              <a:t>01</a:t>
-            </a:r>
-          </a:p>
-        </p:txBody>
-      </p:sp>
-      <p:sp>
-        <p:nvSpPr>
-          <p:cNvPr id="5" name="TextBox 4"/>
-          <p:cNvSpPr txBox="1"/>
-          <p:nvPr/>
-        </p:nvSpPr>
-        <p:spPr>
-          <a:xfrm>
-            <a:off x="1783080" y="2468880"/>
-            <a:ext cx="9601200" cy="1188720"/>
-          </a:xfrm>
-          <a:prstGeom prst="rect">
-            <a:avLst/>
-          </a:prstGeom>
-          <a:noFill/>
-        </p:spPr>
-        <p:txBody>
-          <a:bodyPr wrap="square" anchor="t" lIns="0" rIns="0" tIns="0" bIns="0">
-            <a:spAutoFit/>
-          </a:bodyPr>
-          <a:lstStyle/>
-          <a:p>
-            <a:pPr algn="l">
-              <a:lnSpc>
-                <a:spcPct val="105000"/>
-              </a:lnSpc>
-            </a:pPr>
-            <a:r>
-              <a:rPr sz="1900" b="1">
-                <a:solidFill>
-                  <a:srgbClr val="FFFFFF"/>
-                </a:solidFill>
-                <a:latin typeface="Arial"/>
-              </a:rPr>
-              <a:t>Reconstruir el ejecutable</a:t>
-            </a:r>
-          </a:p>
-          <a:p>
-            <a:pPr algn="l">
-              <a:lnSpc>
-                <a:spcPct val="135000"/>
-              </a:lnSpc>
-              <a:spcBef>
-                <a:spcPts val="700"/>
-              </a:spcBef>
-            </a:pPr>
-            <a:r>
-              <a:rPr sz="1250" b="0">
-                <a:solidFill>
-                  <a:srgbClr val="9E9EA7"/>
-                </a:solidFill>
-                <a:latin typeface="Arial"/>
-              </a:rPr>
-              <a:t>make_exe.bat, sin cambios, desde el árbol completo del proyecto. El .exe publicado es anterior a las dos correcciones: 17 de 31 entradas del manifiesto han cambiado.</a:t>
-            </a:r>
-          </a:p>
-        </p:txBody>
-      </p:sp>
-      <p:sp>
-        <p:nvSpPr>
-          <p:cNvPr id="6" name="Rectangle 5"/>
-          <p:cNvSpPr/>
-          <p:nvPr/>
-        </p:nvSpPr>
-        <p:spPr>
-          <a:xfrm>
-            <a:off x="777240" y="2249424"/>
-            <a:ext cx="10637215" cy="12700"/>
-          </a:xfrm>
-          <a:prstGeom prst="rect">
-            <a:avLst/>
-          </a:prstGeom>
-          <a:solidFill>
-            <a:srgbClr val="2A2A30"/>
-          </a:solidFill>
-          <a:ln>
-            <a:noFill/>
-          </a:ln>
-          <a:effectLst/>
-        </p:spPr>
-        <p:style>
-          <a:lnRef idx="1">
-            <a:schemeClr val="accent1"/>
-          </a:lnRef>
-          <a:fillRef idx="3">
-            <a:schemeClr val="accent1"/>
-          </a:fillRef>
-          <a:effectRef idx="2">
-            <a:schemeClr val="accent1"/>
-          </a:effectRef>
-          <a:fontRef idx="minor">
-            <a:schemeClr val="lt1"/>
-          </a:fontRef>
-        </p:style>
-        <p:txBody>
-          <a:bodyPr rtlCol="0" anchor="ctr"/>
-          <a:lstStyle/>
-          <a:p>
-            <a:pPr algn="ctr"/>
-          </a:p>
-        </p:txBody>
-      </p:sp>
-      <p:sp>
-        <p:nvSpPr>
-          <p:cNvPr id="7" name="TextBox 6"/>
-          <p:cNvSpPr txBox="1"/>
-          <p:nvPr/>
-        </p:nvSpPr>
-        <p:spPr>
-          <a:xfrm>
-            <a:off x="777240" y="3767328"/>
-            <a:ext cx="914400" cy="548640"/>
-          </a:xfrm>
-          <a:prstGeom prst="rect">
-            <a:avLst/>
-          </a:prstGeom>
-          <a:noFill/>
-        </p:spPr>
-        <p:txBody>
-          <a:bodyPr wrap="square" anchor="t" lIns="0" rIns="0" tIns="0" bIns="0">
-            <a:spAutoFit/>
-          </a:bodyPr>
-          <a:lstStyle/>
-          <a:p>
-            <a:pPr algn="l">
-              <a:lnSpc>
-                <a:spcPct val="100000"/>
-              </a:lnSpc>
-            </a:pPr>
-            <a:r>
-              <a:rPr sz="1700" b="1">
-                <a:solidFill>
-                  <a:srgbClr val="2997FF"/>
-                </a:solidFill>
-                <a:latin typeface="Arial"/>
-              </a:rPr>
-              <a:t>02</a:t>
-            </a:r>
-          </a:p>
-        </p:txBody>
-      </p:sp>
-      <p:sp>
-        <p:nvSpPr>
-          <p:cNvPr id="8" name="TextBox 7"/>
-          <p:cNvSpPr txBox="1"/>
-          <p:nvPr/>
-        </p:nvSpPr>
-        <p:spPr>
-          <a:xfrm>
-            <a:off x="1783080" y="3767328"/>
-            <a:ext cx="9601200" cy="1188720"/>
-          </a:xfrm>
-          <a:prstGeom prst="rect">
-            <a:avLst/>
-          </a:prstGeom>
-          <a:noFill/>
-        </p:spPr>
-        <p:txBody>
-          <a:bodyPr wrap="square" anchor="t" lIns="0" rIns="0" tIns="0" bIns="0">
-            <a:spAutoFit/>
-          </a:bodyPr>
-          <a:lstStyle/>
-          <a:p>
-            <a:pPr algn="l">
-              <a:lnSpc>
-                <a:spcPct val="105000"/>
-              </a:lnSpc>
-            </a:pPr>
-            <a:r>
-              <a:rPr sz="1900" b="1">
-                <a:solidFill>
-                  <a:srgbClr val="FFFFFF"/>
-                </a:solidFill>
-                <a:latin typeface="Arial"/>
-              </a:rPr>
-              <a:t>Fijar el signo de la ecuación 9</a:t>
-            </a:r>
-          </a:p>
-          <a:p>
-            <a:pPr algn="l">
-              <a:lnSpc>
-                <a:spcPct val="135000"/>
-              </a:lnSpc>
-              <a:spcBef>
-                <a:spcPts val="700"/>
-              </a:spcBef>
-            </a:pPr>
-            <a:r>
-              <a:rPr sz="1250" b="0">
-                <a:solidFill>
-                  <a:srgbClr val="9E9EA7"/>
-                </a:solidFill>
-                <a:latin typeface="Arial"/>
-              </a:rPr>
-              <a:t>contra el texto DIN 6892 con licencia. Si el signo negativo es el correcto, el par admisible real baja otro 46 %.</a:t>
-            </a:r>
-          </a:p>
-        </p:txBody>
-      </p:sp>
-      <p:sp>
-        <p:nvSpPr>
-          <p:cNvPr id="9" name="Rectangle 8"/>
-          <p:cNvSpPr/>
-          <p:nvPr/>
-        </p:nvSpPr>
-        <p:spPr>
-          <a:xfrm>
-            <a:off x="777240" y="3547872"/>
-            <a:ext cx="10637215" cy="12700"/>
-          </a:xfrm>
-          <a:prstGeom prst="rect">
-            <a:avLst/>
-          </a:prstGeom>
-          <a:solidFill>
-            <a:srgbClr val="2A2A30"/>
-          </a:solidFill>
-          <a:ln>
-            <a:noFill/>
-          </a:ln>
-          <a:effectLst/>
-        </p:spPr>
-        <p:style>
-          <a:lnRef idx="1">
-            <a:schemeClr val="accent1"/>
-          </a:lnRef>
-          <a:fillRef idx="3">
-            <a:schemeClr val="accent1"/>
-          </a:fillRef>
-          <a:effectRef idx="2">
-            <a:schemeClr val="accent1"/>
-          </a:effectRef>
-          <a:fontRef idx="minor">
-            <a:schemeClr val="lt1"/>
-          </a:fontRef>
-        </p:style>
-        <p:txBody>
-          <a:bodyPr rtlCol="0" anchor="ctr"/>
-          <a:lstStyle/>
-          <a:p>
-            <a:pPr algn="ctr"/>
-          </a:p>
-        </p:txBody>
-      </p:sp>
-      <p:sp>
-        <p:nvSpPr>
-          <p:cNvPr id="10" name="TextBox 9"/>
-          <p:cNvSpPr txBox="1"/>
-          <p:nvPr/>
-        </p:nvSpPr>
-        <p:spPr>
-          <a:xfrm>
-            <a:off x="777240" y="5065776"/>
-            <a:ext cx="914400" cy="548640"/>
-          </a:xfrm>
-          <a:prstGeom prst="rect">
-            <a:avLst/>
-          </a:prstGeom>
-          <a:noFill/>
-        </p:spPr>
-        <p:txBody>
-          <a:bodyPr wrap="square" anchor="t" lIns="0" rIns="0" tIns="0" bIns="0">
-            <a:spAutoFit/>
-          </a:bodyPr>
-          <a:lstStyle/>
-          <a:p>
-            <a:pPr algn="l">
-              <a:lnSpc>
-                <a:spcPct val="100000"/>
-              </a:lnSpc>
-            </a:pPr>
-            <a:r>
-              <a:rPr sz="1700" b="1">
-                <a:solidFill>
-                  <a:srgbClr val="2997FF"/>
-                </a:solidFill>
-                <a:latin typeface="Arial"/>
-              </a:rPr>
-              <a:t>03</a:t>
-            </a:r>
-          </a:p>
-        </p:txBody>
-      </p:sp>
-      <p:sp>
-        <p:nvSpPr>
-          <p:cNvPr id="11" name="TextBox 10"/>
-          <p:cNvSpPr txBox="1"/>
-          <p:nvPr/>
-        </p:nvSpPr>
-        <p:spPr>
-          <a:xfrm>
-            <a:off x="1783080" y="5065776"/>
-            <a:ext cx="9601200" cy="1188720"/>
-          </a:xfrm>
-          <a:prstGeom prst="rect">
-            <a:avLst/>
-          </a:prstGeom>
-          <a:noFill/>
-        </p:spPr>
-        <p:txBody>
-          <a:bodyPr wrap="square" anchor="t" lIns="0" rIns="0" tIns="0" bIns="0">
-            <a:spAutoFit/>
-          </a:bodyPr>
-          <a:lstStyle/>
-          <a:p>
-            <a:pPr algn="l">
-              <a:lnSpc>
-                <a:spcPct val="105000"/>
-              </a:lnSpc>
-            </a:pPr>
-            <a:r>
-              <a:rPr sz="1900" b="1">
-                <a:solidFill>
-                  <a:srgbClr val="FFFFFF"/>
-                </a:solidFill>
-                <a:latin typeface="Arial"/>
-              </a:rPr>
-              <a:t>Numerar la versión</a:t>
-            </a:r>
-          </a:p>
-          <a:p>
-            <a:pPr algn="l">
-              <a:lnSpc>
-                <a:spcPct val="135000"/>
-              </a:lnSpc>
-              <a:spcBef>
-                <a:spcPts val="700"/>
-              </a:spcBef>
-            </a:pPr>
-            <a:r>
-              <a:rPr sz="1250" b="0">
-                <a:solidFill>
-                  <a:srgbClr val="9E9EA7"/>
-                </a:solidFill>
-                <a:latin typeface="Arial"/>
-              </a:rPr>
-              <a:t>dos ejecutables que se identifican como 4.2 y devuelven pares distintos son una colisión de identidad. Mi recomendación es 4.3.</a:t>
-            </a:r>
-          </a:p>
-        </p:txBody>
-      </p:sp>
-      <p:sp>
-        <p:nvSpPr>
-          <p:cNvPr id="12" name="Rectangle 11"/>
-          <p:cNvSpPr/>
-          <p:nvPr/>
-        </p:nvSpPr>
-        <p:spPr>
-          <a:xfrm>
-            <a:off x="777240" y="4846320"/>
-            <a:ext cx="10637215" cy="12700"/>
-          </a:xfrm>
-          <a:prstGeom prst="rect">
-            <a:avLst/>
-          </a:prstGeom>
-          <a:solidFill>
-            <a:srgbClr val="2A2A30"/>
-          </a:solidFill>
-          <a:ln>
-            <a:noFill/>
-          </a:ln>
-          <a:effectLst/>
-        </p:spPr>
-        <p:style>
-          <a:lnRef idx="1">
-            <a:schemeClr val="accent1"/>
-          </a:lnRef>
-          <a:fillRef idx="3">
-            <a:schemeClr val="accent1"/>
-          </a:fillRef>
-          <a:effectRef idx="2">
-            <a:schemeClr val="accent1"/>
-          </a:effectRef>
-          <a:fontRef idx="minor">
-            <a:schemeClr val="lt1"/>
-          </a:fontRef>
-        </p:style>
-        <p:txBody>
-          <a:bodyPr rtlCol="0" anchor="ctr"/>
-          <a:lstStyle/>
-          <a:p>
-            <a:pPr algn="ctr"/>
-          </a:p>
-        </p:txBody>
-      </p:sp>
-      <p:sp>
-        <p:nvSpPr>
-          <p:cNvPr id="13" name="TextBox 12"/>
           <p:cNvSpPr txBox="1"/>
           <p:nvPr/>
         </p:nvSpPr>
@@ -8402,7 +10620,7 @@
             <a:r>
               <a:rPr sz="1000" b="0">
                 <a:solidFill>
-                  <a:srgbClr val="9E9EA7"/>
+                  <a:srgbClr val="86868B"/>
                 </a:solidFill>
                 <a:latin typeface="Arial"/>
               </a:rPr>
@@ -8425,7 +10643,7 @@
     <p:bg>
       <p:bgPr>
         <a:solidFill>
-          <a:srgbClr val="0A0A0C"/>
+          <a:srgbClr val="FFFFFF"/>
         </a:solidFill>
         <a:effectLst/>
       </p:bgPr>
@@ -8445,48 +10663,8 @@
         </p:nvSpPr>
         <p:spPr>
           <a:xfrm>
-            <a:off x="777240" y="2286000"/>
-            <a:ext cx="10058400" cy="2377440"/>
-          </a:xfrm>
-          <a:prstGeom prst="rect">
-            <a:avLst/>
-          </a:prstGeom>
-          <a:noFill/>
-        </p:spPr>
-        <p:txBody>
-          <a:bodyPr wrap="square" anchor="t" lIns="0" rIns="0" tIns="0" bIns="0">
-            <a:spAutoFit/>
-          </a:bodyPr>
-          <a:lstStyle/>
-          <a:p>
-            <a:pPr algn="l">
-              <a:lnSpc>
-                <a:spcPct val="110000"/>
-              </a:lnSpc>
-            </a:pPr>
-            <a:r>
-              <a:rPr sz="3600" b="1">
-                <a:solidFill>
-                  <a:srgbClr val="FFFFFF"/>
-                </a:solidFill>
-                <a:latin typeface="Arial"/>
-              </a:rPr>
-              <a:t>El valor no está en el modelo.
-Está en poder demostrar cómo se hizo.</a:t>
-            </a:r>
-          </a:p>
-        </p:txBody>
-      </p:sp>
-      <p:sp>
-        <p:nvSpPr>
-          <p:cNvPr id="3" name="TextBox 2"/>
-          <p:cNvSpPr txBox="1"/>
-          <p:nvPr/>
-        </p:nvSpPr>
-        <p:spPr>
-          <a:xfrm>
-            <a:off x="777240" y="5120640"/>
-            <a:ext cx="10058400" cy="1097280"/>
+            <a:off x="777240" y="566928"/>
+            <a:ext cx="10637215" cy="292608"/>
           </a:xfrm>
           <a:prstGeom prst="rect">
             <a:avLst/>
@@ -8505,36 +10683,41 @@
               </a:lnSpc>
             </a:pPr>
             <a:r>
-              <a:rPr sz="1250" b="0">
-                <a:solidFill>
-                  <a:srgbClr val="9E9EA7"/>
-                </a:solidFill>
-                <a:latin typeface="Arial"/>
-              </a:rPr>
-              <a:t>Model Builder 4.2  ·  esquema de parámetros 6  ·  din6892-methods-1.0  ·  auto-mesh-2.0</a:t>
-            </a:r>
-          </a:p>
-          <a:p>
-            <a:pPr algn="l">
-              <a:lnSpc>
-                <a:spcPct val="100000"/>
-              </a:lnSpc>
-              <a:spcBef>
-                <a:spcPts val="800"/>
-              </a:spcBef>
-            </a:pPr>
-            <a:r>
-              <a:rPr sz="1250" b="0">
-                <a:solidFill>
-                  <a:srgbClr val="7C7C86"/>
-                </a:solidFill>
-                <a:latin typeface="Arial"/>
-              </a:rPr>
-              <a:t>Cada número de esta presentación es reproducible ejecutando el código del repositorio.</a:t>
-            </a:r>
-          </a:p>
-        </p:txBody>
-      </p:sp>
+              <a:rPr sz="1150" b="1">
+                <a:solidFill>
+                  <a:srgbClr val="0071E3"/>
+                </a:solidFill>
+                <a:latin typeface="Arial"/>
+              </a:rPr>
+              <a:t>CORRECCIÓN 2 DE 2</a:t>
+            </a:r>
+          </a:p>
+        </p:txBody>
+      </p:sp>
+      <p:pic>
+        <p:nvPicPr>
+          <p:cNvPr id="3" name="Picture 2" descr="chart_fw.png"/>
+          <p:cNvPicPr>
+            <a:picLocks noChangeAspect="1"/>
+          </p:cNvPicPr>
+          <p:nvPr/>
+        </p:nvPicPr>
+        <p:blipFill>
+          <a:blip r:embed="rId2"/>
+          <a:stretch>
+            <a:fillRect/>
+          </a:stretch>
+        </p:blipFill>
+        <p:spPr>
+          <a:xfrm>
+            <a:off x="811838" y="1170432"/>
+            <a:ext cx="10568019" cy="4727448"/>
+          </a:xfrm>
+          <a:prstGeom prst="rect">
+            <a:avLst/>
+          </a:prstGeom>
+        </p:spPr>
+      </p:pic>
       <p:sp>
         <p:nvSpPr>
           <p:cNvPr id="4" name="TextBox 3"/>
@@ -8565,7 +10748,7 @@
             <a:r>
               <a:rPr sz="1000" b="0">
                 <a:solidFill>
-                  <a:srgbClr val="9E9EA7"/>
+                  <a:srgbClr val="86868B"/>
                 </a:solidFill>
                 <a:latin typeface="Arial"/>
               </a:rPr>
@@ -9362,7 +11545,3704 @@
                 </a:solidFill>
                 <a:latin typeface="Arial"/>
               </a:rPr>
+              <a:t>04</a:t>
+            </a:r>
+          </a:p>
+        </p:txBody>
+      </p:sp>
+    </p:spTree>
+  </p:cSld>
+  <p:clrMapOvr>
+    <a:masterClrMapping/>
+  </p:clrMapOvr>
+</p:sld>
+</file>
+
+<file path=ppt/slides/slide30.xml><?xml version="1.0" encoding="utf-8"?>
+<p:sld xmlns:a="http://schemas.openxmlformats.org/drawingml/2006/main" xmlns:p="http://schemas.openxmlformats.org/presentationml/2006/main" xmlns:r="http://schemas.openxmlformats.org/officeDocument/2006/relationships">
+  <p:cSld>
+    <p:bg>
+      <p:bgPr>
+        <a:solidFill>
+          <a:srgbClr val="FFFFFF"/>
+        </a:solidFill>
+        <a:effectLst/>
+      </p:bgPr>
+    </p:bg>
+    <p:spTree>
+      <p:nvGrpSpPr>
+        <p:cNvPr id="1" name=""/>
+        <p:cNvGrpSpPr/>
+        <p:nvPr/>
+      </p:nvGrpSpPr>
+      <p:grpSpPr/>
+      <p:sp>
+        <p:nvSpPr>
+          <p:cNvPr id="2" name="TextBox 1"/>
+          <p:cNvSpPr txBox="1"/>
+          <p:nvPr/>
+        </p:nvSpPr>
+        <p:spPr>
+          <a:xfrm>
+            <a:off x="777240" y="566928"/>
+            <a:ext cx="10637215" cy="292608"/>
+          </a:xfrm>
+          <a:prstGeom prst="rect">
+            <a:avLst/>
+          </a:prstGeom>
+          <a:noFill/>
+        </p:spPr>
+        <p:txBody>
+          <a:bodyPr wrap="square" anchor="t" lIns="0" rIns="0" tIns="0" bIns="0">
+            <a:spAutoFit/>
+          </a:bodyPr>
+          <a:lstStyle/>
+          <a:p>
+            <a:pPr algn="l">
+              <a:lnSpc>
+                <a:spcPct val="100000"/>
+              </a:lnSpc>
+            </a:pPr>
+            <a:r>
+              <a:rPr sz="1150" b="1">
+                <a:solidFill>
+                  <a:srgbClr val="0071E3"/>
+                </a:solidFill>
+                <a:latin typeface="Arial"/>
+              </a:rPr>
+              <a:t>HALLAZGO ABIERTO</a:t>
+            </a:r>
+          </a:p>
+        </p:txBody>
+      </p:sp>
+      <p:pic>
+        <p:nvPicPr>
+          <p:cNvPr id="3" name="Picture 2" descr="dia_eq9.png"/>
+          <p:cNvPicPr>
+            <a:picLocks noChangeAspect="1"/>
+          </p:cNvPicPr>
+          <p:nvPr/>
+        </p:nvPicPr>
+        <p:blipFill>
+          <a:blip r:embed="rId2"/>
+          <a:stretch>
+            <a:fillRect/>
+          </a:stretch>
+        </p:blipFill>
+        <p:spPr>
+          <a:xfrm>
+            <a:off x="1675805" y="1170432"/>
+            <a:ext cx="8840084" cy="4727448"/>
+          </a:xfrm>
+          <a:prstGeom prst="rect">
+            <a:avLst/>
+          </a:prstGeom>
+        </p:spPr>
+      </p:pic>
+      <p:sp>
+        <p:nvSpPr>
+          <p:cNvPr id="4" name="TextBox 3"/>
+          <p:cNvSpPr txBox="1"/>
+          <p:nvPr/>
+        </p:nvSpPr>
+        <p:spPr>
+          <a:xfrm>
+            <a:off x="10500055" y="6345936"/>
+            <a:ext cx="914400" cy="274320"/>
+          </a:xfrm>
+          <a:prstGeom prst="rect">
+            <a:avLst/>
+          </a:prstGeom>
+          <a:noFill/>
+        </p:spPr>
+        <p:txBody>
+          <a:bodyPr wrap="square" anchor="t" lIns="0" rIns="0" tIns="0" bIns="0">
+            <a:spAutoFit/>
+          </a:bodyPr>
+          <a:lstStyle/>
+          <a:p>
+            <a:pPr algn="l">
+              <a:lnSpc>
+                <a:spcPct val="100000"/>
+              </a:lnSpc>
+            </a:pPr>
+            <a:r>
+              <a:rPr sz="1000" b="0">
+                <a:solidFill>
+                  <a:srgbClr val="86868B"/>
+                </a:solidFill>
+                <a:latin typeface="Arial"/>
+              </a:rPr>
+              <a:t>30</a:t>
+            </a:r>
+          </a:p>
+        </p:txBody>
+      </p:sp>
+    </p:spTree>
+  </p:cSld>
+  <p:clrMapOvr>
+    <a:masterClrMapping/>
+  </p:clrMapOvr>
+</p:sld>
+</file>
+
+<file path=ppt/slides/slide31.xml><?xml version="1.0" encoding="utf-8"?>
+<p:sld xmlns:a="http://schemas.openxmlformats.org/drawingml/2006/main" xmlns:p="http://schemas.openxmlformats.org/presentationml/2006/main" xmlns:r="http://schemas.openxmlformats.org/officeDocument/2006/relationships">
+  <p:cSld>
+    <p:bg>
+      <p:bgPr>
+        <a:solidFill>
+          <a:srgbClr val="FFFFFF"/>
+        </a:solidFill>
+        <a:effectLst/>
+      </p:bgPr>
+    </p:bg>
+    <p:spTree>
+      <p:nvGrpSpPr>
+        <p:cNvPr id="1" name=""/>
+        <p:cNvGrpSpPr/>
+        <p:nvPr/>
+      </p:nvGrpSpPr>
+      <p:grpSpPr/>
+      <p:sp>
+        <p:nvSpPr>
+          <p:cNvPr id="2" name="TextBox 1"/>
+          <p:cNvSpPr txBox="1"/>
+          <p:nvPr/>
+        </p:nvSpPr>
+        <p:spPr>
+          <a:xfrm>
+            <a:off x="777240" y="566928"/>
+            <a:ext cx="10637215" cy="292608"/>
+          </a:xfrm>
+          <a:prstGeom prst="rect">
+            <a:avLst/>
+          </a:prstGeom>
+          <a:noFill/>
+        </p:spPr>
+        <p:txBody>
+          <a:bodyPr wrap="square" anchor="t" lIns="0" rIns="0" tIns="0" bIns="0">
+            <a:spAutoFit/>
+          </a:bodyPr>
+          <a:lstStyle/>
+          <a:p>
+            <a:pPr algn="l">
+              <a:lnSpc>
+                <a:spcPct val="100000"/>
+              </a:lnSpc>
+            </a:pPr>
+            <a:r>
+              <a:rPr sz="1150" b="1">
+                <a:solidFill>
+                  <a:srgbClr val="0071E3"/>
+                </a:solidFill>
+                <a:latin typeface="Arial"/>
+              </a:rPr>
+              <a:t>MÉTODO A</a:t>
+            </a:r>
+          </a:p>
+        </p:txBody>
+      </p:sp>
+      <p:pic>
+        <p:nvPicPr>
+          <p:cNvPr id="3" name="Picture 2" descr="dia_method_a.png"/>
+          <p:cNvPicPr>
+            <a:picLocks noChangeAspect="1"/>
+          </p:cNvPicPr>
+          <p:nvPr/>
+        </p:nvPicPr>
+        <p:blipFill>
+          <a:blip r:embed="rId2"/>
+          <a:stretch>
+            <a:fillRect/>
+          </a:stretch>
+        </p:blipFill>
+        <p:spPr>
+          <a:xfrm>
+            <a:off x="777240" y="1475276"/>
+            <a:ext cx="10637215" cy="4117759"/>
+          </a:xfrm>
+          <a:prstGeom prst="rect">
+            <a:avLst/>
+          </a:prstGeom>
+        </p:spPr>
+      </p:pic>
+      <p:sp>
+        <p:nvSpPr>
+          <p:cNvPr id="4" name="TextBox 3"/>
+          <p:cNvSpPr txBox="1"/>
+          <p:nvPr/>
+        </p:nvSpPr>
+        <p:spPr>
+          <a:xfrm>
+            <a:off x="10500055" y="6345936"/>
+            <a:ext cx="914400" cy="274320"/>
+          </a:xfrm>
+          <a:prstGeom prst="rect">
+            <a:avLst/>
+          </a:prstGeom>
+          <a:noFill/>
+        </p:spPr>
+        <p:txBody>
+          <a:bodyPr wrap="square" anchor="t" lIns="0" rIns="0" tIns="0" bIns="0">
+            <a:spAutoFit/>
+          </a:bodyPr>
+          <a:lstStyle/>
+          <a:p>
+            <a:pPr algn="l">
+              <a:lnSpc>
+                <a:spcPct val="100000"/>
+              </a:lnSpc>
+            </a:pPr>
+            <a:r>
+              <a:rPr sz="1000" b="0">
+                <a:solidFill>
+                  <a:srgbClr val="86868B"/>
+                </a:solidFill>
+                <a:latin typeface="Arial"/>
+              </a:rPr>
+              <a:t>31</a:t>
+            </a:r>
+          </a:p>
+        </p:txBody>
+      </p:sp>
+    </p:spTree>
+  </p:cSld>
+  <p:clrMapOvr>
+    <a:masterClrMapping/>
+  </p:clrMapOvr>
+</p:sld>
+</file>
+
+<file path=ppt/slides/slide32.xml><?xml version="1.0" encoding="utf-8"?>
+<p:sld xmlns:a="http://schemas.openxmlformats.org/drawingml/2006/main" xmlns:p="http://schemas.openxmlformats.org/presentationml/2006/main" xmlns:r="http://schemas.openxmlformats.org/officeDocument/2006/relationships">
+  <p:cSld>
+    <p:bg>
+      <p:bgPr>
+        <a:solidFill>
+          <a:srgbClr val="FFFFFF"/>
+        </a:solidFill>
+        <a:effectLst/>
+      </p:bgPr>
+    </p:bg>
+    <p:spTree>
+      <p:nvGrpSpPr>
+        <p:cNvPr id="1" name=""/>
+        <p:cNvGrpSpPr/>
+        <p:nvPr/>
+      </p:nvGrpSpPr>
+      <p:grpSpPr/>
+      <p:sp>
+        <p:nvSpPr>
+          <p:cNvPr id="2" name="TextBox 1"/>
+          <p:cNvSpPr txBox="1"/>
+          <p:nvPr/>
+        </p:nvSpPr>
+        <p:spPr>
+          <a:xfrm>
+            <a:off x="777240" y="566928"/>
+            <a:ext cx="10637215" cy="292608"/>
+          </a:xfrm>
+          <a:prstGeom prst="rect">
+            <a:avLst/>
+          </a:prstGeom>
+          <a:noFill/>
+        </p:spPr>
+        <p:txBody>
+          <a:bodyPr wrap="square" anchor="t" lIns="0" rIns="0" tIns="0" bIns="0">
+            <a:spAutoFit/>
+          </a:bodyPr>
+          <a:lstStyle/>
+          <a:p>
+            <a:pPr algn="l">
+              <a:lnSpc>
+                <a:spcPct val="100000"/>
+              </a:lnSpc>
+            </a:pPr>
+            <a:r>
+              <a:rPr sz="1150" b="1">
+                <a:solidFill>
+                  <a:srgbClr val="0071E3"/>
+                </a:solidFill>
+                <a:latin typeface="Arial"/>
+              </a:rPr>
+              <a:t>CONTRASTE NUMÉRICO</a:t>
+            </a:r>
+          </a:p>
+        </p:txBody>
+      </p:sp>
+      <p:pic>
+        <p:nvPicPr>
+          <p:cNvPr id="3" name="Picture 2" descr="dia_matlab.png"/>
+          <p:cNvPicPr>
+            <a:picLocks noChangeAspect="1"/>
+          </p:cNvPicPr>
+          <p:nvPr/>
+        </p:nvPicPr>
+        <p:blipFill>
+          <a:blip r:embed="rId2"/>
+          <a:stretch>
+            <a:fillRect/>
+          </a:stretch>
+        </p:blipFill>
+        <p:spPr>
+          <a:xfrm>
+            <a:off x="777240" y="1409581"/>
+            <a:ext cx="10637215" cy="4249149"/>
+          </a:xfrm>
+          <a:prstGeom prst="rect">
+            <a:avLst/>
+          </a:prstGeom>
+        </p:spPr>
+      </p:pic>
+      <p:sp>
+        <p:nvSpPr>
+          <p:cNvPr id="4" name="TextBox 3"/>
+          <p:cNvSpPr txBox="1"/>
+          <p:nvPr/>
+        </p:nvSpPr>
+        <p:spPr>
+          <a:xfrm>
+            <a:off x="10500055" y="6345936"/>
+            <a:ext cx="914400" cy="274320"/>
+          </a:xfrm>
+          <a:prstGeom prst="rect">
+            <a:avLst/>
+          </a:prstGeom>
+          <a:noFill/>
+        </p:spPr>
+        <p:txBody>
+          <a:bodyPr wrap="square" anchor="t" lIns="0" rIns="0" tIns="0" bIns="0">
+            <a:spAutoFit/>
+          </a:bodyPr>
+          <a:lstStyle/>
+          <a:p>
+            <a:pPr algn="l">
+              <a:lnSpc>
+                <a:spcPct val="100000"/>
+              </a:lnSpc>
+            </a:pPr>
+            <a:r>
+              <a:rPr sz="1000" b="0">
+                <a:solidFill>
+                  <a:srgbClr val="86868B"/>
+                </a:solidFill>
+                <a:latin typeface="Arial"/>
+              </a:rPr>
+              <a:t>32</a:t>
+            </a:r>
+          </a:p>
+        </p:txBody>
+      </p:sp>
+    </p:spTree>
+  </p:cSld>
+  <p:clrMapOvr>
+    <a:masterClrMapping/>
+  </p:clrMapOvr>
+</p:sld>
+</file>
+
+<file path=ppt/slides/slide33.xml><?xml version="1.0" encoding="utf-8"?>
+<p:sld xmlns:a="http://schemas.openxmlformats.org/drawingml/2006/main" xmlns:p="http://schemas.openxmlformats.org/presentationml/2006/main" xmlns:r="http://schemas.openxmlformats.org/officeDocument/2006/relationships">
+  <p:cSld>
+    <p:bg>
+      <p:bgPr>
+        <a:solidFill>
+          <a:srgbClr val="FFFFFF"/>
+        </a:solidFill>
+        <a:effectLst/>
+      </p:bgPr>
+    </p:bg>
+    <p:spTree>
+      <p:nvGrpSpPr>
+        <p:cNvPr id="1" name=""/>
+        <p:cNvGrpSpPr/>
+        <p:nvPr/>
+      </p:nvGrpSpPr>
+      <p:grpSpPr/>
+      <p:sp>
+        <p:nvSpPr>
+          <p:cNvPr id="2" name="TextBox 1"/>
+          <p:cNvSpPr txBox="1"/>
+          <p:nvPr/>
+        </p:nvSpPr>
+        <p:spPr>
+          <a:xfrm>
+            <a:off x="777240" y="566928"/>
+            <a:ext cx="10637215" cy="292608"/>
+          </a:xfrm>
+          <a:prstGeom prst="rect">
+            <a:avLst/>
+          </a:prstGeom>
+          <a:noFill/>
+        </p:spPr>
+        <p:txBody>
+          <a:bodyPr wrap="square" anchor="t" lIns="0" rIns="0" tIns="0" bIns="0">
+            <a:spAutoFit/>
+          </a:bodyPr>
+          <a:lstStyle/>
+          <a:p>
+            <a:pPr algn="l">
+              <a:lnSpc>
+                <a:spcPct val="100000"/>
+              </a:lnSpc>
+            </a:pPr>
+            <a:r>
+              <a:rPr sz="1150" b="1">
+                <a:solidFill>
+                  <a:srgbClr val="0071E3"/>
+                </a:solidFill>
+                <a:latin typeface="Arial"/>
+              </a:rPr>
+              <a:t>CATÁLOGO FVA 600 III</a:t>
+            </a:r>
+          </a:p>
+        </p:txBody>
+      </p:sp>
+      <p:sp>
+        <p:nvSpPr>
+          <p:cNvPr id="3" name="TextBox 2"/>
+          <p:cNvSpPr txBox="1"/>
+          <p:nvPr/>
+        </p:nvSpPr>
+        <p:spPr>
+          <a:xfrm>
+            <a:off x="777240" y="932688"/>
+            <a:ext cx="10637215" cy="914400"/>
+          </a:xfrm>
+          <a:prstGeom prst="rect">
+            <a:avLst/>
+          </a:prstGeom>
+          <a:noFill/>
+        </p:spPr>
+        <p:txBody>
+          <a:bodyPr wrap="square" anchor="t" lIns="0" rIns="0" tIns="0" bIns="0">
+            <a:spAutoFit/>
+          </a:bodyPr>
+          <a:lstStyle/>
+          <a:p>
+            <a:pPr algn="l">
+              <a:lnSpc>
+                <a:spcPct val="95000"/>
+              </a:lnSpc>
+            </a:pPr>
+            <a:r>
+              <a:rPr sz="3000" b="1">
+                <a:solidFill>
+                  <a:srgbClr val="1D1D1F"/>
+                </a:solidFill>
+                <a:latin typeface="Arial"/>
+              </a:rPr>
+              <a:t>Ocho configuraciones concretas, no un dominio continuo</a:t>
+            </a:r>
+          </a:p>
+        </p:txBody>
+      </p:sp>
+      <p:sp>
+        <p:nvSpPr>
+          <p:cNvPr id="4" name="Rounded Rectangle 3"/>
+          <p:cNvSpPr/>
+          <p:nvPr/>
+        </p:nvSpPr>
+        <p:spPr>
+          <a:xfrm>
+            <a:off x="777240" y="2011680"/>
+            <a:ext cx="3411626" cy="1664208"/>
+          </a:xfrm>
+          <a:prstGeom prst="roundRect">
+            <a:avLst>
+              <a:gd name="adj" fmla="val 3500"/>
+            </a:avLst>
+          </a:prstGeom>
+          <a:solidFill>
+            <a:srgbClr val="F5F5F7"/>
+          </a:solidFill>
+          <a:ln>
+            <a:noFill/>
+          </a:ln>
+          <a:effectLst/>
+        </p:spPr>
+        <p:style>
+          <a:lnRef idx="1">
+            <a:schemeClr val="accent1"/>
+          </a:lnRef>
+          <a:fillRef idx="3">
+            <a:schemeClr val="accent1"/>
+          </a:fillRef>
+          <a:effectRef idx="2">
+            <a:schemeClr val="accent1"/>
+          </a:effectRef>
+          <a:fontRef idx="minor">
+            <a:schemeClr val="lt1"/>
+          </a:fontRef>
+        </p:style>
+        <p:txBody>
+          <a:bodyPr rtlCol="0" anchor="ctr"/>
+          <a:lstStyle/>
+          <a:p>
+            <a:pPr algn="ctr"/>
+          </a:p>
+        </p:txBody>
+      </p:sp>
+      <p:sp>
+        <p:nvSpPr>
+          <p:cNvPr id="5" name="TextBox 4"/>
+          <p:cNvSpPr txBox="1"/>
+          <p:nvPr/>
+        </p:nvSpPr>
+        <p:spPr>
+          <a:xfrm>
+            <a:off x="996696" y="2194560"/>
+            <a:ext cx="2972714" cy="1371600"/>
+          </a:xfrm>
+          <a:prstGeom prst="rect">
+            <a:avLst/>
+          </a:prstGeom>
+          <a:noFill/>
+        </p:spPr>
+        <p:txBody>
+          <a:bodyPr wrap="square" anchor="t" lIns="0" rIns="0" tIns="0" bIns="0">
+            <a:spAutoFit/>
+          </a:bodyPr>
+          <a:lstStyle/>
+          <a:p>
+            <a:pPr algn="l">
+              <a:lnSpc>
+                <a:spcPct val="110000"/>
+              </a:lnSpc>
+            </a:pPr>
+            <a:r>
+              <a:rPr sz="1350" b="1">
+                <a:solidFill>
+                  <a:srgbClr val="1D1D1F"/>
+                </a:solidFill>
+                <a:latin typeface="Arial"/>
+              </a:rPr>
+              <a:t>VB1 a VB8</a:t>
+            </a:r>
+          </a:p>
+          <a:p>
+            <a:pPr algn="l">
+              <a:lnSpc>
+                <a:spcPct val="130000"/>
+              </a:lnSpc>
+              <a:spcBef>
+                <a:spcPts val="600"/>
+              </a:spcBef>
+            </a:pPr>
+            <a:r>
+              <a:rPr sz="1050" b="0">
+                <a:solidFill>
+                  <a:srgbClr val="6E6E73"/>
+                </a:solidFill>
+                <a:latin typeface="Arial"/>
+              </a:rPr>
+              <a:t>Cada variante fija d_w, l_tr/d_w, Q_A, la interferencia, la razón de carga R y la forma de chaveta.</a:t>
+            </a:r>
+          </a:p>
+        </p:txBody>
+      </p:sp>
+      <p:sp>
+        <p:nvSpPr>
+          <p:cNvPr id="6" name="Rounded Rectangle 5"/>
+          <p:cNvSpPr/>
+          <p:nvPr/>
+        </p:nvSpPr>
+        <p:spPr>
+          <a:xfrm>
+            <a:off x="4390034" y="2011680"/>
+            <a:ext cx="3411626" cy="1664208"/>
+          </a:xfrm>
+          <a:prstGeom prst="roundRect">
+            <a:avLst>
+              <a:gd name="adj" fmla="val 3500"/>
+            </a:avLst>
+          </a:prstGeom>
+          <a:solidFill>
+            <a:srgbClr val="F5F5F7"/>
+          </a:solidFill>
+          <a:ln>
+            <a:noFill/>
+          </a:ln>
+          <a:effectLst/>
+        </p:spPr>
+        <p:style>
+          <a:lnRef idx="1">
+            <a:schemeClr val="accent1"/>
+          </a:lnRef>
+          <a:fillRef idx="3">
+            <a:schemeClr val="accent1"/>
+          </a:fillRef>
+          <a:effectRef idx="2">
+            <a:schemeClr val="accent1"/>
+          </a:effectRef>
+          <a:fontRef idx="minor">
+            <a:schemeClr val="lt1"/>
+          </a:fontRef>
+        </p:style>
+        <p:txBody>
+          <a:bodyPr rtlCol="0" anchor="ctr"/>
+          <a:lstStyle/>
+          <a:p>
+            <a:pPr algn="ctr"/>
+          </a:p>
+        </p:txBody>
+      </p:sp>
+      <p:sp>
+        <p:nvSpPr>
+          <p:cNvPr id="7" name="TextBox 6"/>
+          <p:cNvSpPr txBox="1"/>
+          <p:nvPr/>
+        </p:nvSpPr>
+        <p:spPr>
+          <a:xfrm>
+            <a:off x="4609490" y="2194560"/>
+            <a:ext cx="2972714" cy="1371600"/>
+          </a:xfrm>
+          <a:prstGeom prst="rect">
+            <a:avLst/>
+          </a:prstGeom>
+          <a:noFill/>
+        </p:spPr>
+        <p:txBody>
+          <a:bodyPr wrap="square" anchor="t" lIns="0" rIns="0" tIns="0" bIns="0">
+            <a:spAutoFit/>
+          </a:bodyPr>
+          <a:lstStyle/>
+          <a:p>
+            <a:pPr algn="l">
+              <a:lnSpc>
+                <a:spcPct val="110000"/>
+              </a:lnSpc>
+            </a:pPr>
+            <a:r>
+              <a:rPr sz="1350" b="1">
+                <a:solidFill>
+                  <a:srgbClr val="1D1D1F"/>
+                </a:solidFill>
+                <a:latin typeface="Arial"/>
+              </a:rPr>
+              <a:t>Son puntos, no un rango</a:t>
+            </a:r>
+          </a:p>
+          <a:p>
+            <a:pPr algn="l">
+              <a:lnSpc>
+                <a:spcPct val="130000"/>
+              </a:lnSpc>
+              <a:spcBef>
+                <a:spcPts val="600"/>
+              </a:spcBef>
+            </a:pPr>
+            <a:r>
+              <a:rPr sz="1050" b="0">
+                <a:solidFill>
+                  <a:srgbClr val="6E6E73"/>
+                </a:solidFill>
+                <a:latin typeface="Arial"/>
+              </a:rPr>
+              <a:t>El catálogo está documentado como configuraciones discretas de investigación: interpolar entre ellas no está respaldado.</a:t>
+            </a:r>
+          </a:p>
+        </p:txBody>
+      </p:sp>
+      <p:sp>
+        <p:nvSpPr>
+          <p:cNvPr id="8" name="Rounded Rectangle 7"/>
+          <p:cNvSpPr/>
+          <p:nvPr/>
+        </p:nvSpPr>
+        <p:spPr>
+          <a:xfrm>
+            <a:off x="8002828" y="2011680"/>
+            <a:ext cx="3411626" cy="1664208"/>
+          </a:xfrm>
+          <a:prstGeom prst="roundRect">
+            <a:avLst>
+              <a:gd name="adj" fmla="val 3500"/>
+            </a:avLst>
+          </a:prstGeom>
+          <a:solidFill>
+            <a:srgbClr val="F5F5F7"/>
+          </a:solidFill>
+          <a:ln>
+            <a:noFill/>
+          </a:ln>
+          <a:effectLst/>
+        </p:spPr>
+        <p:style>
+          <a:lnRef idx="1">
+            <a:schemeClr val="accent1"/>
+          </a:lnRef>
+          <a:fillRef idx="3">
+            <a:schemeClr val="accent1"/>
+          </a:fillRef>
+          <a:effectRef idx="2">
+            <a:schemeClr val="accent1"/>
+          </a:effectRef>
+          <a:fontRef idx="minor">
+            <a:schemeClr val="lt1"/>
+          </a:fontRef>
+        </p:style>
+        <p:txBody>
+          <a:bodyPr rtlCol="0" anchor="ctr"/>
+          <a:lstStyle/>
+          <a:p>
+            <a:pPr algn="ctr"/>
+          </a:p>
+        </p:txBody>
+      </p:sp>
+      <p:sp>
+        <p:nvSpPr>
+          <p:cNvPr id="9" name="TextBox 8"/>
+          <p:cNvSpPr txBox="1"/>
+          <p:nvPr/>
+        </p:nvSpPr>
+        <p:spPr>
+          <a:xfrm>
+            <a:off x="8222284" y="2194560"/>
+            <a:ext cx="2972714" cy="1371600"/>
+          </a:xfrm>
+          <a:prstGeom prst="rect">
+            <a:avLst/>
+          </a:prstGeom>
+          <a:noFill/>
+        </p:spPr>
+        <p:txBody>
+          <a:bodyPr wrap="square" anchor="t" lIns="0" rIns="0" tIns="0" bIns="0">
+            <a:spAutoFit/>
+          </a:bodyPr>
+          <a:lstStyle/>
+          <a:p>
+            <a:pPr algn="l">
+              <a:lnSpc>
+                <a:spcPct val="110000"/>
+              </a:lnSpc>
+            </a:pPr>
+            <a:r>
+              <a:rPr sz="1350" b="1">
+                <a:solidFill>
+                  <a:srgbClr val="1D1D1F"/>
+                </a:solidFill>
+                <a:latin typeface="Arial"/>
+              </a:rPr>
+              <a:t>VB1, la referencia</a:t>
+            </a:r>
+          </a:p>
+          <a:p>
+            <a:pPr algn="l">
+              <a:lnSpc>
+                <a:spcPct val="130000"/>
+              </a:lnSpc>
+              <a:spcBef>
+                <a:spcPts val="600"/>
+              </a:spcBef>
+            </a:pPr>
+            <a:r>
+              <a:rPr sz="1050" b="0">
+                <a:solidFill>
+                  <a:srgbClr val="6E6E73"/>
+                </a:solidFill>
+                <a:latin typeface="Arial"/>
+              </a:rPr>
+              <a:t>d_w = 40 mm, l_tr/d_w = 0,95, Q_A = 0,5, R = 0 y chaveta forma A. Es la variante de los presets del paquete.</a:t>
+            </a:r>
+          </a:p>
+        </p:txBody>
+      </p:sp>
+      <p:sp>
+        <p:nvSpPr>
+          <p:cNvPr id="10" name="Rounded Rectangle 9"/>
+          <p:cNvSpPr/>
+          <p:nvPr/>
+        </p:nvSpPr>
+        <p:spPr>
+          <a:xfrm>
+            <a:off x="777240" y="3858768"/>
+            <a:ext cx="3411626" cy="1664208"/>
+          </a:xfrm>
+          <a:prstGeom prst="roundRect">
+            <a:avLst>
+              <a:gd name="adj" fmla="val 3500"/>
+            </a:avLst>
+          </a:prstGeom>
+          <a:solidFill>
+            <a:srgbClr val="F5F5F7"/>
+          </a:solidFill>
+          <a:ln>
+            <a:noFill/>
+          </a:ln>
+          <a:effectLst/>
+        </p:spPr>
+        <p:style>
+          <a:lnRef idx="1">
+            <a:schemeClr val="accent1"/>
+          </a:lnRef>
+          <a:fillRef idx="3">
+            <a:schemeClr val="accent1"/>
+          </a:fillRef>
+          <a:effectRef idx="2">
+            <a:schemeClr val="accent1"/>
+          </a:effectRef>
+          <a:fontRef idx="minor">
+            <a:schemeClr val="lt1"/>
+          </a:fontRef>
+        </p:style>
+        <p:txBody>
+          <a:bodyPr rtlCol="0" anchor="ctr"/>
+          <a:lstStyle/>
+          <a:p>
+            <a:pPr algn="ctr"/>
+          </a:p>
+        </p:txBody>
+      </p:sp>
+      <p:sp>
+        <p:nvSpPr>
+          <p:cNvPr id="11" name="TextBox 10"/>
+          <p:cNvSpPr txBox="1"/>
+          <p:nvPr/>
+        </p:nvSpPr>
+        <p:spPr>
+          <a:xfrm>
+            <a:off x="996696" y="4041648"/>
+            <a:ext cx="2972714" cy="1371600"/>
+          </a:xfrm>
+          <a:prstGeom prst="rect">
+            <a:avLst/>
+          </a:prstGeom>
+          <a:noFill/>
+        </p:spPr>
+        <p:txBody>
+          <a:bodyPr wrap="square" anchor="t" lIns="0" rIns="0" tIns="0" bIns="0">
+            <a:spAutoFit/>
+          </a:bodyPr>
+          <a:lstStyle/>
+          <a:p>
+            <a:pPr algn="l">
+              <a:lnSpc>
+                <a:spcPct val="110000"/>
+              </a:lnSpc>
+            </a:pPr>
+            <a:r>
+              <a:rPr sz="1350" b="1">
+                <a:solidFill>
+                  <a:srgbClr val="1D1D1F"/>
+                </a:solidFill>
+                <a:latin typeface="Arial"/>
+              </a:rPr>
+              <a:t>Modelos de material</a:t>
+            </a:r>
+          </a:p>
+          <a:p>
+            <a:pPr algn="l">
+              <a:lnSpc>
+                <a:spcPct val="130000"/>
+              </a:lnSpc>
+              <a:spcBef>
+                <a:spcPts val="600"/>
+              </a:spcBef>
+            </a:pPr>
+            <a:r>
+              <a:rPr sz="1050" b="0">
+                <a:solidFill>
+                  <a:srgbClr val="6E6E73"/>
+                </a:solidFill>
+                <a:latin typeface="Arial"/>
+              </a:rPr>
+              <a:t>Chaboche-Lemaitre combinado en el eje, UML Ramberg-Osgood en el cubo y elástico-plástico ideal en la chaveta.</a:t>
+            </a:r>
+          </a:p>
+        </p:txBody>
+      </p:sp>
+      <p:sp>
+        <p:nvSpPr>
+          <p:cNvPr id="12" name="Rounded Rectangle 11"/>
+          <p:cNvSpPr/>
+          <p:nvPr/>
+        </p:nvSpPr>
+        <p:spPr>
+          <a:xfrm>
+            <a:off x="4390034" y="3858768"/>
+            <a:ext cx="3411626" cy="1664208"/>
+          </a:xfrm>
+          <a:prstGeom prst="roundRect">
+            <a:avLst>
+              <a:gd name="adj" fmla="val 3500"/>
+            </a:avLst>
+          </a:prstGeom>
+          <a:solidFill>
+            <a:srgbClr val="F5F5F7"/>
+          </a:solidFill>
+          <a:ln>
+            <a:noFill/>
+          </a:ln>
+          <a:effectLst/>
+        </p:spPr>
+        <p:style>
+          <a:lnRef idx="1">
+            <a:schemeClr val="accent1"/>
+          </a:lnRef>
+          <a:fillRef idx="3">
+            <a:schemeClr val="accent1"/>
+          </a:fillRef>
+          <a:effectRef idx="2">
+            <a:schemeClr val="accent1"/>
+          </a:effectRef>
+          <a:fontRef idx="minor">
+            <a:schemeClr val="lt1"/>
+          </a:fontRef>
+        </p:style>
+        <p:txBody>
+          <a:bodyPr rtlCol="0" anchor="ctr"/>
+          <a:lstStyle/>
+          <a:p>
+            <a:pPr algn="ctr"/>
+          </a:p>
+        </p:txBody>
+      </p:sp>
+      <p:sp>
+        <p:nvSpPr>
+          <p:cNvPr id="13" name="TextBox 12"/>
+          <p:cNvSpPr txBox="1"/>
+          <p:nvPr/>
+        </p:nvSpPr>
+        <p:spPr>
+          <a:xfrm>
+            <a:off x="4609490" y="4041648"/>
+            <a:ext cx="2972714" cy="1371600"/>
+          </a:xfrm>
+          <a:prstGeom prst="rect">
+            <a:avLst/>
+          </a:prstGeom>
+          <a:noFill/>
+        </p:spPr>
+        <p:txBody>
+          <a:bodyPr wrap="square" anchor="t" lIns="0" rIns="0" tIns="0" bIns="0">
+            <a:spAutoFit/>
+          </a:bodyPr>
+          <a:lstStyle/>
+          <a:p>
+            <a:pPr algn="l">
+              <a:lnSpc>
+                <a:spcPct val="110000"/>
+              </a:lnSpc>
+            </a:pPr>
+            <a:r>
+              <a:rPr sz="1350" b="1">
+                <a:solidFill>
+                  <a:srgbClr val="1D1D1F"/>
+                </a:solidFill>
+                <a:latin typeface="Arial"/>
+              </a:rPr>
+              <a:t>Malla coincidente</a:t>
+            </a:r>
+          </a:p>
+          <a:p>
+            <a:pPr algn="l">
+              <a:lnSpc>
+                <a:spcPct val="130000"/>
+              </a:lnSpc>
+              <a:spcBef>
+                <a:spcPts val="600"/>
+              </a:spcBef>
+            </a:pPr>
+            <a:r>
+              <a:rPr sz="1050" b="0">
+                <a:solidFill>
+                  <a:srgbClr val="6E6E73"/>
+                </a:solidFill>
+                <a:latin typeface="Arial"/>
+              </a:rPr>
+              <a:t>Cinco interfaces verificadas después de mallar, con tamaño objetivo 0,8 mm y tolerancia de 1e-6 mm.</a:t>
+            </a:r>
+          </a:p>
+        </p:txBody>
+      </p:sp>
+      <p:sp>
+        <p:nvSpPr>
+          <p:cNvPr id="14" name="Rounded Rectangle 13"/>
+          <p:cNvSpPr/>
+          <p:nvPr/>
+        </p:nvSpPr>
+        <p:spPr>
+          <a:xfrm>
+            <a:off x="8002828" y="3858768"/>
+            <a:ext cx="3411626" cy="1664208"/>
+          </a:xfrm>
+          <a:prstGeom prst="roundRect">
+            <a:avLst>
+              <a:gd name="adj" fmla="val 3500"/>
+            </a:avLst>
+          </a:prstGeom>
+          <a:solidFill>
+            <a:srgbClr val="F5F5F7"/>
+          </a:solidFill>
+          <a:ln>
+            <a:noFill/>
+          </a:ln>
+          <a:effectLst/>
+        </p:spPr>
+        <p:style>
+          <a:lnRef idx="1">
+            <a:schemeClr val="accent1"/>
+          </a:lnRef>
+          <a:fillRef idx="3">
+            <a:schemeClr val="accent1"/>
+          </a:fillRef>
+          <a:effectRef idx="2">
+            <a:schemeClr val="accent1"/>
+          </a:effectRef>
+          <a:fontRef idx="minor">
+            <a:schemeClr val="lt1"/>
+          </a:fontRef>
+        </p:style>
+        <p:txBody>
+          <a:bodyPr rtlCol="0" anchor="ctr"/>
+          <a:lstStyle/>
+          <a:p>
+            <a:pPr algn="ctr"/>
+          </a:p>
+        </p:txBody>
+      </p:sp>
+      <p:sp>
+        <p:nvSpPr>
+          <p:cNvPr id="15" name="TextBox 14"/>
+          <p:cNvSpPr txBox="1"/>
+          <p:nvPr/>
+        </p:nvSpPr>
+        <p:spPr>
+          <a:xfrm>
+            <a:off x="8222284" y="4041648"/>
+            <a:ext cx="2972714" cy="1371600"/>
+          </a:xfrm>
+          <a:prstGeom prst="rect">
+            <a:avLst/>
+          </a:prstGeom>
+          <a:noFill/>
+        </p:spPr>
+        <p:txBody>
+          <a:bodyPr wrap="square" anchor="t" lIns="0" rIns="0" tIns="0" bIns="0">
+            <a:spAutoFit/>
+          </a:bodyPr>
+          <a:lstStyle/>
+          <a:p>
+            <a:pPr algn="l">
+              <a:lnSpc>
+                <a:spcPct val="110000"/>
+              </a:lnSpc>
+            </a:pPr>
+            <a:r>
+              <a:rPr sz="1350" b="1">
+                <a:solidFill>
+                  <a:srgbClr val="1D1D1F"/>
+                </a:solidFill>
+                <a:latin typeface="Arial"/>
+              </a:rPr>
+              <a:t>COINCIDENTE se gana</a:t>
+            </a:r>
+          </a:p>
+          <a:p>
+            <a:pPr algn="l">
+              <a:lnSpc>
+                <a:spcPct val="130000"/>
+              </a:lnSpc>
+              <a:spcBef>
+                <a:spcPts val="600"/>
+              </a:spcBef>
+            </a:pPr>
+            <a:r>
+              <a:rPr sz="1050" b="0">
+                <a:solidFill>
+                  <a:srgbClr val="6E6E73"/>
+                </a:solidFill>
+                <a:latin typeface="Arial"/>
+              </a:rPr>
+              <a:t>Sólo se declara tras comparar coordenadas reales de nodos en cada interfaz que transmite carga. Sembrar igual no es prueba.</a:t>
+            </a:r>
+          </a:p>
+        </p:txBody>
+      </p:sp>
+      <p:sp>
+        <p:nvSpPr>
+          <p:cNvPr id="16" name="TextBox 15"/>
+          <p:cNvSpPr txBox="1"/>
+          <p:nvPr/>
+        </p:nvSpPr>
+        <p:spPr>
+          <a:xfrm>
+            <a:off x="10500055" y="6345936"/>
+            <a:ext cx="914400" cy="274320"/>
+          </a:xfrm>
+          <a:prstGeom prst="rect">
+            <a:avLst/>
+          </a:prstGeom>
+          <a:noFill/>
+        </p:spPr>
+        <p:txBody>
+          <a:bodyPr wrap="square" anchor="t" lIns="0" rIns="0" tIns="0" bIns="0">
+            <a:spAutoFit/>
+          </a:bodyPr>
+          <a:lstStyle/>
+          <a:p>
+            <a:pPr algn="l">
+              <a:lnSpc>
+                <a:spcPct val="100000"/>
+              </a:lnSpc>
+            </a:pPr>
+            <a:r>
+              <a:rPr sz="1000" b="0">
+                <a:solidFill>
+                  <a:srgbClr val="86868B"/>
+                </a:solidFill>
+                <a:latin typeface="Arial"/>
+              </a:rPr>
+              <a:t>33</a:t>
+            </a:r>
+          </a:p>
+        </p:txBody>
+      </p:sp>
+    </p:spTree>
+  </p:cSld>
+  <p:clrMapOvr>
+    <a:masterClrMapping/>
+  </p:clrMapOvr>
+</p:sld>
+</file>
+
+<file path=ppt/slides/slide34.xml><?xml version="1.0" encoding="utf-8"?>
+<p:sld xmlns:a="http://schemas.openxmlformats.org/drawingml/2006/main" xmlns:p="http://schemas.openxmlformats.org/presentationml/2006/main" xmlns:r="http://schemas.openxmlformats.org/officeDocument/2006/relationships">
+  <p:cSld>
+    <p:bg>
+      <p:bgPr>
+        <a:solidFill>
+          <a:srgbClr val="FFFFFF"/>
+        </a:solidFill>
+        <a:effectLst/>
+      </p:bgPr>
+    </p:bg>
+    <p:spTree>
+      <p:nvGrpSpPr>
+        <p:cNvPr id="1" name=""/>
+        <p:cNvGrpSpPr/>
+        <p:nvPr/>
+      </p:nvGrpSpPr>
+      <p:grpSpPr/>
+      <p:sp>
+        <p:nvSpPr>
+          <p:cNvPr id="2" name="TextBox 1"/>
+          <p:cNvSpPr txBox="1"/>
+          <p:nvPr/>
+        </p:nvSpPr>
+        <p:spPr>
+          <a:xfrm>
+            <a:off x="777240" y="566928"/>
+            <a:ext cx="10637215" cy="292608"/>
+          </a:xfrm>
+          <a:prstGeom prst="rect">
+            <a:avLst/>
+          </a:prstGeom>
+          <a:noFill/>
+        </p:spPr>
+        <p:txBody>
+          <a:bodyPr wrap="square" anchor="t" lIns="0" rIns="0" tIns="0" bIns="0">
+            <a:spAutoFit/>
+          </a:bodyPr>
+          <a:lstStyle/>
+          <a:p>
+            <a:pPr algn="l">
+              <a:lnSpc>
+                <a:spcPct val="100000"/>
+              </a:lnSpc>
+            </a:pPr>
+            <a:r>
+              <a:rPr sz="1150" b="1">
+                <a:solidFill>
+                  <a:srgbClr val="0071E3"/>
+                </a:solidFill>
+                <a:latin typeface="Arial"/>
+              </a:rPr>
+              <a:t>VERIFICACIÓN</a:t>
+            </a:r>
+          </a:p>
+        </p:txBody>
+      </p:sp>
+      <p:sp>
+        <p:nvSpPr>
+          <p:cNvPr id="3" name="TextBox 2"/>
+          <p:cNvSpPr txBox="1"/>
+          <p:nvPr/>
+        </p:nvSpPr>
+        <p:spPr>
+          <a:xfrm>
+            <a:off x="777240" y="932688"/>
+            <a:ext cx="10637215" cy="914400"/>
+          </a:xfrm>
+          <a:prstGeom prst="rect">
+            <a:avLst/>
+          </a:prstGeom>
+          <a:noFill/>
+        </p:spPr>
+        <p:txBody>
+          <a:bodyPr wrap="square" anchor="t" lIns="0" rIns="0" tIns="0" bIns="0">
+            <a:spAutoFit/>
+          </a:bodyPr>
+          <a:lstStyle/>
+          <a:p>
+            <a:pPr algn="l">
+              <a:lnSpc>
+                <a:spcPct val="95000"/>
+              </a:lnSpc>
+            </a:pPr>
+            <a:r>
+              <a:rPr sz="3300" b="1">
+                <a:solidFill>
+                  <a:srgbClr val="1D1D1F"/>
+                </a:solidFill>
+                <a:latin typeface="Arial"/>
+              </a:rPr>
+              <a:t>Lo que se ha comprobado, y cómo</a:t>
+            </a:r>
+          </a:p>
+        </p:txBody>
+      </p:sp>
+      <p:sp>
+        <p:nvSpPr>
+          <p:cNvPr id="4" name="Rectangle 3"/>
+          <p:cNvSpPr/>
+          <p:nvPr/>
+        </p:nvSpPr>
+        <p:spPr>
+          <a:xfrm>
+            <a:off x="777240" y="2148840"/>
+            <a:ext cx="685800" cy="27940"/>
+          </a:xfrm>
+          <a:prstGeom prst="rect">
+            <a:avLst/>
+          </a:prstGeom>
+          <a:solidFill>
+            <a:srgbClr val="1B5E20"/>
+          </a:solidFill>
+          <a:ln>
+            <a:noFill/>
+          </a:ln>
+          <a:effectLst/>
+        </p:spPr>
+        <p:style>
+          <a:lnRef idx="1">
+            <a:schemeClr val="accent1"/>
+          </a:lnRef>
+          <a:fillRef idx="3">
+            <a:schemeClr val="accent1"/>
+          </a:fillRef>
+          <a:effectRef idx="2">
+            <a:schemeClr val="accent1"/>
+          </a:effectRef>
+          <a:fontRef idx="minor">
+            <a:schemeClr val="lt1"/>
+          </a:fontRef>
+        </p:style>
+        <p:txBody>
+          <a:bodyPr rtlCol="0" anchor="ctr"/>
+          <a:lstStyle/>
+          <a:p>
+            <a:pPr algn="ctr"/>
+          </a:p>
+        </p:txBody>
+      </p:sp>
+      <p:sp>
+        <p:nvSpPr>
+          <p:cNvPr id="5" name="TextBox 4"/>
+          <p:cNvSpPr txBox="1"/>
+          <p:nvPr/>
+        </p:nvSpPr>
+        <p:spPr>
+          <a:xfrm>
+            <a:off x="777240" y="2331720"/>
+            <a:ext cx="4937760" cy="1280160"/>
+          </a:xfrm>
+          <a:prstGeom prst="rect">
+            <a:avLst/>
+          </a:prstGeom>
+          <a:noFill/>
+        </p:spPr>
+        <p:txBody>
+          <a:bodyPr wrap="square" anchor="t" lIns="0" rIns="0" tIns="0" bIns="0">
+            <a:spAutoFit/>
+          </a:bodyPr>
+          <a:lstStyle/>
+          <a:p>
+            <a:pPr algn="l">
+              <a:lnSpc>
+                <a:spcPct val="110000"/>
+              </a:lnSpc>
+            </a:pPr>
+            <a:r>
+              <a:rPr sz="1500" b="1">
+                <a:solidFill>
+                  <a:srgbClr val="1D1D1F"/>
+                </a:solidFill>
+                <a:latin typeface="Arial"/>
+              </a:rPr>
+              <a:t>Autotest empaquetado</a:t>
+            </a:r>
+          </a:p>
+          <a:p>
+            <a:pPr algn="l">
+              <a:lnSpc>
+                <a:spcPct val="132000"/>
+              </a:lnSpc>
+              <a:spcBef>
+                <a:spcPts val="600"/>
+              </a:spcBef>
+            </a:pPr>
+            <a:r>
+              <a:rPr sz="1150" b="0">
+                <a:solidFill>
+                  <a:srgbClr val="6E6E73"/>
+                </a:solidFill>
+                <a:latin typeface="Arial"/>
+              </a:rPr>
+              <a:t>identidad 4.2 y esquema 6, migración 5→6, catálogos DIN y FVA, cálculos de referencia, seis plantillas de malla, informes en los tres idiomas. Termina con código 0.</a:t>
+            </a:r>
+          </a:p>
+        </p:txBody>
+      </p:sp>
+      <p:sp>
+        <p:nvSpPr>
+          <p:cNvPr id="6" name="Rectangle 5"/>
+          <p:cNvSpPr/>
+          <p:nvPr/>
+        </p:nvSpPr>
+        <p:spPr>
+          <a:xfrm>
+            <a:off x="777240" y="3447288"/>
+            <a:ext cx="685800" cy="27940"/>
+          </a:xfrm>
+          <a:prstGeom prst="rect">
+            <a:avLst/>
+          </a:prstGeom>
+          <a:solidFill>
+            <a:srgbClr val="1B5E20"/>
+          </a:solidFill>
+          <a:ln>
+            <a:noFill/>
+          </a:ln>
+          <a:effectLst/>
+        </p:spPr>
+        <p:style>
+          <a:lnRef idx="1">
+            <a:schemeClr val="accent1"/>
+          </a:lnRef>
+          <a:fillRef idx="3">
+            <a:schemeClr val="accent1"/>
+          </a:fillRef>
+          <a:effectRef idx="2">
+            <a:schemeClr val="accent1"/>
+          </a:effectRef>
+          <a:fontRef idx="minor">
+            <a:schemeClr val="lt1"/>
+          </a:fontRef>
+        </p:style>
+        <p:txBody>
+          <a:bodyPr rtlCol="0" anchor="ctr"/>
+          <a:lstStyle/>
+          <a:p>
+            <a:pPr algn="ctr"/>
+          </a:p>
+        </p:txBody>
+      </p:sp>
+      <p:sp>
+        <p:nvSpPr>
+          <p:cNvPr id="7" name="TextBox 6"/>
+          <p:cNvSpPr txBox="1"/>
+          <p:nvPr/>
+        </p:nvSpPr>
+        <p:spPr>
+          <a:xfrm>
+            <a:off x="777240" y="3630168"/>
+            <a:ext cx="4937760" cy="1280160"/>
+          </a:xfrm>
+          <a:prstGeom prst="rect">
+            <a:avLst/>
+          </a:prstGeom>
+          <a:noFill/>
+        </p:spPr>
+        <p:txBody>
+          <a:bodyPr wrap="square" anchor="t" lIns="0" rIns="0" tIns="0" bIns="0">
+            <a:spAutoFit/>
+          </a:bodyPr>
+          <a:lstStyle/>
+          <a:p>
+            <a:pPr algn="l">
+              <a:lnSpc>
+                <a:spcPct val="110000"/>
+              </a:lnSpc>
+            </a:pPr>
+            <a:r>
+              <a:rPr sz="1500" b="1">
+                <a:solidFill>
+                  <a:srgbClr val="1D1D1F"/>
+                </a:solidFill>
+                <a:latin typeface="Arial"/>
+              </a:rPr>
+              <a:t>Paridad de los tres catálogos</a:t>
+            </a:r>
+          </a:p>
+          <a:p>
+            <a:pPr algn="l">
+              <a:lnSpc>
+                <a:spcPct val="132000"/>
+              </a:lnSpc>
+              <a:spcBef>
+                <a:spcPts val="600"/>
+              </a:spcBef>
+            </a:pPr>
+            <a:r>
+              <a:rPr sz="1150" b="0">
+                <a:solidFill>
+                  <a:srgbClr val="6E6E73"/>
+                </a:solidFill>
+                <a:latin typeface="Arial"/>
+              </a:rPr>
+              <a:t>650 claves por idioma, sin huecos; cada código de validación tiene su presentación traducida.</a:t>
+            </a:r>
+          </a:p>
+        </p:txBody>
+      </p:sp>
+      <p:sp>
+        <p:nvSpPr>
+          <p:cNvPr id="8" name="Rectangle 7"/>
+          <p:cNvSpPr/>
+          <p:nvPr/>
+        </p:nvSpPr>
+        <p:spPr>
+          <a:xfrm>
+            <a:off x="777240" y="4745736"/>
+            <a:ext cx="685800" cy="27940"/>
+          </a:xfrm>
+          <a:prstGeom prst="rect">
+            <a:avLst/>
+          </a:prstGeom>
+          <a:solidFill>
+            <a:srgbClr val="1B5E20"/>
+          </a:solidFill>
+          <a:ln>
+            <a:noFill/>
+          </a:ln>
+          <a:effectLst/>
+        </p:spPr>
+        <p:style>
+          <a:lnRef idx="1">
+            <a:schemeClr val="accent1"/>
+          </a:lnRef>
+          <a:fillRef idx="3">
+            <a:schemeClr val="accent1"/>
+          </a:fillRef>
+          <a:effectRef idx="2">
+            <a:schemeClr val="accent1"/>
+          </a:effectRef>
+          <a:fontRef idx="minor">
+            <a:schemeClr val="lt1"/>
+          </a:fontRef>
+        </p:style>
+        <p:txBody>
+          <a:bodyPr rtlCol="0" anchor="ctr"/>
+          <a:lstStyle/>
+          <a:p>
+            <a:pPr algn="ctr"/>
+          </a:p>
+        </p:txBody>
+      </p:sp>
+      <p:sp>
+        <p:nvSpPr>
+          <p:cNvPr id="9" name="TextBox 8"/>
+          <p:cNvSpPr txBox="1"/>
+          <p:nvPr/>
+        </p:nvSpPr>
+        <p:spPr>
+          <a:xfrm>
+            <a:off x="777240" y="4928616"/>
+            <a:ext cx="4937760" cy="1280160"/>
+          </a:xfrm>
+          <a:prstGeom prst="rect">
+            <a:avLst/>
+          </a:prstGeom>
+          <a:noFill/>
+        </p:spPr>
+        <p:txBody>
+          <a:bodyPr wrap="square" anchor="t" lIns="0" rIns="0" tIns="0" bIns="0">
+            <a:spAutoFit/>
+          </a:bodyPr>
+          <a:lstStyle/>
+          <a:p>
+            <a:pPr algn="l">
+              <a:lnSpc>
+                <a:spcPct val="110000"/>
+              </a:lnSpc>
+            </a:pPr>
+            <a:r>
+              <a:rPr sz="1500" b="1">
+                <a:solidFill>
+                  <a:srgbClr val="1D1D1F"/>
+                </a:solidFill>
+                <a:latin typeface="Arial"/>
+              </a:rPr>
+              <a:t>Los cuatro presets</a:t>
+            </a:r>
+          </a:p>
+          <a:p>
+            <a:pPr algn="l">
+              <a:lnSpc>
+                <a:spcPct val="132000"/>
+              </a:lnSpc>
+              <a:spcBef>
+                <a:spcPts val="600"/>
+              </a:spcBef>
+            </a:pPr>
+            <a:r>
+              <a:rPr sz="1150" b="0">
+                <a:solidFill>
+                  <a:srgbClr val="6E6E73"/>
+                </a:solidFill>
+                <a:latin typeface="Arial"/>
+              </a:rPr>
+              <a:t>normalizan y validan con esquema 6 y cero errores, incluido el de resolución de 10 ciclos.</a:t>
+            </a:r>
+          </a:p>
+        </p:txBody>
+      </p:sp>
+      <p:sp>
+        <p:nvSpPr>
+          <p:cNvPr id="10" name="Rectangle 9"/>
+          <p:cNvSpPr/>
+          <p:nvPr/>
+        </p:nvSpPr>
+        <p:spPr>
+          <a:xfrm>
+            <a:off x="6217920" y="2148840"/>
+            <a:ext cx="685800" cy="27940"/>
+          </a:xfrm>
+          <a:prstGeom prst="rect">
+            <a:avLst/>
+          </a:prstGeom>
+          <a:solidFill>
+            <a:srgbClr val="1B5E20"/>
+          </a:solidFill>
+          <a:ln>
+            <a:noFill/>
+          </a:ln>
+          <a:effectLst/>
+        </p:spPr>
+        <p:style>
+          <a:lnRef idx="1">
+            <a:schemeClr val="accent1"/>
+          </a:lnRef>
+          <a:fillRef idx="3">
+            <a:schemeClr val="accent1"/>
+          </a:fillRef>
+          <a:effectRef idx="2">
+            <a:schemeClr val="accent1"/>
+          </a:effectRef>
+          <a:fontRef idx="minor">
+            <a:schemeClr val="lt1"/>
+          </a:fontRef>
+        </p:style>
+        <p:txBody>
+          <a:bodyPr rtlCol="0" anchor="ctr"/>
+          <a:lstStyle/>
+          <a:p>
+            <a:pPr algn="ctr"/>
+          </a:p>
+        </p:txBody>
+      </p:sp>
+      <p:sp>
+        <p:nvSpPr>
+          <p:cNvPr id="11" name="TextBox 10"/>
+          <p:cNvSpPr txBox="1"/>
+          <p:nvPr/>
+        </p:nvSpPr>
+        <p:spPr>
+          <a:xfrm>
+            <a:off x="6217920" y="2331720"/>
+            <a:ext cx="4937760" cy="1280160"/>
+          </a:xfrm>
+          <a:prstGeom prst="rect">
+            <a:avLst/>
+          </a:prstGeom>
+          <a:noFill/>
+        </p:spPr>
+        <p:txBody>
+          <a:bodyPr wrap="square" anchor="t" lIns="0" rIns="0" tIns="0" bIns="0">
+            <a:spAutoFit/>
+          </a:bodyPr>
+          <a:lstStyle/>
+          <a:p>
+            <a:pPr algn="l">
+              <a:lnSpc>
+                <a:spcPct val="110000"/>
+              </a:lnSpc>
+            </a:pPr>
+            <a:r>
+              <a:rPr sz="1500" b="1">
+                <a:solidFill>
+                  <a:srgbClr val="1D1D1F"/>
+                </a:solidFill>
+                <a:latin typeface="Arial"/>
+              </a:rPr>
+              <a:t>Compatibilidad con el kernel</a:t>
+            </a:r>
+          </a:p>
+          <a:p>
+            <a:pPr algn="l">
+              <a:lnSpc>
+                <a:spcPct val="132000"/>
+              </a:lnSpc>
+              <a:spcBef>
+                <a:spcPts val="600"/>
+              </a:spcBef>
+            </a:pPr>
+            <a:r>
+              <a:rPr sz="1150" b="0">
+                <a:solidFill>
+                  <a:srgbClr val="6E6E73"/>
+                </a:solidFill>
+                <a:latin typeface="Arial"/>
+              </a:rPr>
+              <a:t>los seis módulos que corren dentro de Abaqus se auditaron con AST: sin f-strings, sin anotaciones, sólo os, sys, json, math, time y hashlib. División importada del futuro.</a:t>
+            </a:r>
+          </a:p>
+        </p:txBody>
+      </p:sp>
+      <p:sp>
+        <p:nvSpPr>
+          <p:cNvPr id="12" name="Rectangle 11"/>
+          <p:cNvSpPr/>
+          <p:nvPr/>
+        </p:nvSpPr>
+        <p:spPr>
+          <a:xfrm>
+            <a:off x="6217920" y="3447288"/>
+            <a:ext cx="685800" cy="27940"/>
+          </a:xfrm>
+          <a:prstGeom prst="rect">
+            <a:avLst/>
+          </a:prstGeom>
+          <a:solidFill>
+            <a:srgbClr val="1B5E20"/>
+          </a:solidFill>
+          <a:ln>
+            <a:noFill/>
+          </a:ln>
+          <a:effectLst/>
+        </p:spPr>
+        <p:style>
+          <a:lnRef idx="1">
+            <a:schemeClr val="accent1"/>
+          </a:lnRef>
+          <a:fillRef idx="3">
+            <a:schemeClr val="accent1"/>
+          </a:fillRef>
+          <a:effectRef idx="2">
+            <a:schemeClr val="accent1"/>
+          </a:effectRef>
+          <a:fontRef idx="minor">
+            <a:schemeClr val="lt1"/>
+          </a:fontRef>
+        </p:style>
+        <p:txBody>
+          <a:bodyPr rtlCol="0" anchor="ctr"/>
+          <a:lstStyle/>
+          <a:p>
+            <a:pPr algn="ctr"/>
+          </a:p>
+        </p:txBody>
+      </p:sp>
+      <p:sp>
+        <p:nvSpPr>
+          <p:cNvPr id="13" name="TextBox 12"/>
+          <p:cNvSpPr txBox="1"/>
+          <p:nvPr/>
+        </p:nvSpPr>
+        <p:spPr>
+          <a:xfrm>
+            <a:off x="6217920" y="3630168"/>
+            <a:ext cx="4937760" cy="1280160"/>
+          </a:xfrm>
+          <a:prstGeom prst="rect">
+            <a:avLst/>
+          </a:prstGeom>
+          <a:noFill/>
+        </p:spPr>
+        <p:txBody>
+          <a:bodyPr wrap="square" anchor="t" lIns="0" rIns="0" tIns="0" bIns="0">
+            <a:spAutoFit/>
+          </a:bodyPr>
+          <a:lstStyle/>
+          <a:p>
+            <a:pPr algn="l">
+              <a:lnSpc>
+                <a:spcPct val="110000"/>
+              </a:lnSpc>
+            </a:pPr>
+            <a:r>
+              <a:rPr sz="1500" b="1">
+                <a:solidFill>
+                  <a:srgbClr val="1D1D1F"/>
+                </a:solidFill>
+                <a:latin typeface="Arial"/>
+              </a:rPr>
+              <a:t>Contrato de artefactos</a:t>
+            </a:r>
+          </a:p>
+          <a:p>
+            <a:pPr algn="l">
+              <a:lnSpc>
+                <a:spcPct val="132000"/>
+              </a:lnSpc>
+              <a:spcBef>
+                <a:spcPts val="600"/>
+              </a:spcBef>
+            </a:pPr>
+            <a:r>
+              <a:rPr sz="1150" b="0">
+                <a:solidFill>
+                  <a:srgbClr val="6E6E73"/>
+                </a:solidFill>
+                <a:latin typeface="Arial"/>
+              </a:rPr>
+              <a:t>el proyecto se declara correcto sólo si existen auditoría, BUILD_RESULT, CAE, capturas e informe, y si la malla realizada coincide con la planificada.</a:t>
+            </a:r>
+          </a:p>
+        </p:txBody>
+      </p:sp>
+      <p:sp>
+        <p:nvSpPr>
+          <p:cNvPr id="14" name="Rectangle 13"/>
+          <p:cNvSpPr/>
+          <p:nvPr/>
+        </p:nvSpPr>
+        <p:spPr>
+          <a:xfrm>
+            <a:off x="6217920" y="4745736"/>
+            <a:ext cx="685800" cy="27940"/>
+          </a:xfrm>
+          <a:prstGeom prst="rect">
+            <a:avLst/>
+          </a:prstGeom>
+          <a:solidFill>
+            <a:srgbClr val="1B5E20"/>
+          </a:solidFill>
+          <a:ln>
+            <a:noFill/>
+          </a:ln>
+          <a:effectLst/>
+        </p:spPr>
+        <p:style>
+          <a:lnRef idx="1">
+            <a:schemeClr val="accent1"/>
+          </a:lnRef>
+          <a:fillRef idx="3">
+            <a:schemeClr val="accent1"/>
+          </a:fillRef>
+          <a:effectRef idx="2">
+            <a:schemeClr val="accent1"/>
+          </a:effectRef>
+          <a:fontRef idx="minor">
+            <a:schemeClr val="lt1"/>
+          </a:fontRef>
+        </p:style>
+        <p:txBody>
+          <a:bodyPr rtlCol="0" anchor="ctr"/>
+          <a:lstStyle/>
+          <a:p>
+            <a:pPr algn="ctr"/>
+          </a:p>
+        </p:txBody>
+      </p:sp>
+      <p:sp>
+        <p:nvSpPr>
+          <p:cNvPr id="15" name="TextBox 14"/>
+          <p:cNvSpPr txBox="1"/>
+          <p:nvPr/>
+        </p:nvSpPr>
+        <p:spPr>
+          <a:xfrm>
+            <a:off x="6217920" y="4928616"/>
+            <a:ext cx="4937760" cy="1280160"/>
+          </a:xfrm>
+          <a:prstGeom prst="rect">
+            <a:avLst/>
+          </a:prstGeom>
+          <a:noFill/>
+        </p:spPr>
+        <p:txBody>
+          <a:bodyPr wrap="square" anchor="t" lIns="0" rIns="0" tIns="0" bIns="0">
+            <a:spAutoFit/>
+          </a:bodyPr>
+          <a:lstStyle/>
+          <a:p>
+            <a:pPr algn="l">
+              <a:lnSpc>
+                <a:spcPct val="110000"/>
+              </a:lnSpc>
+            </a:pPr>
+            <a:r>
+              <a:rPr sz="1500" b="1">
+                <a:solidFill>
+                  <a:srgbClr val="1D1D1F"/>
+                </a:solidFill>
+                <a:latin typeface="Arial"/>
+              </a:rPr>
+              <a:t>Cifras fijadas en el test</a:t>
+            </a:r>
+          </a:p>
+          <a:p>
+            <a:pPr algn="l">
+              <a:lnSpc>
+                <a:spcPct val="132000"/>
+              </a:lnSpc>
+              <a:spcBef>
+                <a:spcPts val="600"/>
+              </a:spcBef>
+            </a:pPr>
+            <a:r>
+              <a:rPr sz="1150" b="0">
+                <a:solidFill>
+                  <a:srgbClr val="6E6E73"/>
+                </a:solidFill>
+                <a:latin typeface="Arial"/>
+              </a:rPr>
+              <a:t>999,18 N·m gobernado por el cubo, t2tr = 3,141 mm, f_W de la ecuación 3 y el dominio de K_λ.</a:t>
+            </a:r>
+          </a:p>
+        </p:txBody>
+      </p:sp>
+      <p:sp>
+        <p:nvSpPr>
+          <p:cNvPr id="16" name="TextBox 15"/>
+          <p:cNvSpPr txBox="1"/>
+          <p:nvPr/>
+        </p:nvSpPr>
+        <p:spPr>
+          <a:xfrm>
+            <a:off x="777240" y="6144768"/>
+            <a:ext cx="10058400" cy="640080"/>
+          </a:xfrm>
+          <a:prstGeom prst="rect">
+            <a:avLst/>
+          </a:prstGeom>
+          <a:noFill/>
+        </p:spPr>
+        <p:txBody>
+          <a:bodyPr wrap="square" anchor="t" lIns="0" rIns="0" tIns="0" bIns="0">
+            <a:spAutoFit/>
+          </a:bodyPr>
+          <a:lstStyle/>
+          <a:p>
+            <a:pPr algn="l">
+              <a:lnSpc>
+                <a:spcPct val="125000"/>
+              </a:lnSpc>
+            </a:pPr>
+            <a:r>
+              <a:rPr sz="1150" b="0">
+                <a:solidFill>
+                  <a:srgbClr val="86868B"/>
+                </a:solidFill>
+                <a:latin typeface="Arial"/>
+              </a:rPr>
+              <a:t>Lo que el autotest no hace, y así lo declara: no arranca Abaqus, no resuelve, no compila LaTeX y no valida un especimen FVA.</a:t>
+            </a:r>
+          </a:p>
+        </p:txBody>
+      </p:sp>
+      <p:sp>
+        <p:nvSpPr>
+          <p:cNvPr id="17" name="TextBox 16"/>
+          <p:cNvSpPr txBox="1"/>
+          <p:nvPr/>
+        </p:nvSpPr>
+        <p:spPr>
+          <a:xfrm>
+            <a:off x="10500055" y="6345936"/>
+            <a:ext cx="914400" cy="274320"/>
+          </a:xfrm>
+          <a:prstGeom prst="rect">
+            <a:avLst/>
+          </a:prstGeom>
+          <a:noFill/>
+        </p:spPr>
+        <p:txBody>
+          <a:bodyPr wrap="square" anchor="t" lIns="0" rIns="0" tIns="0" bIns="0">
+            <a:spAutoFit/>
+          </a:bodyPr>
+          <a:lstStyle/>
+          <a:p>
+            <a:pPr algn="l">
+              <a:lnSpc>
+                <a:spcPct val="100000"/>
+              </a:lnSpc>
+            </a:pPr>
+            <a:r>
+              <a:rPr sz="1000" b="0">
+                <a:solidFill>
+                  <a:srgbClr val="86868B"/>
+                </a:solidFill>
+                <a:latin typeface="Arial"/>
+              </a:rPr>
+              <a:t>34</a:t>
+            </a:r>
+          </a:p>
+        </p:txBody>
+      </p:sp>
+    </p:spTree>
+  </p:cSld>
+  <p:clrMapOvr>
+    <a:masterClrMapping/>
+  </p:clrMapOvr>
+</p:sld>
+</file>
+
+<file path=ppt/slides/slide35.xml><?xml version="1.0" encoding="utf-8"?>
+<p:sld xmlns:a="http://schemas.openxmlformats.org/drawingml/2006/main" xmlns:p="http://schemas.openxmlformats.org/presentationml/2006/main" xmlns:r="http://schemas.openxmlformats.org/officeDocument/2006/relationships">
+  <p:cSld>
+    <p:bg>
+      <p:bgPr>
+        <a:solidFill>
+          <a:srgbClr val="FFFFFF"/>
+        </a:solidFill>
+        <a:effectLst/>
+      </p:bgPr>
+    </p:bg>
+    <p:spTree>
+      <p:nvGrpSpPr>
+        <p:cNvPr id="1" name=""/>
+        <p:cNvGrpSpPr/>
+        <p:nvPr/>
+      </p:nvGrpSpPr>
+      <p:grpSpPr/>
+      <p:sp>
+        <p:nvSpPr>
+          <p:cNvPr id="2" name="TextBox 1"/>
+          <p:cNvSpPr txBox="1"/>
+          <p:nvPr/>
+        </p:nvSpPr>
+        <p:spPr>
+          <a:xfrm>
+            <a:off x="777240" y="566928"/>
+            <a:ext cx="10637215" cy="292608"/>
+          </a:xfrm>
+          <a:prstGeom prst="rect">
+            <a:avLst/>
+          </a:prstGeom>
+          <a:noFill/>
+        </p:spPr>
+        <p:txBody>
+          <a:bodyPr wrap="square" anchor="t" lIns="0" rIns="0" tIns="0" bIns="0">
+            <a:spAutoFit/>
+          </a:bodyPr>
+          <a:lstStyle/>
+          <a:p>
+            <a:pPr algn="l">
+              <a:lnSpc>
+                <a:spcPct val="100000"/>
+              </a:lnSpc>
+            </a:pPr>
+            <a:r>
+              <a:rPr sz="1150" b="1">
+                <a:solidFill>
+                  <a:srgbClr val="0071E3"/>
+                </a:solidFill>
+                <a:latin typeface="Arial"/>
+              </a:rPr>
+              <a:t>ROBUSTEZ</a:t>
+            </a:r>
+          </a:p>
+        </p:txBody>
+      </p:sp>
+      <p:sp>
+        <p:nvSpPr>
+          <p:cNvPr id="3" name="TextBox 2"/>
+          <p:cNvSpPr txBox="1"/>
+          <p:nvPr/>
+        </p:nvSpPr>
+        <p:spPr>
+          <a:xfrm>
+            <a:off x="777240" y="932688"/>
+            <a:ext cx="10637215" cy="914400"/>
+          </a:xfrm>
+          <a:prstGeom prst="rect">
+            <a:avLst/>
+          </a:prstGeom>
+          <a:noFill/>
+        </p:spPr>
+        <p:txBody>
+          <a:bodyPr wrap="square" anchor="t" lIns="0" rIns="0" tIns="0" bIns="0">
+            <a:spAutoFit/>
+          </a:bodyPr>
+          <a:lstStyle/>
+          <a:p>
+            <a:pPr algn="l">
+              <a:lnSpc>
+                <a:spcPct val="95000"/>
+              </a:lnSpc>
+            </a:pPr>
+            <a:r>
+              <a:rPr sz="3000" b="1">
+                <a:solidFill>
+                  <a:srgbClr val="1D1D1F"/>
+                </a:solidFill>
+                <a:latin typeface="Arial"/>
+              </a:rPr>
+              <a:t>Decisiones que evitan clases enteras de error</a:t>
+            </a:r>
+          </a:p>
+        </p:txBody>
+      </p:sp>
+      <p:sp>
+        <p:nvSpPr>
+          <p:cNvPr id="4" name="Rounded Rectangle 3"/>
+          <p:cNvSpPr/>
+          <p:nvPr/>
+        </p:nvSpPr>
+        <p:spPr>
+          <a:xfrm>
+            <a:off x="777240" y="2011680"/>
+            <a:ext cx="3411626" cy="1664208"/>
+          </a:xfrm>
+          <a:prstGeom prst="roundRect">
+            <a:avLst>
+              <a:gd name="adj" fmla="val 3500"/>
+            </a:avLst>
+          </a:prstGeom>
+          <a:solidFill>
+            <a:srgbClr val="F5F5F7"/>
+          </a:solidFill>
+          <a:ln>
+            <a:noFill/>
+          </a:ln>
+          <a:effectLst/>
+        </p:spPr>
+        <p:style>
+          <a:lnRef idx="1">
+            <a:schemeClr val="accent1"/>
+          </a:lnRef>
+          <a:fillRef idx="3">
+            <a:schemeClr val="accent1"/>
+          </a:fillRef>
+          <a:effectRef idx="2">
+            <a:schemeClr val="accent1"/>
+          </a:effectRef>
+          <a:fontRef idx="minor">
+            <a:schemeClr val="lt1"/>
+          </a:fontRef>
+        </p:style>
+        <p:txBody>
+          <a:bodyPr rtlCol="0" anchor="ctr"/>
+          <a:lstStyle/>
+          <a:p>
+            <a:pPr algn="ctr"/>
+          </a:p>
+        </p:txBody>
+      </p:sp>
+      <p:sp>
+        <p:nvSpPr>
+          <p:cNvPr id="5" name="TextBox 4"/>
+          <p:cNvSpPr txBox="1"/>
+          <p:nvPr/>
+        </p:nvSpPr>
+        <p:spPr>
+          <a:xfrm>
+            <a:off x="996696" y="2194560"/>
+            <a:ext cx="2972714" cy="1371600"/>
+          </a:xfrm>
+          <a:prstGeom prst="rect">
+            <a:avLst/>
+          </a:prstGeom>
+          <a:noFill/>
+        </p:spPr>
+        <p:txBody>
+          <a:bodyPr wrap="square" anchor="t" lIns="0" rIns="0" tIns="0" bIns="0">
+            <a:spAutoFit/>
+          </a:bodyPr>
+          <a:lstStyle/>
+          <a:p>
+            <a:pPr algn="l">
+              <a:lnSpc>
+                <a:spcPct val="110000"/>
+              </a:lnSpc>
+            </a:pPr>
+            <a:r>
+              <a:rPr sz="1350" b="1">
+                <a:solidFill>
+                  <a:srgbClr val="1D1D1F"/>
+                </a:solidFill>
+                <a:latin typeface="Arial"/>
+              </a:rPr>
+              <a:t>Sin shell</a:t>
+            </a:r>
+          </a:p>
+          <a:p>
+            <a:pPr algn="l">
+              <a:lnSpc>
+                <a:spcPct val="130000"/>
+              </a:lnSpc>
+              <a:spcBef>
+                <a:spcPts val="600"/>
+              </a:spcBef>
+            </a:pPr>
+            <a:r>
+              <a:rPr sz="1050" b="0">
+                <a:solidFill>
+                  <a:srgbClr val="6E6E73"/>
+                </a:solidFill>
+                <a:latin typeface="Arial"/>
+              </a:rPr>
+              <a:t>El lanzador se construye como lista de argumentos; shell=True no se usa nunca y los caracteres de control se rechazan.</a:t>
+            </a:r>
+          </a:p>
+        </p:txBody>
+      </p:sp>
+      <p:sp>
+        <p:nvSpPr>
+          <p:cNvPr id="6" name="Rounded Rectangle 5"/>
+          <p:cNvSpPr/>
+          <p:nvPr/>
+        </p:nvSpPr>
+        <p:spPr>
+          <a:xfrm>
+            <a:off x="4390034" y="2011680"/>
+            <a:ext cx="3411626" cy="1664208"/>
+          </a:xfrm>
+          <a:prstGeom prst="roundRect">
+            <a:avLst>
+              <a:gd name="adj" fmla="val 3500"/>
+            </a:avLst>
+          </a:prstGeom>
+          <a:solidFill>
+            <a:srgbClr val="F5F5F7"/>
+          </a:solidFill>
+          <a:ln>
+            <a:noFill/>
+          </a:ln>
+          <a:effectLst/>
+        </p:spPr>
+        <p:style>
+          <a:lnRef idx="1">
+            <a:schemeClr val="accent1"/>
+          </a:lnRef>
+          <a:fillRef idx="3">
+            <a:schemeClr val="accent1"/>
+          </a:fillRef>
+          <a:effectRef idx="2">
+            <a:schemeClr val="accent1"/>
+          </a:effectRef>
+          <a:fontRef idx="minor">
+            <a:schemeClr val="lt1"/>
+          </a:fontRef>
+        </p:style>
+        <p:txBody>
+          <a:bodyPr rtlCol="0" anchor="ctr"/>
+          <a:lstStyle/>
+          <a:p>
+            <a:pPr algn="ctr"/>
+          </a:p>
+        </p:txBody>
+      </p:sp>
+      <p:sp>
+        <p:nvSpPr>
+          <p:cNvPr id="7" name="TextBox 6"/>
+          <p:cNvSpPr txBox="1"/>
+          <p:nvPr/>
+        </p:nvSpPr>
+        <p:spPr>
+          <a:xfrm>
+            <a:off x="4609490" y="2194560"/>
+            <a:ext cx="2972714" cy="1371600"/>
+          </a:xfrm>
+          <a:prstGeom prst="rect">
+            <a:avLst/>
+          </a:prstGeom>
+          <a:noFill/>
+        </p:spPr>
+        <p:txBody>
+          <a:bodyPr wrap="square" anchor="t" lIns="0" rIns="0" tIns="0" bIns="0">
+            <a:spAutoFit/>
+          </a:bodyPr>
+          <a:lstStyle/>
+          <a:p>
+            <a:pPr algn="l">
+              <a:lnSpc>
+                <a:spcPct val="110000"/>
+              </a:lnSpc>
+            </a:pPr>
+            <a:r>
+              <a:rPr sz="1350" b="1">
+                <a:solidFill>
+                  <a:srgbClr val="1D1D1F"/>
+                </a:solidFill>
+                <a:latin typeface="Arial"/>
+              </a:rPr>
+              <a:t>Contenido</a:t>
+            </a:r>
+          </a:p>
+          <a:p>
+            <a:pPr algn="l">
+              <a:lnSpc>
+                <a:spcPct val="130000"/>
+              </a:lnSpc>
+              <a:spcBef>
+                <a:spcPts val="600"/>
+              </a:spcBef>
+            </a:pPr>
+            <a:r>
+              <a:rPr sz="1050" b="0">
+                <a:solidFill>
+                  <a:srgbClr val="6E6E73"/>
+                </a:solidFill>
+                <a:latin typeface="Arial"/>
+              </a:rPr>
+              <a:t>El subproceso corre con cwd = jobs/ y las rutas de artefactos tienen que ser absolutas: no hay respaldo al directorio actual.</a:t>
+            </a:r>
+          </a:p>
+        </p:txBody>
+      </p:sp>
+      <p:sp>
+        <p:nvSpPr>
+          <p:cNvPr id="8" name="Rounded Rectangle 7"/>
+          <p:cNvSpPr/>
+          <p:nvPr/>
+        </p:nvSpPr>
+        <p:spPr>
+          <a:xfrm>
+            <a:off x="8002828" y="2011680"/>
+            <a:ext cx="3411626" cy="1664208"/>
+          </a:xfrm>
+          <a:prstGeom prst="roundRect">
+            <a:avLst>
+              <a:gd name="adj" fmla="val 3500"/>
+            </a:avLst>
+          </a:prstGeom>
+          <a:solidFill>
+            <a:srgbClr val="F5F5F7"/>
+          </a:solidFill>
+          <a:ln>
+            <a:noFill/>
+          </a:ln>
+          <a:effectLst/>
+        </p:spPr>
+        <p:style>
+          <a:lnRef idx="1">
+            <a:schemeClr val="accent1"/>
+          </a:lnRef>
+          <a:fillRef idx="3">
+            <a:schemeClr val="accent1"/>
+          </a:fillRef>
+          <a:effectRef idx="2">
+            <a:schemeClr val="accent1"/>
+          </a:effectRef>
+          <a:fontRef idx="minor">
+            <a:schemeClr val="lt1"/>
+          </a:fontRef>
+        </p:style>
+        <p:txBody>
+          <a:bodyPr rtlCol="0" anchor="ctr"/>
+          <a:lstStyle/>
+          <a:p>
+            <a:pPr algn="ctr"/>
+          </a:p>
+        </p:txBody>
+      </p:sp>
+      <p:sp>
+        <p:nvSpPr>
+          <p:cNvPr id="9" name="TextBox 8"/>
+          <p:cNvSpPr txBox="1"/>
+          <p:nvPr/>
+        </p:nvSpPr>
+        <p:spPr>
+          <a:xfrm>
+            <a:off x="8222284" y="2194560"/>
+            <a:ext cx="2972714" cy="1371600"/>
+          </a:xfrm>
+          <a:prstGeom prst="rect">
+            <a:avLst/>
+          </a:prstGeom>
+          <a:noFill/>
+        </p:spPr>
+        <p:txBody>
+          <a:bodyPr wrap="square" anchor="t" lIns="0" rIns="0" tIns="0" bIns="0">
+            <a:spAutoFit/>
+          </a:bodyPr>
+          <a:lstStyle/>
+          <a:p>
+            <a:pPr algn="l">
+              <a:lnSpc>
+                <a:spcPct val="110000"/>
+              </a:lnSpc>
+            </a:pPr>
+            <a:r>
+              <a:rPr sz="1350" b="1">
+                <a:solidFill>
+                  <a:srgbClr val="1D1D1F"/>
+                </a:solidFill>
+                <a:latin typeface="Arial"/>
+              </a:rPr>
+              <a:t>Tres candados NOJOB</a:t>
+            </a:r>
+          </a:p>
+          <a:p>
+            <a:pPr algn="l">
+              <a:lnSpc>
+                <a:spcPct val="130000"/>
+              </a:lnSpc>
+              <a:spcBef>
+                <a:spcPts val="600"/>
+              </a:spcBef>
+            </a:pPr>
+            <a:r>
+              <a:rPr sz="1050" b="0">
+                <a:solidFill>
+                  <a:srgbClr val="6E6E73"/>
+                </a:solidFill>
+                <a:latin typeface="Arial"/>
+              </a:rPr>
+              <a:t>Ni objetos de trabajo, ni archivos de solver, más una comprobación explícita de configuración.</a:t>
+            </a:r>
+          </a:p>
+        </p:txBody>
+      </p:sp>
+      <p:sp>
+        <p:nvSpPr>
+          <p:cNvPr id="10" name="Rounded Rectangle 9"/>
+          <p:cNvSpPr/>
+          <p:nvPr/>
+        </p:nvSpPr>
+        <p:spPr>
+          <a:xfrm>
+            <a:off x="777240" y="3858768"/>
+            <a:ext cx="3411626" cy="1664208"/>
+          </a:xfrm>
+          <a:prstGeom prst="roundRect">
+            <a:avLst>
+              <a:gd name="adj" fmla="val 3500"/>
+            </a:avLst>
+          </a:prstGeom>
+          <a:solidFill>
+            <a:srgbClr val="F5F5F7"/>
+          </a:solidFill>
+          <a:ln>
+            <a:noFill/>
+          </a:ln>
+          <a:effectLst/>
+        </p:spPr>
+        <p:style>
+          <a:lnRef idx="1">
+            <a:schemeClr val="accent1"/>
+          </a:lnRef>
+          <a:fillRef idx="3">
+            <a:schemeClr val="accent1"/>
+          </a:fillRef>
+          <a:effectRef idx="2">
+            <a:schemeClr val="accent1"/>
+          </a:effectRef>
+          <a:fontRef idx="minor">
+            <a:schemeClr val="lt1"/>
+          </a:fontRef>
+        </p:style>
+        <p:txBody>
+          <a:bodyPr rtlCol="0" anchor="ctr"/>
+          <a:lstStyle/>
+          <a:p>
+            <a:pPr algn="ctr"/>
+          </a:p>
+        </p:txBody>
+      </p:sp>
+      <p:sp>
+        <p:nvSpPr>
+          <p:cNvPr id="11" name="TextBox 10"/>
+          <p:cNvSpPr txBox="1"/>
+          <p:nvPr/>
+        </p:nvSpPr>
+        <p:spPr>
+          <a:xfrm>
+            <a:off x="996696" y="4041648"/>
+            <a:ext cx="2972714" cy="1371600"/>
+          </a:xfrm>
+          <a:prstGeom prst="rect">
+            <a:avLst/>
+          </a:prstGeom>
+          <a:noFill/>
+        </p:spPr>
+        <p:txBody>
+          <a:bodyPr wrap="square" anchor="t" lIns="0" rIns="0" tIns="0" bIns="0">
+            <a:spAutoFit/>
+          </a:bodyPr>
+          <a:lstStyle/>
+          <a:p>
+            <a:pPr algn="l">
+              <a:lnSpc>
+                <a:spcPct val="110000"/>
+              </a:lnSpc>
+            </a:pPr>
+            <a:r>
+              <a:rPr sz="1350" b="1">
+                <a:solidFill>
+                  <a:srgbClr val="1D1D1F"/>
+                </a:solidFill>
+                <a:latin typeface="Arial"/>
+              </a:rPr>
+              <a:t>Detener significa detener</a:t>
+            </a:r>
+          </a:p>
+          <a:p>
+            <a:pPr algn="l">
+              <a:lnSpc>
+                <a:spcPct val="130000"/>
+              </a:lnSpc>
+              <a:spcBef>
+                <a:spcPts val="600"/>
+              </a:spcBef>
+            </a:pPr>
+            <a:r>
+              <a:rPr sz="1050" b="0">
+                <a:solidFill>
+                  <a:srgbClr val="6E6E73"/>
+                </a:solidFill>
+                <a:latin typeface="Arial"/>
+              </a:rPr>
+              <a:t>Se mata el árbol completo de procesos del solver y el proyecto queda marcado como CANCELLED, no como terminado.</a:t>
+            </a:r>
+          </a:p>
+        </p:txBody>
+      </p:sp>
+      <p:sp>
+        <p:nvSpPr>
+          <p:cNvPr id="12" name="Rounded Rectangle 11"/>
+          <p:cNvSpPr/>
+          <p:nvPr/>
+        </p:nvSpPr>
+        <p:spPr>
+          <a:xfrm>
+            <a:off x="4390034" y="3858768"/>
+            <a:ext cx="3411626" cy="1664208"/>
+          </a:xfrm>
+          <a:prstGeom prst="roundRect">
+            <a:avLst>
+              <a:gd name="adj" fmla="val 3500"/>
+            </a:avLst>
+          </a:prstGeom>
+          <a:solidFill>
+            <a:srgbClr val="F5F5F7"/>
+          </a:solidFill>
+          <a:ln>
+            <a:noFill/>
+          </a:ln>
+          <a:effectLst/>
+        </p:spPr>
+        <p:style>
+          <a:lnRef idx="1">
+            <a:schemeClr val="accent1"/>
+          </a:lnRef>
+          <a:fillRef idx="3">
+            <a:schemeClr val="accent1"/>
+          </a:fillRef>
+          <a:effectRef idx="2">
+            <a:schemeClr val="accent1"/>
+          </a:effectRef>
+          <a:fontRef idx="minor">
+            <a:schemeClr val="lt1"/>
+          </a:fontRef>
+        </p:style>
+        <p:txBody>
+          <a:bodyPr rtlCol="0" anchor="ctr"/>
+          <a:lstStyle/>
+          <a:p>
+            <a:pPr algn="ctr"/>
+          </a:p>
+        </p:txBody>
+      </p:sp>
+      <p:sp>
+        <p:nvSpPr>
+          <p:cNvPr id="13" name="TextBox 12"/>
+          <p:cNvSpPr txBox="1"/>
+          <p:nvPr/>
+        </p:nvSpPr>
+        <p:spPr>
+          <a:xfrm>
+            <a:off x="4609490" y="4041648"/>
+            <a:ext cx="2972714" cy="1371600"/>
+          </a:xfrm>
+          <a:prstGeom prst="rect">
+            <a:avLst/>
+          </a:prstGeom>
+          <a:noFill/>
+        </p:spPr>
+        <p:txBody>
+          <a:bodyPr wrap="square" anchor="t" lIns="0" rIns="0" tIns="0" bIns="0">
+            <a:spAutoFit/>
+          </a:bodyPr>
+          <a:lstStyle/>
+          <a:p>
+            <a:pPr algn="l">
+              <a:lnSpc>
+                <a:spcPct val="110000"/>
+              </a:lnSpc>
+            </a:pPr>
+            <a:r>
+              <a:rPr sz="1350" b="1">
+                <a:solidFill>
+                  <a:srgbClr val="1D1D1F"/>
+                </a:solidFill>
+                <a:latin typeface="Arial"/>
+              </a:rPr>
+              <a:t>Escrituras atómicas</a:t>
+            </a:r>
+          </a:p>
+          <a:p>
+            <a:pPr algn="l">
+              <a:lnSpc>
+                <a:spcPct val="130000"/>
+              </a:lnSpc>
+              <a:spcBef>
+                <a:spcPts val="600"/>
+              </a:spcBef>
+            </a:pPr>
+            <a:r>
+              <a:rPr sz="1050" b="0">
+                <a:solidFill>
+                  <a:srgbClr val="6E6E73"/>
+                </a:solidFill>
+                <a:latin typeface="Arial"/>
+              </a:rPr>
+              <a:t>Cada JSON se escribe en .tmp y se renombra, así que una caída no puede dejar medio manifiesto.</a:t>
+            </a:r>
+          </a:p>
+        </p:txBody>
+      </p:sp>
+      <p:sp>
+        <p:nvSpPr>
+          <p:cNvPr id="14" name="Rounded Rectangle 13"/>
+          <p:cNvSpPr/>
+          <p:nvPr/>
+        </p:nvSpPr>
+        <p:spPr>
+          <a:xfrm>
+            <a:off x="8002828" y="3858768"/>
+            <a:ext cx="3411626" cy="1664208"/>
+          </a:xfrm>
+          <a:prstGeom prst="roundRect">
+            <a:avLst>
+              <a:gd name="adj" fmla="val 3500"/>
+            </a:avLst>
+          </a:prstGeom>
+          <a:solidFill>
+            <a:srgbClr val="F5F5F7"/>
+          </a:solidFill>
+          <a:ln>
+            <a:noFill/>
+          </a:ln>
+          <a:effectLst/>
+        </p:spPr>
+        <p:style>
+          <a:lnRef idx="1">
+            <a:schemeClr val="accent1"/>
+          </a:lnRef>
+          <a:fillRef idx="3">
+            <a:schemeClr val="accent1"/>
+          </a:fillRef>
+          <a:effectRef idx="2">
+            <a:schemeClr val="accent1"/>
+          </a:effectRef>
+          <a:fontRef idx="minor">
+            <a:schemeClr val="lt1"/>
+          </a:fontRef>
+        </p:style>
+        <p:txBody>
+          <a:bodyPr rtlCol="0" anchor="ctr"/>
+          <a:lstStyle/>
+          <a:p>
+            <a:pPr algn="ctr"/>
+          </a:p>
+        </p:txBody>
+      </p:sp>
+      <p:sp>
+        <p:nvSpPr>
+          <p:cNvPr id="15" name="TextBox 14"/>
+          <p:cNvSpPr txBox="1"/>
+          <p:nvPr/>
+        </p:nvSpPr>
+        <p:spPr>
+          <a:xfrm>
+            <a:off x="8222284" y="4041648"/>
+            <a:ext cx="2972714" cy="1371600"/>
+          </a:xfrm>
+          <a:prstGeom prst="rect">
+            <a:avLst/>
+          </a:prstGeom>
+          <a:noFill/>
+        </p:spPr>
+        <p:txBody>
+          <a:bodyPr wrap="square" anchor="t" lIns="0" rIns="0" tIns="0" bIns="0">
+            <a:spAutoFit/>
+          </a:bodyPr>
+          <a:lstStyle/>
+          <a:p>
+            <a:pPr algn="l">
+              <a:lnSpc>
+                <a:spcPct val="110000"/>
+              </a:lnSpc>
+            </a:pPr>
+            <a:r>
+              <a:rPr sz="1350" b="1">
+                <a:solidFill>
+                  <a:srgbClr val="1D1D1F"/>
+                </a:solidFill>
+                <a:latin typeface="Arial"/>
+              </a:rPr>
+              <a:t>Nada con licencia se distribuye</a:t>
+            </a:r>
+          </a:p>
+          <a:p>
+            <a:pPr algn="l">
+              <a:lnSpc>
+                <a:spcPct val="130000"/>
+              </a:lnSpc>
+              <a:spcBef>
+                <a:spcPts val="600"/>
+              </a:spcBef>
+            </a:pPr>
+            <a:r>
+              <a:rPr sz="1050" b="0">
+                <a:solidFill>
+                  <a:srgbClr val="6E6E73"/>
+                </a:solidFill>
+                <a:latin typeface="Arial"/>
+              </a:rPr>
+              <a:t>Los documentos DIN y FVA se quedan fuera del paquete por lista blanca, no por descuido.</a:t>
+            </a:r>
+          </a:p>
+        </p:txBody>
+      </p:sp>
+      <p:sp>
+        <p:nvSpPr>
+          <p:cNvPr id="16" name="TextBox 15"/>
+          <p:cNvSpPr txBox="1"/>
+          <p:nvPr/>
+        </p:nvSpPr>
+        <p:spPr>
+          <a:xfrm>
+            <a:off x="10500055" y="6345936"/>
+            <a:ext cx="914400" cy="274320"/>
+          </a:xfrm>
+          <a:prstGeom prst="rect">
+            <a:avLst/>
+          </a:prstGeom>
+          <a:noFill/>
+        </p:spPr>
+        <p:txBody>
+          <a:bodyPr wrap="square" anchor="t" lIns="0" rIns="0" tIns="0" bIns="0">
+            <a:spAutoFit/>
+          </a:bodyPr>
+          <a:lstStyle/>
+          <a:p>
+            <a:pPr algn="l">
+              <a:lnSpc>
+                <a:spcPct val="100000"/>
+              </a:lnSpc>
+            </a:pPr>
+            <a:r>
+              <a:rPr sz="1000" b="0">
+                <a:solidFill>
+                  <a:srgbClr val="86868B"/>
+                </a:solidFill>
+                <a:latin typeface="Arial"/>
+              </a:rPr>
+              <a:t>35</a:t>
+            </a:r>
+          </a:p>
+        </p:txBody>
+      </p:sp>
+    </p:spTree>
+  </p:cSld>
+  <p:clrMapOvr>
+    <a:masterClrMapping/>
+  </p:clrMapOvr>
+</p:sld>
+</file>
+
+<file path=ppt/slides/slide36.xml><?xml version="1.0" encoding="utf-8"?>
+<p:sld xmlns:a="http://schemas.openxmlformats.org/drawingml/2006/main" xmlns:p="http://schemas.openxmlformats.org/presentationml/2006/main" xmlns:r="http://schemas.openxmlformats.org/officeDocument/2006/relationships">
+  <p:cSld>
+    <p:bg>
+      <p:bgPr>
+        <a:solidFill>
+          <a:srgbClr val="FFFFFF"/>
+        </a:solidFill>
+        <a:effectLst/>
+      </p:bgPr>
+    </p:bg>
+    <p:spTree>
+      <p:nvGrpSpPr>
+        <p:cNvPr id="1" name=""/>
+        <p:cNvGrpSpPr/>
+        <p:nvPr/>
+      </p:nvGrpSpPr>
+      <p:grpSpPr/>
+      <p:sp>
+        <p:nvSpPr>
+          <p:cNvPr id="2" name="TextBox 1"/>
+          <p:cNvSpPr txBox="1"/>
+          <p:nvPr/>
+        </p:nvSpPr>
+        <p:spPr>
+          <a:xfrm>
+            <a:off x="777240" y="566928"/>
+            <a:ext cx="10637215" cy="292608"/>
+          </a:xfrm>
+          <a:prstGeom prst="rect">
+            <a:avLst/>
+          </a:prstGeom>
+          <a:noFill/>
+        </p:spPr>
+        <p:txBody>
+          <a:bodyPr wrap="square" anchor="t" lIns="0" rIns="0" tIns="0" bIns="0">
+            <a:spAutoFit/>
+          </a:bodyPr>
+          <a:lstStyle/>
+          <a:p>
+            <a:pPr algn="l">
+              <a:lnSpc>
+                <a:spcPct val="100000"/>
+              </a:lnSpc>
+            </a:pPr>
+            <a:r>
+              <a:rPr sz="1150" b="1">
+                <a:solidFill>
+                  <a:srgbClr val="0071E3"/>
+                </a:solidFill>
+                <a:latin typeface="Arial"/>
+              </a:rPr>
+              <a:t>DISTRIBUCIÓN</a:t>
+            </a:r>
+          </a:p>
+        </p:txBody>
+      </p:sp>
+      <p:pic>
+        <p:nvPicPr>
+          <p:cNvPr id="3" name="Picture 2" descr="dia_release.png"/>
+          <p:cNvPicPr>
+            <a:picLocks noChangeAspect="1"/>
+          </p:cNvPicPr>
+          <p:nvPr/>
+        </p:nvPicPr>
+        <p:blipFill>
+          <a:blip r:embed="rId2"/>
+          <a:stretch>
+            <a:fillRect/>
+          </a:stretch>
+        </p:blipFill>
+        <p:spPr>
+          <a:xfrm>
+            <a:off x="777240" y="1556351"/>
+            <a:ext cx="10637215" cy="3955610"/>
+          </a:xfrm>
+          <a:prstGeom prst="rect">
+            <a:avLst/>
+          </a:prstGeom>
+        </p:spPr>
+      </p:pic>
+      <p:sp>
+        <p:nvSpPr>
+          <p:cNvPr id="4" name="TextBox 3"/>
+          <p:cNvSpPr txBox="1"/>
+          <p:nvPr/>
+        </p:nvSpPr>
+        <p:spPr>
+          <a:xfrm>
+            <a:off x="10500055" y="6345936"/>
+            <a:ext cx="914400" cy="274320"/>
+          </a:xfrm>
+          <a:prstGeom prst="rect">
+            <a:avLst/>
+          </a:prstGeom>
+          <a:noFill/>
+        </p:spPr>
+        <p:txBody>
+          <a:bodyPr wrap="square" anchor="t" lIns="0" rIns="0" tIns="0" bIns="0">
+            <a:spAutoFit/>
+          </a:bodyPr>
+          <a:lstStyle/>
+          <a:p>
+            <a:pPr algn="l">
+              <a:lnSpc>
+                <a:spcPct val="100000"/>
+              </a:lnSpc>
+            </a:pPr>
+            <a:r>
+              <a:rPr sz="1000" b="0">
+                <a:solidFill>
+                  <a:srgbClr val="86868B"/>
+                </a:solidFill>
+                <a:latin typeface="Arial"/>
+              </a:rPr>
+              <a:t>36</a:t>
+            </a:r>
+          </a:p>
+        </p:txBody>
+      </p:sp>
+    </p:spTree>
+  </p:cSld>
+  <p:clrMapOvr>
+    <a:masterClrMapping/>
+  </p:clrMapOvr>
+</p:sld>
+</file>
+
+<file path=ppt/slides/slide37.xml><?xml version="1.0" encoding="utf-8"?>
+<p:sld xmlns:a="http://schemas.openxmlformats.org/drawingml/2006/main" xmlns:p="http://schemas.openxmlformats.org/presentationml/2006/main" xmlns:r="http://schemas.openxmlformats.org/officeDocument/2006/relationships">
+  <p:cSld>
+    <p:bg>
+      <p:bgPr>
+        <a:solidFill>
+          <a:srgbClr val="FFFFFF"/>
+        </a:solidFill>
+        <a:effectLst/>
+      </p:bgPr>
+    </p:bg>
+    <p:spTree>
+      <p:nvGrpSpPr>
+        <p:cNvPr id="1" name=""/>
+        <p:cNvGrpSpPr/>
+        <p:nvPr/>
+      </p:nvGrpSpPr>
+      <p:grpSpPr/>
+      <p:sp>
+        <p:nvSpPr>
+          <p:cNvPr id="2" name="TextBox 1"/>
+          <p:cNvSpPr txBox="1"/>
+          <p:nvPr/>
+        </p:nvSpPr>
+        <p:spPr>
+          <a:xfrm>
+            <a:off x="777240" y="566928"/>
+            <a:ext cx="10637215" cy="292608"/>
+          </a:xfrm>
+          <a:prstGeom prst="rect">
+            <a:avLst/>
+          </a:prstGeom>
+          <a:noFill/>
+        </p:spPr>
+        <p:txBody>
+          <a:bodyPr wrap="square" anchor="t" lIns="0" rIns="0" tIns="0" bIns="0">
+            <a:spAutoFit/>
+          </a:bodyPr>
+          <a:lstStyle/>
+          <a:p>
+            <a:pPr algn="l">
+              <a:lnSpc>
+                <a:spcPct val="100000"/>
+              </a:lnSpc>
+            </a:pPr>
+            <a:r>
+              <a:rPr sz="1150" b="1">
+                <a:solidFill>
+                  <a:srgbClr val="0071E3"/>
+                </a:solidFill>
+                <a:latin typeface="Arial"/>
+              </a:rPr>
+              <a:t>ESTADO</a:t>
+            </a:r>
+          </a:p>
+        </p:txBody>
+      </p:sp>
+      <p:pic>
+        <p:nvPicPr>
+          <p:cNvPr id="3" name="Picture 2" descr="dia_estado.png"/>
+          <p:cNvPicPr>
+            <a:picLocks noChangeAspect="1"/>
+          </p:cNvPicPr>
+          <p:nvPr/>
+        </p:nvPicPr>
+        <p:blipFill>
+          <a:blip r:embed="rId2"/>
+          <a:stretch>
+            <a:fillRect/>
+          </a:stretch>
+        </p:blipFill>
+        <p:spPr>
+          <a:xfrm>
+            <a:off x="1372101" y="1170432"/>
+            <a:ext cx="9447492" cy="4727448"/>
+          </a:xfrm>
+          <a:prstGeom prst="rect">
+            <a:avLst/>
+          </a:prstGeom>
+        </p:spPr>
+      </p:pic>
+      <p:sp>
+        <p:nvSpPr>
+          <p:cNvPr id="4" name="TextBox 3"/>
+          <p:cNvSpPr txBox="1"/>
+          <p:nvPr/>
+        </p:nvSpPr>
+        <p:spPr>
+          <a:xfrm>
+            <a:off x="10500055" y="6345936"/>
+            <a:ext cx="914400" cy="274320"/>
+          </a:xfrm>
+          <a:prstGeom prst="rect">
+            <a:avLst/>
+          </a:prstGeom>
+          <a:noFill/>
+        </p:spPr>
+        <p:txBody>
+          <a:bodyPr wrap="square" anchor="t" lIns="0" rIns="0" tIns="0" bIns="0">
+            <a:spAutoFit/>
+          </a:bodyPr>
+          <a:lstStyle/>
+          <a:p>
+            <a:pPr algn="l">
+              <a:lnSpc>
+                <a:spcPct val="100000"/>
+              </a:lnSpc>
+            </a:pPr>
+            <a:r>
+              <a:rPr sz="1000" b="0">
+                <a:solidFill>
+                  <a:srgbClr val="86868B"/>
+                </a:solidFill>
+                <a:latin typeface="Arial"/>
+              </a:rPr>
+              <a:t>37</a:t>
+            </a:r>
+          </a:p>
+        </p:txBody>
+      </p:sp>
+    </p:spTree>
+  </p:cSld>
+  <p:clrMapOvr>
+    <a:masterClrMapping/>
+  </p:clrMapOvr>
+</p:sld>
+</file>
+
+<file path=ppt/slides/slide38.xml><?xml version="1.0" encoding="utf-8"?>
+<p:sld xmlns:a="http://schemas.openxmlformats.org/drawingml/2006/main" xmlns:p="http://schemas.openxmlformats.org/presentationml/2006/main" xmlns:r="http://schemas.openxmlformats.org/officeDocument/2006/relationships">
+  <p:cSld>
+    <p:bg>
+      <p:bgPr>
+        <a:solidFill>
+          <a:srgbClr val="0A0A0C"/>
+        </a:solidFill>
+        <a:effectLst/>
+      </p:bgPr>
+    </p:bg>
+    <p:spTree>
+      <p:nvGrpSpPr>
+        <p:cNvPr id="1" name=""/>
+        <p:cNvGrpSpPr/>
+        <p:nvPr/>
+      </p:nvGrpSpPr>
+      <p:grpSpPr/>
+      <p:sp>
+        <p:nvSpPr>
+          <p:cNvPr id="2" name="TextBox 1"/>
+          <p:cNvSpPr txBox="1"/>
+          <p:nvPr/>
+        </p:nvSpPr>
+        <p:spPr>
+          <a:xfrm>
+            <a:off x="777240" y="566928"/>
+            <a:ext cx="10637215" cy="292608"/>
+          </a:xfrm>
+          <a:prstGeom prst="rect">
+            <a:avLst/>
+          </a:prstGeom>
+          <a:noFill/>
+        </p:spPr>
+        <p:txBody>
+          <a:bodyPr wrap="square" anchor="t" lIns="0" rIns="0" tIns="0" bIns="0">
+            <a:spAutoFit/>
+          </a:bodyPr>
+          <a:lstStyle/>
+          <a:p>
+            <a:pPr algn="l">
+              <a:lnSpc>
+                <a:spcPct val="100000"/>
+              </a:lnSpc>
+            </a:pPr>
+            <a:r>
+              <a:rPr sz="1150" b="1">
+                <a:solidFill>
+                  <a:srgbClr val="2997FF"/>
+                </a:solidFill>
+                <a:latin typeface="Arial"/>
+              </a:rPr>
+              <a:t>PRÓXIMOS PASOS</a:t>
+            </a:r>
+          </a:p>
+        </p:txBody>
+      </p:sp>
+      <p:sp>
+        <p:nvSpPr>
+          <p:cNvPr id="3" name="TextBox 2"/>
+          <p:cNvSpPr txBox="1"/>
+          <p:nvPr/>
+        </p:nvSpPr>
+        <p:spPr>
+          <a:xfrm>
+            <a:off x="777240" y="932688"/>
+            <a:ext cx="10637215" cy="914400"/>
+          </a:xfrm>
+          <a:prstGeom prst="rect">
+            <a:avLst/>
+          </a:prstGeom>
+          <a:noFill/>
+        </p:spPr>
+        <p:txBody>
+          <a:bodyPr wrap="square" anchor="t" lIns="0" rIns="0" tIns="0" bIns="0">
+            <a:spAutoFit/>
+          </a:bodyPr>
+          <a:lstStyle/>
+          <a:p>
+            <a:pPr algn="l">
+              <a:lnSpc>
+                <a:spcPct val="95000"/>
+              </a:lnSpc>
+            </a:pPr>
+            <a:r>
+              <a:rPr sz="3600" b="1">
+                <a:solidFill>
+                  <a:srgbClr val="FFFFFF"/>
+                </a:solidFill>
+                <a:latin typeface="Arial"/>
+              </a:rPr>
+              <a:t>Tres decisiones y una compilación</a:t>
+            </a:r>
+          </a:p>
+        </p:txBody>
+      </p:sp>
+      <p:sp>
+        <p:nvSpPr>
+          <p:cNvPr id="4" name="TextBox 3"/>
+          <p:cNvSpPr txBox="1"/>
+          <p:nvPr/>
+        </p:nvSpPr>
+        <p:spPr>
+          <a:xfrm>
+            <a:off x="777240" y="2468880"/>
+            <a:ext cx="914400" cy="548640"/>
+          </a:xfrm>
+          <a:prstGeom prst="rect">
+            <a:avLst/>
+          </a:prstGeom>
+          <a:noFill/>
+        </p:spPr>
+        <p:txBody>
+          <a:bodyPr wrap="square" anchor="t" lIns="0" rIns="0" tIns="0" bIns="0">
+            <a:spAutoFit/>
+          </a:bodyPr>
+          <a:lstStyle/>
+          <a:p>
+            <a:pPr algn="l">
+              <a:lnSpc>
+                <a:spcPct val="100000"/>
+              </a:lnSpc>
+            </a:pPr>
+            <a:r>
+              <a:rPr sz="1700" b="1">
+                <a:solidFill>
+                  <a:srgbClr val="2997FF"/>
+                </a:solidFill>
+                <a:latin typeface="Arial"/>
+              </a:rPr>
+              <a:t>01</a:t>
+            </a:r>
+          </a:p>
+        </p:txBody>
+      </p:sp>
+      <p:sp>
+        <p:nvSpPr>
+          <p:cNvPr id="5" name="TextBox 4"/>
+          <p:cNvSpPr txBox="1"/>
+          <p:nvPr/>
+        </p:nvSpPr>
+        <p:spPr>
+          <a:xfrm>
+            <a:off x="1783080" y="2468880"/>
+            <a:ext cx="9601200" cy="1188720"/>
+          </a:xfrm>
+          <a:prstGeom prst="rect">
+            <a:avLst/>
+          </a:prstGeom>
+          <a:noFill/>
+        </p:spPr>
+        <p:txBody>
+          <a:bodyPr wrap="square" anchor="t" lIns="0" rIns="0" tIns="0" bIns="0">
+            <a:spAutoFit/>
+          </a:bodyPr>
+          <a:lstStyle/>
+          <a:p>
+            <a:pPr algn="l">
+              <a:lnSpc>
+                <a:spcPct val="105000"/>
+              </a:lnSpc>
+            </a:pPr>
+            <a:r>
+              <a:rPr sz="1900" b="1">
+                <a:solidFill>
+                  <a:srgbClr val="FFFFFF"/>
+                </a:solidFill>
+                <a:latin typeface="Arial"/>
+              </a:rPr>
+              <a:t>Reconstruir el ejecutable</a:t>
+            </a:r>
+          </a:p>
+          <a:p>
+            <a:pPr algn="l">
+              <a:lnSpc>
+                <a:spcPct val="135000"/>
+              </a:lnSpc>
+              <a:spcBef>
+                <a:spcPts val="700"/>
+              </a:spcBef>
+            </a:pPr>
+            <a:r>
+              <a:rPr sz="1250" b="0">
+                <a:solidFill>
+                  <a:srgbClr val="9E9EA7"/>
+                </a:solidFill>
+                <a:latin typeface="Arial"/>
+              </a:rPr>
+              <a:t>make_exe.bat, sin cambios, desde el árbol completo del proyecto. El .exe publicado es anterior a las dos correcciones: 17 de 31 entradas del manifiesto han cambiado.</a:t>
+            </a:r>
+          </a:p>
+        </p:txBody>
+      </p:sp>
+      <p:sp>
+        <p:nvSpPr>
+          <p:cNvPr id="6" name="Rectangle 5"/>
+          <p:cNvSpPr/>
+          <p:nvPr/>
+        </p:nvSpPr>
+        <p:spPr>
+          <a:xfrm>
+            <a:off x="777240" y="2249424"/>
+            <a:ext cx="10637215" cy="12700"/>
+          </a:xfrm>
+          <a:prstGeom prst="rect">
+            <a:avLst/>
+          </a:prstGeom>
+          <a:solidFill>
+            <a:srgbClr val="2A2A30"/>
+          </a:solidFill>
+          <a:ln>
+            <a:noFill/>
+          </a:ln>
+          <a:effectLst/>
+        </p:spPr>
+        <p:style>
+          <a:lnRef idx="1">
+            <a:schemeClr val="accent1"/>
+          </a:lnRef>
+          <a:fillRef idx="3">
+            <a:schemeClr val="accent1"/>
+          </a:fillRef>
+          <a:effectRef idx="2">
+            <a:schemeClr val="accent1"/>
+          </a:effectRef>
+          <a:fontRef idx="minor">
+            <a:schemeClr val="lt1"/>
+          </a:fontRef>
+        </p:style>
+        <p:txBody>
+          <a:bodyPr rtlCol="0" anchor="ctr"/>
+          <a:lstStyle/>
+          <a:p>
+            <a:pPr algn="ctr"/>
+          </a:p>
+        </p:txBody>
+      </p:sp>
+      <p:sp>
+        <p:nvSpPr>
+          <p:cNvPr id="7" name="TextBox 6"/>
+          <p:cNvSpPr txBox="1"/>
+          <p:nvPr/>
+        </p:nvSpPr>
+        <p:spPr>
+          <a:xfrm>
+            <a:off x="777240" y="3767328"/>
+            <a:ext cx="914400" cy="548640"/>
+          </a:xfrm>
+          <a:prstGeom prst="rect">
+            <a:avLst/>
+          </a:prstGeom>
+          <a:noFill/>
+        </p:spPr>
+        <p:txBody>
+          <a:bodyPr wrap="square" anchor="t" lIns="0" rIns="0" tIns="0" bIns="0">
+            <a:spAutoFit/>
+          </a:bodyPr>
+          <a:lstStyle/>
+          <a:p>
+            <a:pPr algn="l">
+              <a:lnSpc>
+                <a:spcPct val="100000"/>
+              </a:lnSpc>
+            </a:pPr>
+            <a:r>
+              <a:rPr sz="1700" b="1">
+                <a:solidFill>
+                  <a:srgbClr val="2997FF"/>
+                </a:solidFill>
+                <a:latin typeface="Arial"/>
+              </a:rPr>
+              <a:t>02</a:t>
+            </a:r>
+          </a:p>
+        </p:txBody>
+      </p:sp>
+      <p:sp>
+        <p:nvSpPr>
+          <p:cNvPr id="8" name="TextBox 7"/>
+          <p:cNvSpPr txBox="1"/>
+          <p:nvPr/>
+        </p:nvSpPr>
+        <p:spPr>
+          <a:xfrm>
+            <a:off x="1783080" y="3767328"/>
+            <a:ext cx="9601200" cy="1188720"/>
+          </a:xfrm>
+          <a:prstGeom prst="rect">
+            <a:avLst/>
+          </a:prstGeom>
+          <a:noFill/>
+        </p:spPr>
+        <p:txBody>
+          <a:bodyPr wrap="square" anchor="t" lIns="0" rIns="0" tIns="0" bIns="0">
+            <a:spAutoFit/>
+          </a:bodyPr>
+          <a:lstStyle/>
+          <a:p>
+            <a:pPr algn="l">
+              <a:lnSpc>
+                <a:spcPct val="105000"/>
+              </a:lnSpc>
+            </a:pPr>
+            <a:r>
+              <a:rPr sz="1900" b="1">
+                <a:solidFill>
+                  <a:srgbClr val="FFFFFF"/>
+                </a:solidFill>
+                <a:latin typeface="Arial"/>
+              </a:rPr>
+              <a:t>Fijar el signo de la ecuación 9</a:t>
+            </a:r>
+          </a:p>
+          <a:p>
+            <a:pPr algn="l">
+              <a:lnSpc>
+                <a:spcPct val="135000"/>
+              </a:lnSpc>
+              <a:spcBef>
+                <a:spcPts val="700"/>
+              </a:spcBef>
+            </a:pPr>
+            <a:r>
+              <a:rPr sz="1250" b="0">
+                <a:solidFill>
+                  <a:srgbClr val="9E9EA7"/>
+                </a:solidFill>
+                <a:latin typeface="Arial"/>
+              </a:rPr>
+              <a:t>contra el texto DIN 6892 con licencia. Si el signo negativo es el correcto, el par admisible real baja otro 46 %.</a:t>
+            </a:r>
+          </a:p>
+        </p:txBody>
+      </p:sp>
+      <p:sp>
+        <p:nvSpPr>
+          <p:cNvPr id="9" name="Rectangle 8"/>
+          <p:cNvSpPr/>
+          <p:nvPr/>
+        </p:nvSpPr>
+        <p:spPr>
+          <a:xfrm>
+            <a:off x="777240" y="3547872"/>
+            <a:ext cx="10637215" cy="12700"/>
+          </a:xfrm>
+          <a:prstGeom prst="rect">
+            <a:avLst/>
+          </a:prstGeom>
+          <a:solidFill>
+            <a:srgbClr val="2A2A30"/>
+          </a:solidFill>
+          <a:ln>
+            <a:noFill/>
+          </a:ln>
+          <a:effectLst/>
+        </p:spPr>
+        <p:style>
+          <a:lnRef idx="1">
+            <a:schemeClr val="accent1"/>
+          </a:lnRef>
+          <a:fillRef idx="3">
+            <a:schemeClr val="accent1"/>
+          </a:fillRef>
+          <a:effectRef idx="2">
+            <a:schemeClr val="accent1"/>
+          </a:effectRef>
+          <a:fontRef idx="minor">
+            <a:schemeClr val="lt1"/>
+          </a:fontRef>
+        </p:style>
+        <p:txBody>
+          <a:bodyPr rtlCol="0" anchor="ctr"/>
+          <a:lstStyle/>
+          <a:p>
+            <a:pPr algn="ctr"/>
+          </a:p>
+        </p:txBody>
+      </p:sp>
+      <p:sp>
+        <p:nvSpPr>
+          <p:cNvPr id="10" name="TextBox 9"/>
+          <p:cNvSpPr txBox="1"/>
+          <p:nvPr/>
+        </p:nvSpPr>
+        <p:spPr>
+          <a:xfrm>
+            <a:off x="777240" y="5065776"/>
+            <a:ext cx="914400" cy="548640"/>
+          </a:xfrm>
+          <a:prstGeom prst="rect">
+            <a:avLst/>
+          </a:prstGeom>
+          <a:noFill/>
+        </p:spPr>
+        <p:txBody>
+          <a:bodyPr wrap="square" anchor="t" lIns="0" rIns="0" tIns="0" bIns="0">
+            <a:spAutoFit/>
+          </a:bodyPr>
+          <a:lstStyle/>
+          <a:p>
+            <a:pPr algn="l">
+              <a:lnSpc>
+                <a:spcPct val="100000"/>
+              </a:lnSpc>
+            </a:pPr>
+            <a:r>
+              <a:rPr sz="1700" b="1">
+                <a:solidFill>
+                  <a:srgbClr val="2997FF"/>
+                </a:solidFill>
+                <a:latin typeface="Arial"/>
+              </a:rPr>
               <a:t>03</a:t>
+            </a:r>
+          </a:p>
+        </p:txBody>
+      </p:sp>
+      <p:sp>
+        <p:nvSpPr>
+          <p:cNvPr id="11" name="TextBox 10"/>
+          <p:cNvSpPr txBox="1"/>
+          <p:nvPr/>
+        </p:nvSpPr>
+        <p:spPr>
+          <a:xfrm>
+            <a:off x="1783080" y="5065776"/>
+            <a:ext cx="9601200" cy="1188720"/>
+          </a:xfrm>
+          <a:prstGeom prst="rect">
+            <a:avLst/>
+          </a:prstGeom>
+          <a:noFill/>
+        </p:spPr>
+        <p:txBody>
+          <a:bodyPr wrap="square" anchor="t" lIns="0" rIns="0" tIns="0" bIns="0">
+            <a:spAutoFit/>
+          </a:bodyPr>
+          <a:lstStyle/>
+          <a:p>
+            <a:pPr algn="l">
+              <a:lnSpc>
+                <a:spcPct val="105000"/>
+              </a:lnSpc>
+            </a:pPr>
+            <a:r>
+              <a:rPr sz="1900" b="1">
+                <a:solidFill>
+                  <a:srgbClr val="FFFFFF"/>
+                </a:solidFill>
+                <a:latin typeface="Arial"/>
+              </a:rPr>
+              <a:t>Numerar la versión</a:t>
+            </a:r>
+          </a:p>
+          <a:p>
+            <a:pPr algn="l">
+              <a:lnSpc>
+                <a:spcPct val="135000"/>
+              </a:lnSpc>
+              <a:spcBef>
+                <a:spcPts val="700"/>
+              </a:spcBef>
+            </a:pPr>
+            <a:r>
+              <a:rPr sz="1250" b="0">
+                <a:solidFill>
+                  <a:srgbClr val="9E9EA7"/>
+                </a:solidFill>
+                <a:latin typeface="Arial"/>
+              </a:rPr>
+              <a:t>dos ejecutables que se identifican como 4.2 y devuelven pares distintos son una colisión de identidad. Mi recomendación es 4.3.</a:t>
+            </a:r>
+          </a:p>
+        </p:txBody>
+      </p:sp>
+      <p:sp>
+        <p:nvSpPr>
+          <p:cNvPr id="12" name="Rectangle 11"/>
+          <p:cNvSpPr/>
+          <p:nvPr/>
+        </p:nvSpPr>
+        <p:spPr>
+          <a:xfrm>
+            <a:off x="777240" y="4846320"/>
+            <a:ext cx="10637215" cy="12700"/>
+          </a:xfrm>
+          <a:prstGeom prst="rect">
+            <a:avLst/>
+          </a:prstGeom>
+          <a:solidFill>
+            <a:srgbClr val="2A2A30"/>
+          </a:solidFill>
+          <a:ln>
+            <a:noFill/>
+          </a:ln>
+          <a:effectLst/>
+        </p:spPr>
+        <p:style>
+          <a:lnRef idx="1">
+            <a:schemeClr val="accent1"/>
+          </a:lnRef>
+          <a:fillRef idx="3">
+            <a:schemeClr val="accent1"/>
+          </a:fillRef>
+          <a:effectRef idx="2">
+            <a:schemeClr val="accent1"/>
+          </a:effectRef>
+          <a:fontRef idx="minor">
+            <a:schemeClr val="lt1"/>
+          </a:fontRef>
+        </p:style>
+        <p:txBody>
+          <a:bodyPr rtlCol="0" anchor="ctr"/>
+          <a:lstStyle/>
+          <a:p>
+            <a:pPr algn="ctr"/>
+          </a:p>
+        </p:txBody>
+      </p:sp>
+      <p:sp>
+        <p:nvSpPr>
+          <p:cNvPr id="13" name="TextBox 12"/>
+          <p:cNvSpPr txBox="1"/>
+          <p:nvPr/>
+        </p:nvSpPr>
+        <p:spPr>
+          <a:xfrm>
+            <a:off x="10500055" y="6345936"/>
+            <a:ext cx="914400" cy="274320"/>
+          </a:xfrm>
+          <a:prstGeom prst="rect">
+            <a:avLst/>
+          </a:prstGeom>
+          <a:noFill/>
+        </p:spPr>
+        <p:txBody>
+          <a:bodyPr wrap="square" anchor="t" lIns="0" rIns="0" tIns="0" bIns="0">
+            <a:spAutoFit/>
+          </a:bodyPr>
+          <a:lstStyle/>
+          <a:p>
+            <a:pPr algn="l">
+              <a:lnSpc>
+                <a:spcPct val="100000"/>
+              </a:lnSpc>
+            </a:pPr>
+            <a:r>
+              <a:rPr sz="1000" b="0">
+                <a:solidFill>
+                  <a:srgbClr val="9E9EA7"/>
+                </a:solidFill>
+                <a:latin typeface="Arial"/>
+              </a:rPr>
+              <a:t>38</a:t>
+            </a:r>
+          </a:p>
+        </p:txBody>
+      </p:sp>
+    </p:spTree>
+  </p:cSld>
+  <p:clrMapOvr>
+    <a:masterClrMapping/>
+  </p:clrMapOvr>
+</p:sld>
+</file>
+
+<file path=ppt/slides/slide39.xml><?xml version="1.0" encoding="utf-8"?>
+<p:sld xmlns:a="http://schemas.openxmlformats.org/drawingml/2006/main" xmlns:p="http://schemas.openxmlformats.org/presentationml/2006/main" xmlns:r="http://schemas.openxmlformats.org/officeDocument/2006/relationships">
+  <p:cSld>
+    <p:bg>
+      <p:bgPr>
+        <a:solidFill>
+          <a:srgbClr val="0A0A0C"/>
+        </a:solidFill>
+        <a:effectLst/>
+      </p:bgPr>
+    </p:bg>
+    <p:spTree>
+      <p:nvGrpSpPr>
+        <p:cNvPr id="1" name=""/>
+        <p:cNvGrpSpPr/>
+        <p:nvPr/>
+      </p:nvGrpSpPr>
+      <p:grpSpPr/>
+      <p:sp>
+        <p:nvSpPr>
+          <p:cNvPr id="2" name="TextBox 1"/>
+          <p:cNvSpPr txBox="1"/>
+          <p:nvPr/>
+        </p:nvSpPr>
+        <p:spPr>
+          <a:xfrm>
+            <a:off x="777240" y="2286000"/>
+            <a:ext cx="10058400" cy="2377440"/>
+          </a:xfrm>
+          <a:prstGeom prst="rect">
+            <a:avLst/>
+          </a:prstGeom>
+          <a:noFill/>
+        </p:spPr>
+        <p:txBody>
+          <a:bodyPr wrap="square" anchor="t" lIns="0" rIns="0" tIns="0" bIns="0">
+            <a:spAutoFit/>
+          </a:bodyPr>
+          <a:lstStyle/>
+          <a:p>
+            <a:pPr algn="l">
+              <a:lnSpc>
+                <a:spcPct val="110000"/>
+              </a:lnSpc>
+            </a:pPr>
+            <a:r>
+              <a:rPr sz="3600" b="1">
+                <a:solidFill>
+                  <a:srgbClr val="FFFFFF"/>
+                </a:solidFill>
+                <a:latin typeface="Arial"/>
+              </a:rPr>
+              <a:t>El valor no está en el modelo.
+Está en poder demostrar cómo se hizo.</a:t>
+            </a:r>
+          </a:p>
+        </p:txBody>
+      </p:sp>
+      <p:sp>
+        <p:nvSpPr>
+          <p:cNvPr id="3" name="TextBox 2"/>
+          <p:cNvSpPr txBox="1"/>
+          <p:nvPr/>
+        </p:nvSpPr>
+        <p:spPr>
+          <a:xfrm>
+            <a:off x="777240" y="5120640"/>
+            <a:ext cx="10058400" cy="1097280"/>
+          </a:xfrm>
+          <a:prstGeom prst="rect">
+            <a:avLst/>
+          </a:prstGeom>
+          <a:noFill/>
+        </p:spPr>
+        <p:txBody>
+          <a:bodyPr wrap="square" anchor="t" lIns="0" rIns="0" tIns="0" bIns="0">
+            <a:spAutoFit/>
+          </a:bodyPr>
+          <a:lstStyle/>
+          <a:p>
+            <a:pPr algn="l">
+              <a:lnSpc>
+                <a:spcPct val="100000"/>
+              </a:lnSpc>
+            </a:pPr>
+            <a:r>
+              <a:rPr sz="1250" b="0">
+                <a:solidFill>
+                  <a:srgbClr val="9E9EA7"/>
+                </a:solidFill>
+                <a:latin typeface="Arial"/>
+              </a:rPr>
+              <a:t>Model Builder 4.2  ·  esquema de parámetros 6  ·  din6892-methods-1.0  ·  auto-mesh-2.0</a:t>
+            </a:r>
+          </a:p>
+          <a:p>
+            <a:pPr algn="l">
+              <a:lnSpc>
+                <a:spcPct val="100000"/>
+              </a:lnSpc>
+              <a:spcBef>
+                <a:spcPts val="800"/>
+              </a:spcBef>
+            </a:pPr>
+            <a:r>
+              <a:rPr sz="1250" b="0">
+                <a:solidFill>
+                  <a:srgbClr val="7C7C86"/>
+                </a:solidFill>
+                <a:latin typeface="Arial"/>
+              </a:rPr>
+              <a:t>Cada número de esta presentación es reproducible ejecutando el código del repositorio.</a:t>
+            </a:r>
+          </a:p>
+        </p:txBody>
+      </p:sp>
+      <p:sp>
+        <p:nvSpPr>
+          <p:cNvPr id="4" name="TextBox 3"/>
+          <p:cNvSpPr txBox="1"/>
+          <p:nvPr/>
+        </p:nvSpPr>
+        <p:spPr>
+          <a:xfrm>
+            <a:off x="10500055" y="6345936"/>
+            <a:ext cx="914400" cy="274320"/>
+          </a:xfrm>
+          <a:prstGeom prst="rect">
+            <a:avLst/>
+          </a:prstGeom>
+          <a:noFill/>
+        </p:spPr>
+        <p:txBody>
+          <a:bodyPr wrap="square" anchor="t" lIns="0" rIns="0" tIns="0" bIns="0">
+            <a:spAutoFit/>
+          </a:bodyPr>
+          <a:lstStyle/>
+          <a:p>
+            <a:pPr algn="l">
+              <a:lnSpc>
+                <a:spcPct val="100000"/>
+              </a:lnSpc>
+            </a:pPr>
+            <a:r>
+              <a:rPr sz="1000" b="0">
+                <a:solidFill>
+                  <a:srgbClr val="9E9EA7"/>
+                </a:solidFill>
+                <a:latin typeface="Arial"/>
+              </a:rPr>
+              <a:t>39</a:t>
             </a:r>
           </a:p>
         </p:txBody>
@@ -10364,7 +16244,7 @@
                 </a:solidFill>
                 <a:latin typeface="Arial"/>
               </a:rPr>
-              <a:t>Las semillas en 0 significan automático: D/32 en el eje, b/20 en la chaveta, d_a/80 en el cubo.</a:t>
+              <a:t>Una semilla en 0 significa automático, y la regla sigue al refinamiento: con la banda de entalla activa son D/16 en el eje y d_a/40 en el cubo. La chaveta siempre b/20.</a:t>
             </a:r>
           </a:p>
           <a:p>

--- a/presentation/ModelBuilder_4.2_Presentacion.pptx
+++ b/presentation/ModelBuilder_4.2_Presentacion.pptx
@@ -4766,7 +4766,7 @@
                 </a:solidFill>
                 <a:latin typeface="Arial"/>
               </a:rPr>
-              <a:t>D40 pre-solve de 1 ciclo y Método A D40 con malla coincidente de 20 ciclos. Las dos con el solver deliberadamente apagado.</a:t>
+              <a:t>D40 pre-solve de 1 ciclo y configuración de Método A D40 de 20 ciclos con coincidencia a verificar durante el build. Las dos con el solver deliberadamente apagado.</a:t>
             </a:r>
           </a:p>
         </p:txBody>
@@ -6065,7 +6065,7 @@
                 </a:solidFill>
                 <a:latin typeface="Arial"/>
               </a:rPr>
-              <a:t>La malla es hexaédrica y coincidente en las interfaces que transmiten carga.</a:t>
+              <a:t>Esta evidencia muestra una malla hexaédrica. La coincidencia exacta de interfaces no se deduce de la imagen: el backend especializado de Método A la comprueba comparando coordenadas de nodos después de mallar.</a:t>
             </a:r>
           </a:p>
           <a:p>
@@ -12902,7 +12902,7 @@
                 </a:solidFill>
                 <a:latin typeface="Arial"/>
               </a:rPr>
-              <a:t>identidad 4.2 y esquema 6, migración 5→6, catálogos DIN y FVA, cálculos de referencia, seis plantillas de malla, informes en los tres idiomas. Termina con código 0.</a:t>
+              <a:t>identidad 4.2 y esquema 6, migración 5→6, catálogos DIN y FVA, cálculos de referencia, ocho plantillas de malla, informes en los tres idiomas. Termina con código 0.</a:t>
             </a:r>
           </a:p>
         </p:txBody>
@@ -13087,7 +13087,7 @@
                 </a:solidFill>
                 <a:latin typeface="Arial"/>
               </a:rPr>
-              <a:t>Los cuatro presets</a:t>
+              <a:t>Configuraciones vigiladas</a:t>
             </a:r>
           </a:p>
           <a:p>
@@ -13106,7 +13106,7 @@
                 </a:solidFill>
                 <a:latin typeface="Arial"/>
               </a:rPr>
-              <a:t>normalizan y validan con esquema 6 y cero errores, incluido el de resolución de 10 ciclos.</a:t>
+              <a:t>los valores por defecto y los dos compañeros FVA empaquetados se validan bajo esquema 6. La configuración de 10 ciclos del repositorio se valida por separado y no se empaqueta.</a:t>
             </a:r>
           </a:p>
         </p:txBody>
@@ -13310,7 +13310,7 @@
                 </a:solidFill>
                 <a:latin typeface="Arial"/>
               </a:rPr>
-              <a:t>el proyecto se declara correcto sólo si existen auditoría, BUILD_RESULT, CAE, capturas e informe, y si la malla realizada coincide con la planificada.</a:t>
+              <a:t>el proyecto se declara correcto sólo si existen la auditoría, BUILD_RESULT y todos los artefactos solicitados o requeridos, y si la malla realizada coincide con la planificada.</a:t>
             </a:r>
           </a:p>
         </p:txBody>
@@ -14855,7 +14855,7 @@
                 </a:solidFill>
                 <a:latin typeface="Arial"/>
               </a:rPr>
-              <a:t>contra el texto DIN 6892 con licencia. Si el signo negativo es el correcto, el par admisible real baja otro 46 %.</a:t>
+              <a:t>contra el texto DIN 6892 con licencia. El signo cambia un 46,35 % la profundidad y el componente del eje; en el D40 por defecto el cubo sigue gobernando a 999,18 N·m.</a:t>
             </a:r>
           </a:p>
         </p:txBody>
@@ -15203,7 +15203,7 @@
                 </a:solidFill>
                 <a:latin typeface="Arial"/>
               </a:rPr>
-              <a:t>Cada número de esta presentación es reproducible ejecutando el código del repositorio.</a:t>
+              <a:t>Cada cálculo se puede rastrear al código; las capturas y renders históricos se identifican como evidencia de origen.</a:t>
             </a:r>
           </a:p>
         </p:txBody>
